--- a/lecons/LSA/Meteorology/07_LSA_MET_L07_Geographical_Factors_Affecting_Temperature.pptx
+++ b/lecons/LSA/Meteorology/07_LSA_MET_L07_Geographical_Factors_Affecting_Temperature.pptx
@@ -65,9 +65,14 @@
     <p:sldId id="313" r:id="rId59"/>
     <p:sldId id="314" r:id="rId60"/>
     <p:sldId id="315" r:id="rId61"/>
+    <p:sldId id="316" r:id="rId62"/>
+    <p:sldId id="317" r:id="rId63"/>
+    <p:sldId id="318" r:id="rId64"/>
+    <p:sldId id="319" r:id="rId65"/>
+    <p:sldId id="320" r:id="rId66"/>
   </p:sldIdLst>
   <p:notesMasterIdLst>
-    <p:notesMasterId r:id="rId62"/>
+    <p:notesMasterId r:id="rId67"/>
   </p:notesMasterIdLst>
   <p:sldSz cx="12192000" cy="6858000"/>
   <p:notesSz cx="6858000" cy="12192000"/>
@@ -3113,7 +3118,7 @@
           <a:p>
             <a:r>
               <a:rPr lang="en-US" dirty="0"/>
-              <a:t>Let us copy the definitions. The key terms of this lesson are defined as follows. On this slide we have Continentality and Aspect. Write each point on a new line, with the key term first, and explain it in your own words when we revise. When you finish, we go to the next slide.</a:t>
+              <a:t>Let us copy the definitions. The key terms of this lesson are defined as follows. On this slide we have Continentality. Write each point on a new line, with the key term first, and explain it in your own words when we revise. When you finish, we go to the next slide.</a:t>
             </a:r>
             <a:endParaRPr lang="en-US" dirty="0"/>
           </a:p>
@@ -3201,7 +3206,7 @@
           <a:p>
             <a:r>
               <a:rPr lang="en-US" dirty="0"/>
-              <a:t>We continue with the definitions. On this slide we have Normal lapse rate and Urban heat island. Write each point on a new line, with the key term first, and explain it in your own words when we revise.</a:t>
+              <a:t>We continue with the definitions. On this slide we have Adret and Ubac. Write each point on a new line, with the key term first, and explain it in your own words when we revise. When you finish, we go to the next slide.</a:t>
             </a:r>
             <a:endParaRPr lang="en-US" dirty="0"/>
           </a:p>
@@ -3289,7 +3294,7 @@
           <a:p>
             <a:r>
               <a:rPr lang="en-US" dirty="0"/>
-              <a:t>Let us copy Nature of the Surface: Land and Water. Land and water influence temperature as follows. Copy the point on Land on the left, then draw the diagram on the right: coastal and inland temperatures. Give it a title and label it clearly.</a:t>
+              <a:t>We continue with the definitions. On this slide we have Temperature lapsing and Heat island. Write each point on a new line, with the key term first, and explain it in your own words when we revise.</a:t>
             </a:r>
             <a:endParaRPr lang="en-US" dirty="0"/>
           </a:p>
@@ -3377,7 +3382,7 @@
           <a:p>
             <a:r>
               <a:rPr lang="en-US" dirty="0"/>
-              <a:t>We continue with Nature of the Surface: Land and Water. On this slide we have Water and Maritime influence. Write each point on a new line, with the key term first, and explain it in your own words when we revise. When you finish, we go to the next slide.</a:t>
+              <a:t>Let us copy Nature of the Surface. The nature of the surface influences temperature in the following ways. Copy the point on Land surfaces on the left, then draw the diagram on the right: land and sea. Give it a title and label it clearly.</a:t>
             </a:r>
             <a:endParaRPr lang="en-US" dirty="0"/>
           </a:p>
@@ -3553,7 +3558,7 @@
           <a:p>
             <a:r>
               <a:rPr lang="en-US" dirty="0"/>
-              <a:t>We continue with Nature of the Surface: Land and Water. On this slide we have Continentality. Write each point on a new line, with the key term first, and explain it in your own words when we revise.</a:t>
+              <a:t>We continue with Nature of the Surface. Copy the point on Water surfaces: write the key term first, then its explanation.</a:t>
             </a:r>
             <a:endParaRPr lang="en-US" dirty="0"/>
           </a:p>
@@ -3641,7 +3646,7 @@
           <a:p>
             <a:r>
               <a:rPr lang="en-US" dirty="0"/>
-              <a:t>Let us copy Relief. Relief influences temperature as follows. Copy the point on Altitude on the left, then draw the diagram on the right: snow on Kilimanjaro. Give it a title and label it clearly.</a:t>
+              <a:t>We continue with Nature of the Surface. Copy the point on Distance from the sea: write the key term first, then its explanation.</a:t>
             </a:r>
             <a:endParaRPr lang="en-US" dirty="0"/>
           </a:p>
@@ -3729,7 +3734,7 @@
           <a:p>
             <a:r>
               <a:rPr lang="en-US" dirty="0"/>
-              <a:t>Copy the point on Aspect on the left, then draw the diagram on the right: the aspect of slopes. Give it a title and label it clearly.</a:t>
+              <a:t>Let us copy Relief. Relief influences temperature in the following ways. Copy the point on Altitude above sea level on the left, then draw the diagram on the right: a snow-capped mountain in the tropics. Give it a title and label it clearly.</a:t>
             </a:r>
             <a:endParaRPr lang="en-US" dirty="0"/>
           </a:p>
@@ -3817,7 +3822,7 @@
           <a:p>
             <a:r>
               <a:rPr lang="en-US" dirty="0"/>
-              <a:t>We continue with Relief. On this slide we have Valleys. Write each point on a new line, with the key term first, and explain it in your own words when we revise.</a:t>
+              <a:t>Copy the point on Aspect of slope on the left, then draw the diagram on the right: adret and ubac. Give it a title and label it clearly.</a:t>
             </a:r>
             <a:endParaRPr lang="en-US" dirty="0"/>
           </a:p>
@@ -3905,7 +3910,7 @@
           <a:p>
             <a:r>
               <a:rPr lang="en-US" dirty="0"/>
-              <a:t>Let us copy Ocean Currents, Winds and Clouds. Ocean currents, winds and clouds influence temperature as follows. Copy the point on Warm currents on the left, then draw the diagram on the right: ocean currents. Give it a title and label it clearly.</a:t>
+              <a:t>Let us copy Ocean Currents. Ocean currents influence temperature in the following ways. Copy the point on Warm currents on the left, then draw the diagram on the right: ocean currents. Give it a title and label it clearly.</a:t>
             </a:r>
             <a:endParaRPr lang="en-US" dirty="0"/>
           </a:p>
@@ -3993,7 +3998,7 @@
           <a:p>
             <a:r>
               <a:rPr lang="en-US" dirty="0"/>
-              <a:t>We continue with Ocean Currents, Winds and Clouds. On this slide we have Cold currents and Prevailing winds. Write each point on a new line, with the key term first, and explain it in your own words when we revise. When you finish, we go to the next slide.</a:t>
+              <a:t>We continue with Ocean Currents. Copy the point on Cold currents: write the key term first, then its explanation.</a:t>
             </a:r>
             <a:endParaRPr lang="en-US" dirty="0"/>
           </a:p>
@@ -4081,7 +4086,7 @@
           <a:p>
             <a:r>
               <a:rPr lang="en-US" dirty="0"/>
-              <a:t>We continue with Ocean Currents, Winds and Clouds. On this slide we have Cloud cover by day and Cloud cover by night. Write each point on a new line, with the key term first, and explain it in your own words when we revise.</a:t>
+              <a:t>Let us copy Prevailing Winds. Prevailing winds influence temperature in the following ways. Copy the point on Winds from warm regions on the left, then draw the diagram on the right: the Harmattan. Give it a title and label it clearly.</a:t>
             </a:r>
             <a:endParaRPr lang="en-US" dirty="0"/>
           </a:p>
@@ -4169,7 +4174,7 @@
           <a:p>
             <a:r>
               <a:rPr lang="en-US" dirty="0"/>
-              <a:t>Let us copy Urbanisation: the Urban Heat Island. Towns are warmer than the countryside for the following reasons. Copy the point on Surfaces on the left, then draw the diagram on the right: the urban heat island. Give it a title and label it clearly.</a:t>
+              <a:t>We continue with Prevailing Winds. Copy the point on Winds from the sea or cold regions: write the key term first, then its explanation.</a:t>
             </a:r>
             <a:endParaRPr lang="en-US" dirty="0"/>
           </a:p>
@@ -4257,7 +4262,7 @@
           <a:p>
             <a:r>
               <a:rPr lang="en-US" dirty="0"/>
-              <a:t>We continue with Urbanisation: the Urban Heat Island. On this slide we have Human heat, Lack of vegetation and Building shape. Write each point on a new line, with the key term first, and explain it in your own words when we revise.</a:t>
+              <a:t>Let us copy Cloud Cover. Cloud cover influences temperature in the following ways. Copy the point on By day: write the key term first, then its explanation.</a:t>
             </a:r>
             <a:endParaRPr lang="en-US" dirty="0"/>
           </a:p>
@@ -4345,7 +4350,7 @@
           <a:p>
             <a:r>
               <a:rPr lang="en-US" dirty="0"/>
-              <a:t>Now let us check what you have understood. Question 1: Distinguish a maritime climate from a continental climate. Answer in your exercise book.</a:t>
+              <a:t>We continue with Cloud Cover. Copy the point on By night: write the key term first, then its explanation.</a:t>
             </a:r>
             <a:endParaRPr lang="en-US" dirty="0"/>
           </a:p>
@@ -4521,7 +4526,7 @@
           <a:p>
             <a:r>
               <a:rPr lang="en-US" dirty="0"/>
-              <a:t>The expected answer is: a maritime climate near the sea has small temperature ranges; a continental climate far inland has large ranges. If you got it right, well done.</a:t>
+              <a:t>Let us copy Urbanisation: the Heat Island. Towns are warmer than the countryside for the following reasons. Copy the point on Artificial surfaces on the left, then draw the diagram on the right: the urban heat island. Give it a title and label it clearly.</a:t>
             </a:r>
             <a:endParaRPr lang="en-US" dirty="0"/>
           </a:p>
@@ -4609,7 +4614,7 @@
           <a:p>
             <a:r>
               <a:rPr lang="en-US" dirty="0"/>
-              <a:t>Now let us check what you have understood. Question 2: Explain the double role of clouds on temperature. Answer in your exercise book.</a:t>
+              <a:t>We continue with Urbanisation: the Heat Island. Copy the point on Heat from human activities: write the key term first, then its explanation.</a:t>
             </a:r>
             <a:endParaRPr lang="en-US" dirty="0"/>
           </a:p>
@@ -4697,7 +4702,7 @@
           <a:p>
             <a:r>
               <a:rPr lang="en-US" dirty="0"/>
-              <a:t>The expected answer is: by day they reflect sunlight and cool the ground; at night they trap heat and keep it warm. If you got it right, well done.</a:t>
+              <a:t>We continue with Urbanisation: the Heat Island. Copy the point on Lack of vegetation: write the key term first, then its explanation.</a:t>
             </a:r>
             <a:endParaRPr lang="en-US" dirty="0"/>
           </a:p>
@@ -4785,7 +4790,7 @@
           <a:p>
             <a:r>
               <a:rPr lang="en-US" dirty="0"/>
-              <a:t>For those who need more practice, fill in the blanks in your exercise book. The answers are: number 1, ; number 6, 5; number 2, aspect; number 3, island.</a:t>
+              <a:t>We continue with Urbanisation: the Heat Island. Copy the point on Buildings and pollution: write the key term first, then its explanation.</a:t>
             </a:r>
             <a:endParaRPr lang="en-US" dirty="0"/>
           </a:p>
@@ -4873,7 +4878,7 @@
           <a:p>
             <a:r>
               <a:rPr lang="en-US" dirty="0"/>
-              <a:t>For your homework: Define the environmental lapse rate. We shall correct it at the beginning of our next lesson.</a:t>
+              <a:t>Now let us check what you have understood. Question 1: Distinguish a maritime climate from a continental climate. Answer in your exercise book.</a:t>
             </a:r>
             <a:endParaRPr lang="en-US" dirty="0"/>
           </a:p>
@@ -4961,7 +4966,7 @@
           <a:p>
             <a:r>
               <a:rPr lang="en-US" dirty="0"/>
-              <a:t>Our next lesson will be on Lesson 8: Vertical Distribution of Temperature. Thank you for your attention, and see you next time.</a:t>
+              <a:t>The expected answer is: a maritime climate near the sea has small temperature ranges; a continental climate far inland has large ranges. If you got it right, well done.</a:t>
             </a:r>
             <a:endParaRPr lang="en-US" dirty="0"/>
           </a:p>
@@ -5049,7 +5054,7 @@
           <a:p>
             <a:r>
               <a:rPr lang="en-US" dirty="0"/>
-              <a:t>Let us play the bilingual game. I say a word in English, and you give me the French word. Then we do the reverse.</a:t>
+              <a:t>Now let us check what you have understood. Question 2: Explain the double role of clouds on temperature. Answer in your exercise book.</a:t>
             </a:r>
             <a:endParaRPr lang="en-US" dirty="0"/>
           </a:p>
@@ -5137,7 +5142,7 @@
           <a:p>
             <a:r>
               <a:rPr lang="en-US" dirty="0"/>
-              <a:t>I record this information in the official logbook of the class after the lesson.</a:t>
+              <a:t>The expected answer is: by day they reflect sunlight and cool the ground; at night they trap heat and keep it warm. If you got it right, well done.</a:t>
             </a:r>
             <a:endParaRPr lang="en-US" dirty="0"/>
           </a:p>
@@ -5225,7 +5230,7 @@
           <a:p>
             <a:r>
               <a:rPr lang="en-US" dirty="0"/>
-              <a:t>I complete the second page of the logbook: the matter taught, the evaluation, the homework and the attendance.</a:t>
+              <a:t>For those who need more practice, fill in the blanks in your exercise book. The answers are: number 1, ; number 6, 5; number 2, aspect; number 3, island.</a:t>
             </a:r>
             <a:endParaRPr lang="en-US" dirty="0"/>
           </a:p>
@@ -5313,7 +5318,7 @@
           <a:p>
             <a:r>
               <a:rPr lang="en-US" dirty="0"/>
-              <a:t>This slide is for me, the teacher: it gives the timing of the lesson and what to do if the projector is not available.</a:t>
+              <a:t>For your homework: Define the environmental lapse rate. We shall correct it at the beginning of our next lesson.</a:t>
             </a:r>
             <a:endParaRPr lang="en-US" dirty="0"/>
           </a:p>
@@ -5489,7 +5494,7 @@
           <a:p>
             <a:r>
               <a:rPr lang="en-US" dirty="0"/>
-              <a:t>These are the references and picture credits used to prepare this lesson.</a:t>
+              <a:t>Our next lesson will be on Lesson 8: Vertical Distribution of Temperature. Thank you for your attention, and see you next time.</a:t>
             </a:r>
             <a:endParaRPr lang="en-US" dirty="0"/>
           </a:p>
@@ -5513,6 +5518,446 @@
             <a:fld id="{F7021451-1387-4CA6-816F-3879F97B5CBC}" type="slidenum">
               <a:rPr lang="en-US"/>
               <a:t>60</a:t>
+            </a:fld>
+            <a:endParaRPr lang="en-US"/>
+          </a:p>
+        </p:txBody>
+      </p:sp>
+    </p:spTree>
+    <p:extLst>
+      <p:ext uri="{BB962C8B-B14F-4D97-AF65-F5344CB8AC3E}">
+        <p14:creationId xmlns:p14="http://schemas.microsoft.com/office/powerpoint/2010/main" val="1024086991"/>
+      </p:ext>
+    </p:extLst>
+  </p:cSld>
+  <p:clrMapOvr>
+    <a:masterClrMapping/>
+  </p:clrMapOvr>
+</p:notes>
+</file>
+
+<file path=ppt/notesSlides/notesSlide61.xml><?xml version="1.0" encoding="utf-8"?>
+<p:notes xmlns:a="http://schemas.openxmlformats.org/drawingml/2006/main" xmlns:r="http://schemas.openxmlformats.org/officeDocument/2006/relationships" xmlns:p="http://schemas.openxmlformats.org/presentationml/2006/main">
+  <p:cSld>
+    <p:spTree>
+      <p:nvGrpSpPr>
+        <p:cNvPr id="1" name=""/>
+        <p:cNvGrpSpPr/>
+        <p:nvPr/>
+      </p:nvGrpSpPr>
+      <p:grpSpPr>
+        <a:xfrm>
+          <a:off x="0" y="0"/>
+          <a:ext cx="0" cy="0"/>
+          <a:chOff x="0" y="0"/>
+          <a:chExt cx="0" cy="0"/>
+        </a:xfrm>
+      </p:grpSpPr>
+      <p:sp>
+        <p:nvSpPr>
+          <p:cNvPr id="2" name="Slide Image Placeholder 1"/>
+          <p:cNvSpPr>
+            <a:spLocks noGrp="1" noRot="1" noChangeAspect="1"/>
+          </p:cNvSpPr>
+          <p:nvPr>
+            <p:ph type="sldImg"/>
+          </p:nvPr>
+        </p:nvSpPr>
+        <p:spPr/>
+      </p:sp>
+      <p:sp>
+        <p:nvSpPr>
+          <p:cNvPr id="3" name="Notes Placeholder 2"/>
+          <p:cNvSpPr>
+            <a:spLocks noGrp="1"/>
+          </p:cNvSpPr>
+          <p:nvPr>
+            <p:ph type="body" idx="1"/>
+          </p:nvPr>
+        </p:nvSpPr>
+        <p:spPr/>
+        <p:txBody>
+          <a:bodyPr/>
+          <a:lstStyle/>
+          <a:p>
+            <a:r>
+              <a:rPr lang="en-US" dirty="0"/>
+              <a:t>Let us play the bilingual game. I say a word in English, and you give me the French word. Then we do the reverse.</a:t>
+            </a:r>
+            <a:endParaRPr lang="en-US" dirty="0"/>
+          </a:p>
+        </p:txBody>
+      </p:sp>
+      <p:sp>
+        <p:nvSpPr>
+          <p:cNvPr id="4" name="Slide Number Placeholder 3"/>
+          <p:cNvSpPr>
+            <a:spLocks noGrp="1"/>
+          </p:cNvSpPr>
+          <p:nvPr>
+            <p:ph type="sldNum" sz="quarter" idx="10"/>
+          </p:nvPr>
+        </p:nvSpPr>
+        <p:spPr/>
+        <p:txBody>
+          <a:bodyPr/>
+          <a:lstStyle/>
+          <a:p>
+            <a:fld id="{F7021451-1387-4CA6-816F-3879F97B5CBC}" type="slidenum">
+              <a:rPr lang="en-US"/>
+              <a:t>61</a:t>
+            </a:fld>
+            <a:endParaRPr lang="en-US"/>
+          </a:p>
+        </p:txBody>
+      </p:sp>
+    </p:spTree>
+    <p:extLst>
+      <p:ext uri="{BB962C8B-B14F-4D97-AF65-F5344CB8AC3E}">
+        <p14:creationId xmlns:p14="http://schemas.microsoft.com/office/powerpoint/2010/main" val="1024086991"/>
+      </p:ext>
+    </p:extLst>
+  </p:cSld>
+  <p:clrMapOvr>
+    <a:masterClrMapping/>
+  </p:clrMapOvr>
+</p:notes>
+</file>
+
+<file path=ppt/notesSlides/notesSlide62.xml><?xml version="1.0" encoding="utf-8"?>
+<p:notes xmlns:a="http://schemas.openxmlformats.org/drawingml/2006/main" xmlns:r="http://schemas.openxmlformats.org/officeDocument/2006/relationships" xmlns:p="http://schemas.openxmlformats.org/presentationml/2006/main">
+  <p:cSld>
+    <p:spTree>
+      <p:nvGrpSpPr>
+        <p:cNvPr id="1" name=""/>
+        <p:cNvGrpSpPr/>
+        <p:nvPr/>
+      </p:nvGrpSpPr>
+      <p:grpSpPr>
+        <a:xfrm>
+          <a:off x="0" y="0"/>
+          <a:ext cx="0" cy="0"/>
+          <a:chOff x="0" y="0"/>
+          <a:chExt cx="0" cy="0"/>
+        </a:xfrm>
+      </p:grpSpPr>
+      <p:sp>
+        <p:nvSpPr>
+          <p:cNvPr id="2" name="Slide Image Placeholder 1"/>
+          <p:cNvSpPr>
+            <a:spLocks noGrp="1" noRot="1" noChangeAspect="1"/>
+          </p:cNvSpPr>
+          <p:nvPr>
+            <p:ph type="sldImg"/>
+          </p:nvPr>
+        </p:nvSpPr>
+        <p:spPr/>
+      </p:sp>
+      <p:sp>
+        <p:nvSpPr>
+          <p:cNvPr id="3" name="Notes Placeholder 2"/>
+          <p:cNvSpPr>
+            <a:spLocks noGrp="1"/>
+          </p:cNvSpPr>
+          <p:nvPr>
+            <p:ph type="body" idx="1"/>
+          </p:nvPr>
+        </p:nvSpPr>
+        <p:spPr/>
+        <p:txBody>
+          <a:bodyPr/>
+          <a:lstStyle/>
+          <a:p>
+            <a:r>
+              <a:rPr lang="en-US" dirty="0"/>
+              <a:t>I record this information in the official logbook of the class after the lesson.</a:t>
+            </a:r>
+            <a:endParaRPr lang="en-US" dirty="0"/>
+          </a:p>
+        </p:txBody>
+      </p:sp>
+      <p:sp>
+        <p:nvSpPr>
+          <p:cNvPr id="4" name="Slide Number Placeholder 3"/>
+          <p:cNvSpPr>
+            <a:spLocks noGrp="1"/>
+          </p:cNvSpPr>
+          <p:nvPr>
+            <p:ph type="sldNum" sz="quarter" idx="10"/>
+          </p:nvPr>
+        </p:nvSpPr>
+        <p:spPr/>
+        <p:txBody>
+          <a:bodyPr/>
+          <a:lstStyle/>
+          <a:p>
+            <a:fld id="{F7021451-1387-4CA6-816F-3879F97B5CBC}" type="slidenum">
+              <a:rPr lang="en-US"/>
+              <a:t>62</a:t>
+            </a:fld>
+            <a:endParaRPr lang="en-US"/>
+          </a:p>
+        </p:txBody>
+      </p:sp>
+    </p:spTree>
+    <p:extLst>
+      <p:ext uri="{BB962C8B-B14F-4D97-AF65-F5344CB8AC3E}">
+        <p14:creationId xmlns:p14="http://schemas.microsoft.com/office/powerpoint/2010/main" val="1024086991"/>
+      </p:ext>
+    </p:extLst>
+  </p:cSld>
+  <p:clrMapOvr>
+    <a:masterClrMapping/>
+  </p:clrMapOvr>
+</p:notes>
+</file>
+
+<file path=ppt/notesSlides/notesSlide63.xml><?xml version="1.0" encoding="utf-8"?>
+<p:notes xmlns:a="http://schemas.openxmlformats.org/drawingml/2006/main" xmlns:r="http://schemas.openxmlformats.org/officeDocument/2006/relationships" xmlns:p="http://schemas.openxmlformats.org/presentationml/2006/main">
+  <p:cSld>
+    <p:spTree>
+      <p:nvGrpSpPr>
+        <p:cNvPr id="1" name=""/>
+        <p:cNvGrpSpPr/>
+        <p:nvPr/>
+      </p:nvGrpSpPr>
+      <p:grpSpPr>
+        <a:xfrm>
+          <a:off x="0" y="0"/>
+          <a:ext cx="0" cy="0"/>
+          <a:chOff x="0" y="0"/>
+          <a:chExt cx="0" cy="0"/>
+        </a:xfrm>
+      </p:grpSpPr>
+      <p:sp>
+        <p:nvSpPr>
+          <p:cNvPr id="2" name="Slide Image Placeholder 1"/>
+          <p:cNvSpPr>
+            <a:spLocks noGrp="1" noRot="1" noChangeAspect="1"/>
+          </p:cNvSpPr>
+          <p:nvPr>
+            <p:ph type="sldImg"/>
+          </p:nvPr>
+        </p:nvSpPr>
+        <p:spPr/>
+      </p:sp>
+      <p:sp>
+        <p:nvSpPr>
+          <p:cNvPr id="3" name="Notes Placeholder 2"/>
+          <p:cNvSpPr>
+            <a:spLocks noGrp="1"/>
+          </p:cNvSpPr>
+          <p:nvPr>
+            <p:ph type="body" idx="1"/>
+          </p:nvPr>
+        </p:nvSpPr>
+        <p:spPr/>
+        <p:txBody>
+          <a:bodyPr/>
+          <a:lstStyle/>
+          <a:p>
+            <a:r>
+              <a:rPr lang="en-US" dirty="0"/>
+              <a:t>I complete the second page of the logbook: the matter taught, the evaluation, the homework and the attendance.</a:t>
+            </a:r>
+            <a:endParaRPr lang="en-US" dirty="0"/>
+          </a:p>
+        </p:txBody>
+      </p:sp>
+      <p:sp>
+        <p:nvSpPr>
+          <p:cNvPr id="4" name="Slide Number Placeholder 3"/>
+          <p:cNvSpPr>
+            <a:spLocks noGrp="1"/>
+          </p:cNvSpPr>
+          <p:nvPr>
+            <p:ph type="sldNum" sz="quarter" idx="10"/>
+          </p:nvPr>
+        </p:nvSpPr>
+        <p:spPr/>
+        <p:txBody>
+          <a:bodyPr/>
+          <a:lstStyle/>
+          <a:p>
+            <a:fld id="{F7021451-1387-4CA6-816F-3879F97B5CBC}" type="slidenum">
+              <a:rPr lang="en-US"/>
+              <a:t>63</a:t>
+            </a:fld>
+            <a:endParaRPr lang="en-US"/>
+          </a:p>
+        </p:txBody>
+      </p:sp>
+    </p:spTree>
+    <p:extLst>
+      <p:ext uri="{BB962C8B-B14F-4D97-AF65-F5344CB8AC3E}">
+        <p14:creationId xmlns:p14="http://schemas.microsoft.com/office/powerpoint/2010/main" val="1024086991"/>
+      </p:ext>
+    </p:extLst>
+  </p:cSld>
+  <p:clrMapOvr>
+    <a:masterClrMapping/>
+  </p:clrMapOvr>
+</p:notes>
+</file>
+
+<file path=ppt/notesSlides/notesSlide64.xml><?xml version="1.0" encoding="utf-8"?>
+<p:notes xmlns:a="http://schemas.openxmlformats.org/drawingml/2006/main" xmlns:r="http://schemas.openxmlformats.org/officeDocument/2006/relationships" xmlns:p="http://schemas.openxmlformats.org/presentationml/2006/main">
+  <p:cSld>
+    <p:spTree>
+      <p:nvGrpSpPr>
+        <p:cNvPr id="1" name=""/>
+        <p:cNvGrpSpPr/>
+        <p:nvPr/>
+      </p:nvGrpSpPr>
+      <p:grpSpPr>
+        <a:xfrm>
+          <a:off x="0" y="0"/>
+          <a:ext cx="0" cy="0"/>
+          <a:chOff x="0" y="0"/>
+          <a:chExt cx="0" cy="0"/>
+        </a:xfrm>
+      </p:grpSpPr>
+      <p:sp>
+        <p:nvSpPr>
+          <p:cNvPr id="2" name="Slide Image Placeholder 1"/>
+          <p:cNvSpPr>
+            <a:spLocks noGrp="1" noRot="1" noChangeAspect="1"/>
+          </p:cNvSpPr>
+          <p:nvPr>
+            <p:ph type="sldImg"/>
+          </p:nvPr>
+        </p:nvSpPr>
+        <p:spPr/>
+      </p:sp>
+      <p:sp>
+        <p:nvSpPr>
+          <p:cNvPr id="3" name="Notes Placeholder 2"/>
+          <p:cNvSpPr>
+            <a:spLocks noGrp="1"/>
+          </p:cNvSpPr>
+          <p:nvPr>
+            <p:ph type="body" idx="1"/>
+          </p:nvPr>
+        </p:nvSpPr>
+        <p:spPr/>
+        <p:txBody>
+          <a:bodyPr/>
+          <a:lstStyle/>
+          <a:p>
+            <a:r>
+              <a:rPr lang="en-US" dirty="0"/>
+              <a:t>This slide is for me, the teacher: it gives the timing of the lesson and what to do if the projector is not available.</a:t>
+            </a:r>
+            <a:endParaRPr lang="en-US" dirty="0"/>
+          </a:p>
+        </p:txBody>
+      </p:sp>
+      <p:sp>
+        <p:nvSpPr>
+          <p:cNvPr id="4" name="Slide Number Placeholder 3"/>
+          <p:cNvSpPr>
+            <a:spLocks noGrp="1"/>
+          </p:cNvSpPr>
+          <p:nvPr>
+            <p:ph type="sldNum" sz="quarter" idx="10"/>
+          </p:nvPr>
+        </p:nvSpPr>
+        <p:spPr/>
+        <p:txBody>
+          <a:bodyPr/>
+          <a:lstStyle/>
+          <a:p>
+            <a:fld id="{F7021451-1387-4CA6-816F-3879F97B5CBC}" type="slidenum">
+              <a:rPr lang="en-US"/>
+              <a:t>64</a:t>
+            </a:fld>
+            <a:endParaRPr lang="en-US"/>
+          </a:p>
+        </p:txBody>
+      </p:sp>
+    </p:spTree>
+    <p:extLst>
+      <p:ext uri="{BB962C8B-B14F-4D97-AF65-F5344CB8AC3E}">
+        <p14:creationId xmlns:p14="http://schemas.microsoft.com/office/powerpoint/2010/main" val="1024086991"/>
+      </p:ext>
+    </p:extLst>
+  </p:cSld>
+  <p:clrMapOvr>
+    <a:masterClrMapping/>
+  </p:clrMapOvr>
+</p:notes>
+</file>
+
+<file path=ppt/notesSlides/notesSlide65.xml><?xml version="1.0" encoding="utf-8"?>
+<p:notes xmlns:a="http://schemas.openxmlformats.org/drawingml/2006/main" xmlns:r="http://schemas.openxmlformats.org/officeDocument/2006/relationships" xmlns:p="http://schemas.openxmlformats.org/presentationml/2006/main">
+  <p:cSld>
+    <p:spTree>
+      <p:nvGrpSpPr>
+        <p:cNvPr id="1" name=""/>
+        <p:cNvGrpSpPr/>
+        <p:nvPr/>
+      </p:nvGrpSpPr>
+      <p:grpSpPr>
+        <a:xfrm>
+          <a:off x="0" y="0"/>
+          <a:ext cx="0" cy="0"/>
+          <a:chOff x="0" y="0"/>
+          <a:chExt cx="0" cy="0"/>
+        </a:xfrm>
+      </p:grpSpPr>
+      <p:sp>
+        <p:nvSpPr>
+          <p:cNvPr id="2" name="Slide Image Placeholder 1"/>
+          <p:cNvSpPr>
+            <a:spLocks noGrp="1" noRot="1" noChangeAspect="1"/>
+          </p:cNvSpPr>
+          <p:nvPr>
+            <p:ph type="sldImg"/>
+          </p:nvPr>
+        </p:nvSpPr>
+        <p:spPr/>
+      </p:sp>
+      <p:sp>
+        <p:nvSpPr>
+          <p:cNvPr id="3" name="Notes Placeholder 2"/>
+          <p:cNvSpPr>
+            <a:spLocks noGrp="1"/>
+          </p:cNvSpPr>
+          <p:nvPr>
+            <p:ph type="body" idx="1"/>
+          </p:nvPr>
+        </p:nvSpPr>
+        <p:spPr/>
+        <p:txBody>
+          <a:bodyPr/>
+          <a:lstStyle/>
+          <a:p>
+            <a:r>
+              <a:rPr lang="en-US" dirty="0"/>
+              <a:t>These are the references and picture credits used to prepare this lesson.</a:t>
+            </a:r>
+            <a:endParaRPr lang="en-US" dirty="0"/>
+          </a:p>
+        </p:txBody>
+      </p:sp>
+      <p:sp>
+        <p:nvSpPr>
+          <p:cNvPr id="4" name="Slide Number Placeholder 3"/>
+          <p:cNvSpPr>
+            <a:spLocks noGrp="1"/>
+          </p:cNvSpPr>
+          <p:nvPr>
+            <p:ph type="sldNum" sz="quarter" idx="10"/>
+          </p:nvPr>
+        </p:nvSpPr>
+        <p:spPr/>
+        <p:txBody>
+          <a:bodyPr/>
+          <a:lstStyle/>
+          <a:p>
+            <a:fld id="{F7021451-1387-4CA6-816F-3879F97B5CBC}" type="slidenum">
+              <a:rPr lang="en-US"/>
+              <a:t>65</a:t>
             </a:fld>
             <a:endParaRPr lang="en-US"/>
           </a:p>
@@ -14466,7 +14911,7 @@
         <p:spPr>
           <a:xfrm>
             <a:off x="0" y="658368"/>
-            <a:ext cx="2468880" cy="5833872"/>
+            <a:ext cx="5120640" cy="5833872"/>
           </a:xfrm>
           <a:prstGeom prst="rect">
             <a:avLst/>
@@ -14481,8 +14926,8 @@
         </p:nvSpPr>
         <p:spPr>
           <a:xfrm>
-            <a:off x="2697480" y="1005840"/>
-            <a:ext cx="9174175" cy="731520"/>
+            <a:off x="5349240" y="1005840"/>
+            <a:ext cx="6522415" cy="731520"/>
           </a:xfrm>
           <a:prstGeom prst="rect">
             <a:avLst/>
@@ -14522,8 +14967,8 @@
         </p:nvSpPr>
         <p:spPr>
           <a:xfrm>
-            <a:off x="2697480" y="1783080"/>
-            <a:ext cx="9174175" cy="4663440"/>
+            <a:off x="5349240" y="1783080"/>
+            <a:ext cx="6522415" cy="4663440"/>
           </a:xfrm>
           <a:prstGeom prst="rect">
             <a:avLst/>
@@ -14588,43 +15033,6 @@
                 <a:cs typeface="Times New Roman" pitchFamily="34" charset="-120"/>
               </a:rPr>
               <a:t>It is the effect of distance from the sea, which makes inland temperatures more extreme.</a:t>
-            </a:r>
-            <a:endParaRPr lang="en-US" sz="4000" dirty="0"/>
-          </a:p>
-          <a:p>
-            <a:pPr algn="l" indent="0" marL="0">
-              <a:spcAft>
-                <a:spcPts val="800"/>
-              </a:spcAft>
-              <a:buNone/>
-            </a:pPr>
-            <a:r>
-              <a:rPr lang="en-US" sz="4000" b="1" dirty="0">
-                <a:solidFill>
-                  <a:srgbClr val="111111"/>
-                </a:solidFill>
-                <a:latin typeface="Times New Roman" pitchFamily="34" charset="0"/>
-                <a:ea typeface="Times New Roman" pitchFamily="34" charset="-122"/>
-                <a:cs typeface="Times New Roman" pitchFamily="34" charset="-120"/>
-              </a:rPr>
-              <a:t>Aspect: </a:t>
-            </a:r>
-            <a:pPr algn="l" indent="0" marL="0">
-              <a:spcAft>
-                <a:spcPts val="800"/>
-              </a:spcAft>
-              <a:buNone/>
-            </a:pPr>
-            <a:r>
-              <a:rPr lang="en-US" sz="4000" dirty="0">
-                <a:solidFill>
-                  <a:srgbClr val="111111"/>
-                </a:solidFill>
-                <a:latin typeface="Times New Roman" pitchFamily="34" charset="0"/>
-                <a:ea typeface="Times New Roman" pitchFamily="34" charset="-122"/>
-                <a:cs typeface="Times New Roman" pitchFamily="34" charset="-120"/>
-              </a:rPr>
-              <a:t>It is the direction a slope faces.</a:t>
             </a:r>
             <a:endParaRPr lang="en-US" sz="4000" dirty="0"/>
           </a:p>
@@ -14759,7 +15167,7 @@
         <p:spPr>
           <a:xfrm>
             <a:off x="0" y="658368"/>
-            <a:ext cx="5120640" cy="5833872"/>
+            <a:ext cx="3840480" cy="5833872"/>
           </a:xfrm>
           <a:prstGeom prst="rect">
             <a:avLst/>
@@ -14774,8 +15182,8 @@
         </p:nvSpPr>
         <p:spPr>
           <a:xfrm>
-            <a:off x="5349240" y="1005840"/>
-            <a:ext cx="6522415" cy="731520"/>
+            <a:off x="4069080" y="1005840"/>
+            <a:ext cx="7802575" cy="731520"/>
           </a:xfrm>
           <a:prstGeom prst="rect">
             <a:avLst/>
@@ -14815,8 +15223,8 @@
         </p:nvSpPr>
         <p:spPr>
           <a:xfrm>
-            <a:off x="5349240" y="1783080"/>
-            <a:ext cx="6522415" cy="4663440"/>
+            <a:off x="4069080" y="1783080"/>
+            <a:ext cx="7802575" cy="4663440"/>
           </a:xfrm>
           <a:prstGeom prst="rect">
             <a:avLst/>
@@ -14843,7 +15251,7 @@
                 <a:ea typeface="Times New Roman" pitchFamily="34" charset="-122"/>
                 <a:cs typeface="Times New Roman" pitchFamily="34" charset="-120"/>
               </a:rPr>
-              <a:t>Normal lapse rate: </a:t>
+              <a:t>Adret: </a:t>
             </a:r>
             <a:pPr algn="l" indent="0" marL="0">
               <a:spcAft>
@@ -14860,7 +15268,7 @@
                 <a:ea typeface="Times New Roman" pitchFamily="34" charset="-122"/>
                 <a:cs typeface="Times New Roman" pitchFamily="34" charset="-120"/>
               </a:rPr>
-              <a:t>It is the average fall of temperature with height, about 6.5 °C per 1,000 m.</a:t>
+              <a:t>It is the slope that faces the sun (south-facing in the northern hemisphere), which is warmer and drier.</a:t>
             </a:r>
             <a:endParaRPr lang="en-US" sz="4000" dirty="0"/>
           </a:p>
@@ -14880,7 +15288,7 @@
                 <a:ea typeface="Times New Roman" pitchFamily="34" charset="-122"/>
                 <a:cs typeface="Times New Roman" pitchFamily="34" charset="-120"/>
               </a:rPr>
-              <a:t>Urban heat island: </a:t>
+              <a:t>Ubac: </a:t>
             </a:r>
             <a:pPr algn="l" indent="0" marL="0">
               <a:spcAft>
@@ -14897,7 +15305,7 @@
                 <a:ea typeface="Times New Roman" pitchFamily="34" charset="-122"/>
                 <a:cs typeface="Times New Roman" pitchFamily="34" charset="-120"/>
               </a:rPr>
-              <a:t>It is a town that is warmer than the surrounding countryside.</a:t>
+              <a:t>It is the slope that faces away from the sun, which is cooler and more humid.</a:t>
             </a:r>
             <a:endParaRPr lang="en-US" sz="4000" dirty="0"/>
           </a:p>
@@ -15015,129 +15423,9 @@
           </a:p>
         </p:txBody>
       </p:sp>
-      <p:sp>
-        <p:nvSpPr>
-          <p:cNvPr id="3" name="Text 1"/>
-          <p:cNvSpPr/>
-          <p:nvPr/>
-        </p:nvSpPr>
-        <p:spPr>
-          <a:xfrm>
-            <a:off x="365760" y="1005840"/>
-            <a:ext cx="11460175" cy="731520"/>
-          </a:xfrm>
-          <a:prstGeom prst="rect">
-            <a:avLst/>
-          </a:prstGeom>
-          <a:noFill/>
-          <a:ln/>
-        </p:spPr>
-        <p:txBody>
-          <a:bodyPr wrap="square" lIns="0" tIns="0" rIns="0" bIns="0" rtlCol="0" anchor="ctr">
-            <a:normAutofit/>
-          </a:bodyPr>
-          <a:lstStyle/>
-          <a:p>
-            <a:pPr algn="ctr" indent="0" marL="0">
-              <a:buNone/>
-            </a:pPr>
-            <a:r>
-              <a:rPr lang="en-US" sz="3600" b="1" dirty="0">
-                <a:solidFill>
-                  <a:srgbClr val="990011"/>
-                </a:solidFill>
-                <a:latin typeface="Times New Roman" pitchFamily="34" charset="0"/>
-                <a:ea typeface="Times New Roman" pitchFamily="34" charset="-122"/>
-                <a:cs typeface="Times New Roman" pitchFamily="34" charset="-120"/>
-              </a:rPr>
-              <a:t>1. Nature of the Surface: Land and Water</a:t>
-            </a:r>
-            <a:endParaRPr lang="en-US" sz="3600" dirty="0"/>
-          </a:p>
-        </p:txBody>
-      </p:sp>
-      <p:sp>
-        <p:nvSpPr>
-          <p:cNvPr id="4" name="Text 2"/>
-          <p:cNvSpPr/>
-          <p:nvPr/>
-        </p:nvSpPr>
-        <p:spPr>
-          <a:xfrm>
-            <a:off x="365760" y="1783080"/>
-            <a:ext cx="4846320" cy="4617720"/>
-          </a:xfrm>
-          <a:prstGeom prst="rect">
-            <a:avLst/>
-          </a:prstGeom>
-          <a:noFill/>
-          <a:ln/>
-        </p:spPr>
-        <p:txBody>
-          <a:bodyPr wrap="square" lIns="0" tIns="0" rIns="0" bIns="0" rtlCol="0" anchor="t"/>
-          <a:lstStyle/>
-          <a:p>
-            <a:pPr algn="l" indent="0" marL="0">
-              <a:spcAft>
-                <a:spcPts val="800"/>
-              </a:spcAft>
-              <a:buNone/>
-            </a:pPr>
-            <a:r>
-              <a:rPr lang="en-US" sz="3600" i="1" dirty="0">
-                <a:solidFill>
-                  <a:srgbClr val="111111"/>
-                </a:solidFill>
-                <a:latin typeface="Times New Roman" pitchFamily="34" charset="0"/>
-                <a:ea typeface="Times New Roman" pitchFamily="34" charset="-122"/>
-                <a:cs typeface="Times New Roman" pitchFamily="34" charset="-120"/>
-              </a:rPr>
-              <a:t>Land and water influence temperature as follows:</a:t>
-            </a:r>
-            <a:endParaRPr lang="en-US" sz="3600" dirty="0"/>
-          </a:p>
-          <a:p>
-            <a:pPr algn="l" indent="0" marL="0">
-              <a:spcAft>
-                <a:spcPts val="800"/>
-              </a:spcAft>
-              <a:buNone/>
-            </a:pPr>
-            <a:r>
-              <a:rPr lang="en-US" sz="3600" b="1" dirty="0">
-                <a:solidFill>
-                  <a:srgbClr val="111111"/>
-                </a:solidFill>
-                <a:latin typeface="Times New Roman" pitchFamily="34" charset="0"/>
-                <a:ea typeface="Times New Roman" pitchFamily="34" charset="-122"/>
-                <a:cs typeface="Times New Roman" pitchFamily="34" charset="-120"/>
-              </a:rPr>
-              <a:t>Land: </a:t>
-            </a:r>
-            <a:pPr algn="l" indent="0" marL="0">
-              <a:spcAft>
-                <a:spcPts val="800"/>
-              </a:spcAft>
-              <a:buNone/>
-            </a:pPr>
-            <a:r>
-              <a:rPr lang="en-US" sz="3600" dirty="0">
-                <a:solidFill>
-                  <a:srgbClr val="111111"/>
-                </a:solidFill>
-                <a:latin typeface="Times New Roman" pitchFamily="34" charset="0"/>
-                <a:ea typeface="Times New Roman" pitchFamily="34" charset="-122"/>
-                <a:cs typeface="Times New Roman" pitchFamily="34" charset="-120"/>
-              </a:rPr>
-              <a:t>It heats and cools quickly because of its low specific heat.</a:t>
-            </a:r>
-            <a:endParaRPr lang="en-US" sz="3600" dirty="0"/>
-          </a:p>
-        </p:txBody>
-      </p:sp>
       <p:pic>
         <p:nvPicPr>
-          <p:cNvPr id="5" name="Image 0" descr="/home/claude/f4/img/v2/continentality_big.png">    </p:cNvPr>
+          <p:cNvPr id="3" name="Image 0" descr="/home/claude/f4/img/minesec_sheet.png">    </p:cNvPr>
           <p:cNvPicPr>
             <a:picLocks noChangeAspect="1"/>
           </p:cNvPicPr>
@@ -15151,8 +15439,8 @@
         </p:blipFill>
         <p:spPr>
           <a:xfrm>
-            <a:off x="5349240" y="2461422"/>
-            <a:ext cx="6659575" cy="2913564"/>
+            <a:off x="0" y="658368"/>
+            <a:ext cx="5120640" cy="5833872"/>
           </a:xfrm>
           <a:prstGeom prst="rect">
             <a:avLst/>
@@ -15161,14 +15449,14 @@
       </p:pic>
       <p:sp>
         <p:nvSpPr>
-          <p:cNvPr id="6" name="Text 3"/>
+          <p:cNvPr id="4" name="Text 1"/>
           <p:cNvSpPr/>
           <p:nvPr/>
         </p:nvSpPr>
         <p:spPr>
           <a:xfrm>
-            <a:off x="5349240" y="6089904"/>
-            <a:ext cx="6659575" cy="347472"/>
+            <a:off x="5349240" y="1005840"/>
+            <a:ext cx="6522415" cy="731520"/>
           </a:xfrm>
           <a:prstGeom prst="rect">
             <a:avLst/>
@@ -15177,24 +15465,122 @@
           <a:ln/>
         </p:spPr>
         <p:txBody>
-          <a:bodyPr wrap="square" lIns="0" tIns="0" rIns="0" bIns="0" rtlCol="0" anchor="ctr"/>
+          <a:bodyPr wrap="square" lIns="0" tIns="0" rIns="0" bIns="0" rtlCol="0" anchor="ctr">
+            <a:normAutofit/>
+          </a:bodyPr>
           <a:lstStyle/>
           <a:p>
             <a:pPr algn="ctr" indent="0" marL="0">
               <a:buNone/>
             </a:pPr>
             <a:r>
-              <a:rPr lang="en-US" sz="1600" i="1" dirty="0">
-                <a:solidFill>
-                  <a:srgbClr val="555555"/>
+              <a:rPr lang="en-US" sz="3600" b="1" dirty="0">
+                <a:solidFill>
+                  <a:srgbClr val="990011"/>
                 </a:solidFill>
                 <a:latin typeface="Times New Roman" pitchFamily="34" charset="0"/>
                 <a:ea typeface="Times New Roman" pitchFamily="34" charset="-122"/>
                 <a:cs typeface="Times New Roman" pitchFamily="34" charset="-120"/>
               </a:rPr>
-              <a:t>Illustration: coastal and inland temperatures</a:t>
-            </a:r>
-            <a:endParaRPr lang="en-US" sz="1600" dirty="0"/>
+              <a:t>DEFINITIONS (continued)</a:t>
+            </a:r>
+            <a:endParaRPr lang="en-US" sz="3600" dirty="0"/>
+          </a:p>
+        </p:txBody>
+      </p:sp>
+      <p:sp>
+        <p:nvSpPr>
+          <p:cNvPr id="5" name="Text 2"/>
+          <p:cNvSpPr/>
+          <p:nvPr/>
+        </p:nvSpPr>
+        <p:spPr>
+          <a:xfrm>
+            <a:off x="5349240" y="1783080"/>
+            <a:ext cx="6522415" cy="4663440"/>
+          </a:xfrm>
+          <a:prstGeom prst="rect">
+            <a:avLst/>
+          </a:prstGeom>
+          <a:noFill/>
+          <a:ln/>
+        </p:spPr>
+        <p:txBody>
+          <a:bodyPr wrap="square" lIns="0" tIns="0" rIns="0" bIns="0" rtlCol="0" anchor="t"/>
+          <a:lstStyle/>
+          <a:p>
+            <a:pPr algn="l" indent="0" marL="0">
+              <a:spcAft>
+                <a:spcPts val="800"/>
+              </a:spcAft>
+              <a:buNone/>
+            </a:pPr>
+            <a:r>
+              <a:rPr lang="en-US" sz="4000" b="1" dirty="0">
+                <a:solidFill>
+                  <a:srgbClr val="111111"/>
+                </a:solidFill>
+                <a:latin typeface="Times New Roman" pitchFamily="34" charset="0"/>
+                <a:ea typeface="Times New Roman" pitchFamily="34" charset="-122"/>
+                <a:cs typeface="Times New Roman" pitchFamily="34" charset="-120"/>
+              </a:rPr>
+              <a:t>Temperature lapsing: </a:t>
+            </a:r>
+            <a:pPr algn="l" indent="0" marL="0">
+              <a:spcAft>
+                <a:spcPts val="800"/>
+              </a:spcAft>
+              <a:buNone/>
+            </a:pPr>
+            <a:r>
+              <a:rPr lang="en-US" sz="4000" dirty="0">
+                <a:solidFill>
+                  <a:srgbClr val="111111"/>
+                </a:solidFill>
+                <a:latin typeface="Times New Roman" pitchFamily="34" charset="0"/>
+                <a:ea typeface="Times New Roman" pitchFamily="34" charset="-122"/>
+                <a:cs typeface="Times New Roman" pitchFamily="34" charset="-120"/>
+              </a:rPr>
+              <a:t>It is the fall of temperature with height, on average 6.5 °C per 1,000 m.</a:t>
+            </a:r>
+            <a:endParaRPr lang="en-US" sz="4000" dirty="0"/>
+          </a:p>
+          <a:p>
+            <a:pPr algn="l" indent="0" marL="0">
+              <a:spcAft>
+                <a:spcPts val="800"/>
+              </a:spcAft>
+              <a:buNone/>
+            </a:pPr>
+            <a:r>
+              <a:rPr lang="en-US" sz="4000" b="1" dirty="0">
+                <a:solidFill>
+                  <a:srgbClr val="111111"/>
+                </a:solidFill>
+                <a:latin typeface="Times New Roman" pitchFamily="34" charset="0"/>
+                <a:ea typeface="Times New Roman" pitchFamily="34" charset="-122"/>
+                <a:cs typeface="Times New Roman" pitchFamily="34" charset="-120"/>
+              </a:rPr>
+              <a:t>Heat island: </a:t>
+            </a:r>
+            <a:pPr algn="l" indent="0" marL="0">
+              <a:spcAft>
+                <a:spcPts val="800"/>
+              </a:spcAft>
+              <a:buNone/>
+            </a:pPr>
+            <a:r>
+              <a:rPr lang="en-US" sz="4000" dirty="0">
+                <a:solidFill>
+                  <a:srgbClr val="111111"/>
+                </a:solidFill>
+                <a:latin typeface="Times New Roman" pitchFamily="34" charset="0"/>
+                <a:ea typeface="Times New Roman" pitchFamily="34" charset="-122"/>
+                <a:cs typeface="Times New Roman" pitchFamily="34" charset="-120"/>
+              </a:rPr>
+              <a:t>It is a town that is warmer than the surrounding countryside.</a:t>
+            </a:r>
+            <a:endParaRPr lang="en-US" sz="4000" dirty="0"/>
           </a:p>
         </p:txBody>
       </p:sp>
@@ -15310,9 +15696,129 @@
           </a:p>
         </p:txBody>
       </p:sp>
+      <p:sp>
+        <p:nvSpPr>
+          <p:cNvPr id="3" name="Text 1"/>
+          <p:cNvSpPr/>
+          <p:nvPr/>
+        </p:nvSpPr>
+        <p:spPr>
+          <a:xfrm>
+            <a:off x="365760" y="1005840"/>
+            <a:ext cx="11460175" cy="731520"/>
+          </a:xfrm>
+          <a:prstGeom prst="rect">
+            <a:avLst/>
+          </a:prstGeom>
+          <a:noFill/>
+          <a:ln/>
+        </p:spPr>
+        <p:txBody>
+          <a:bodyPr wrap="square" lIns="0" tIns="0" rIns="0" bIns="0" rtlCol="0" anchor="ctr">
+            <a:normAutofit/>
+          </a:bodyPr>
+          <a:lstStyle/>
+          <a:p>
+            <a:pPr algn="ctr" indent="0" marL="0">
+              <a:buNone/>
+            </a:pPr>
+            <a:r>
+              <a:rPr lang="en-US" sz="3600" b="1" dirty="0">
+                <a:solidFill>
+                  <a:srgbClr val="990011"/>
+                </a:solidFill>
+                <a:latin typeface="Times New Roman" pitchFamily="34" charset="0"/>
+                <a:ea typeface="Times New Roman" pitchFamily="34" charset="-122"/>
+                <a:cs typeface="Times New Roman" pitchFamily="34" charset="-120"/>
+              </a:rPr>
+              <a:t>1. Nature of the Surface</a:t>
+            </a:r>
+            <a:endParaRPr lang="en-US" sz="3600" dirty="0"/>
+          </a:p>
+        </p:txBody>
+      </p:sp>
+      <p:sp>
+        <p:nvSpPr>
+          <p:cNvPr id="4" name="Text 2"/>
+          <p:cNvSpPr/>
+          <p:nvPr/>
+        </p:nvSpPr>
+        <p:spPr>
+          <a:xfrm>
+            <a:off x="365760" y="1783080"/>
+            <a:ext cx="6035040" cy="4617720"/>
+          </a:xfrm>
+          <a:prstGeom prst="rect">
+            <a:avLst/>
+          </a:prstGeom>
+          <a:noFill/>
+          <a:ln/>
+        </p:spPr>
+        <p:txBody>
+          <a:bodyPr wrap="square" lIns="0" tIns="0" rIns="0" bIns="0" rtlCol="0" anchor="t"/>
+          <a:lstStyle/>
+          <a:p>
+            <a:pPr algn="l" indent="0" marL="0">
+              <a:spcAft>
+                <a:spcPts val="800"/>
+              </a:spcAft>
+              <a:buNone/>
+            </a:pPr>
+            <a:r>
+              <a:rPr lang="en-US" sz="2800" i="1" dirty="0">
+                <a:solidFill>
+                  <a:srgbClr val="111111"/>
+                </a:solidFill>
+                <a:latin typeface="Times New Roman" pitchFamily="34" charset="0"/>
+                <a:ea typeface="Times New Roman" pitchFamily="34" charset="-122"/>
+                <a:cs typeface="Times New Roman" pitchFamily="34" charset="-120"/>
+              </a:rPr>
+              <a:t>The nature of the surface influences temperature in the following ways:</a:t>
+            </a:r>
+            <a:endParaRPr lang="en-US" sz="2800" dirty="0"/>
+          </a:p>
+          <a:p>
+            <a:pPr algn="l" indent="0" marL="0">
+              <a:spcAft>
+                <a:spcPts val="800"/>
+              </a:spcAft>
+              <a:buNone/>
+            </a:pPr>
+            <a:r>
+              <a:rPr lang="en-US" sz="2800" b="1" dirty="0">
+                <a:solidFill>
+                  <a:srgbClr val="111111"/>
+                </a:solidFill>
+                <a:latin typeface="Times New Roman" pitchFamily="34" charset="0"/>
+                <a:ea typeface="Times New Roman" pitchFamily="34" charset="-122"/>
+                <a:cs typeface="Times New Roman" pitchFamily="34" charset="-120"/>
+              </a:rPr>
+              <a:t>Land surfaces: </a:t>
+            </a:r>
+            <a:pPr algn="l" indent="0" marL="0">
+              <a:spcAft>
+                <a:spcPts val="800"/>
+              </a:spcAft>
+              <a:buNone/>
+            </a:pPr>
+            <a:r>
+              <a:rPr lang="en-US" sz="2800" dirty="0">
+                <a:solidFill>
+                  <a:srgbClr val="111111"/>
+                </a:solidFill>
+                <a:latin typeface="Times New Roman" pitchFamily="34" charset="0"/>
+                <a:ea typeface="Times New Roman" pitchFamily="34" charset="-122"/>
+                <a:cs typeface="Times New Roman" pitchFamily="34" charset="-120"/>
+              </a:rPr>
+              <a:t>Land has a low specific heat, so it heats up quickly by day and in summer and cools quickly at night and in winter. Heat also stays in the top few centimetres of rock and soil, which makes land temperatures extreme.</a:t>
+            </a:r>
+            <a:endParaRPr lang="en-US" sz="2800" dirty="0"/>
+          </a:p>
+        </p:txBody>
+      </p:sp>
       <p:pic>
         <p:nvPicPr>
-          <p:cNvPr id="3" name="Image 0" descr="/home/claude/f4/img/minesec_sheet.png">    </p:cNvPr>
+          <p:cNvPr id="5" name="Image 0" descr="/home/claude/f4/img/v2/continentality_big.png">    </p:cNvPr>
           <p:cNvPicPr>
             <a:picLocks noChangeAspect="1"/>
           </p:cNvPicPr>
@@ -15326,8 +15832,8 @@
         </p:blipFill>
         <p:spPr>
           <a:xfrm>
-            <a:off x="0" y="658368"/>
-            <a:ext cx="5120640" cy="5833872"/>
+            <a:off x="6537960" y="2721454"/>
+            <a:ext cx="5470855" cy="2393499"/>
           </a:xfrm>
           <a:prstGeom prst="rect">
             <a:avLst/>
@@ -15336,14 +15842,14 @@
       </p:pic>
       <p:sp>
         <p:nvSpPr>
-          <p:cNvPr id="4" name="Text 1"/>
+          <p:cNvPr id="6" name="Text 3"/>
           <p:cNvSpPr/>
           <p:nvPr/>
         </p:nvSpPr>
         <p:spPr>
           <a:xfrm>
-            <a:off x="5349240" y="1005840"/>
-            <a:ext cx="6522415" cy="731520"/>
+            <a:off x="6537960" y="6089904"/>
+            <a:ext cx="5470855" cy="347472"/>
           </a:xfrm>
           <a:prstGeom prst="rect">
             <a:avLst/>
@@ -15352,122 +15858,24 @@
           <a:ln/>
         </p:spPr>
         <p:txBody>
-          <a:bodyPr wrap="square" lIns="0" tIns="0" rIns="0" bIns="0" rtlCol="0" anchor="ctr">
-            <a:normAutofit/>
-          </a:bodyPr>
+          <a:bodyPr wrap="square" lIns="0" tIns="0" rIns="0" bIns="0" rtlCol="0" anchor="ctr"/>
           <a:lstStyle/>
           <a:p>
             <a:pPr algn="ctr" indent="0" marL="0">
               <a:buNone/>
             </a:pPr>
             <a:r>
-              <a:rPr lang="en-US" sz="3600" b="1" dirty="0">
-                <a:solidFill>
-                  <a:srgbClr val="990011"/>
+              <a:rPr lang="en-US" sz="1600" i="1" dirty="0">
+                <a:solidFill>
+                  <a:srgbClr val="555555"/>
                 </a:solidFill>
                 <a:latin typeface="Times New Roman" pitchFamily="34" charset="0"/>
                 <a:ea typeface="Times New Roman" pitchFamily="34" charset="-122"/>
                 <a:cs typeface="Times New Roman" pitchFamily="34" charset="-120"/>
               </a:rPr>
-              <a:t>1. Nature of the Surface: Land and Water</a:t>
-            </a:r>
-            <a:endParaRPr lang="en-US" sz="3600" dirty="0"/>
-          </a:p>
-        </p:txBody>
-      </p:sp>
-      <p:sp>
-        <p:nvSpPr>
-          <p:cNvPr id="5" name="Text 2"/>
-          <p:cNvSpPr/>
-          <p:nvPr/>
-        </p:nvSpPr>
-        <p:spPr>
-          <a:xfrm>
-            <a:off x="5349240" y="1783080"/>
-            <a:ext cx="6522415" cy="4663440"/>
-          </a:xfrm>
-          <a:prstGeom prst="rect">
-            <a:avLst/>
-          </a:prstGeom>
-          <a:noFill/>
-          <a:ln/>
-        </p:spPr>
-        <p:txBody>
-          <a:bodyPr wrap="square" lIns="0" tIns="0" rIns="0" bIns="0" rtlCol="0" anchor="t"/>
-          <a:lstStyle/>
-          <a:p>
-            <a:pPr algn="l" indent="0" marL="0">
-              <a:spcAft>
-                <a:spcPts val="800"/>
-              </a:spcAft>
-              <a:buNone/>
-            </a:pPr>
-            <a:r>
-              <a:rPr lang="en-US" sz="4000" b="1" dirty="0">
-                <a:solidFill>
-                  <a:srgbClr val="111111"/>
-                </a:solidFill>
-                <a:latin typeface="Times New Roman" pitchFamily="34" charset="0"/>
-                <a:ea typeface="Times New Roman" pitchFamily="34" charset="-122"/>
-                <a:cs typeface="Times New Roman" pitchFamily="34" charset="-120"/>
-              </a:rPr>
-              <a:t>Water: </a:t>
-            </a:r>
-            <a:pPr algn="l" indent="0" marL="0">
-              <a:spcAft>
-                <a:spcPts val="800"/>
-              </a:spcAft>
-              <a:buNone/>
-            </a:pPr>
-            <a:r>
-              <a:rPr lang="en-US" sz="4000" dirty="0">
-                <a:solidFill>
-                  <a:srgbClr val="111111"/>
-                </a:solidFill>
-                <a:latin typeface="Times New Roman" pitchFamily="34" charset="0"/>
-                <a:ea typeface="Times New Roman" pitchFamily="34" charset="-122"/>
-                <a:cs typeface="Times New Roman" pitchFamily="34" charset="-120"/>
-              </a:rPr>
-              <a:t>It heats and cools slowly, so it moderates the temperature of nearby land.</a:t>
-            </a:r>
-            <a:endParaRPr lang="en-US" sz="4000" dirty="0"/>
-          </a:p>
-          <a:p>
-            <a:pPr algn="l" indent="0" marL="0">
-              <a:spcAft>
-                <a:spcPts val="800"/>
-              </a:spcAft>
-              <a:buNone/>
-            </a:pPr>
-            <a:r>
-              <a:rPr lang="en-US" sz="4000" b="1" dirty="0">
-                <a:solidFill>
-                  <a:srgbClr val="111111"/>
-                </a:solidFill>
-                <a:latin typeface="Times New Roman" pitchFamily="34" charset="0"/>
-                <a:ea typeface="Times New Roman" pitchFamily="34" charset="-122"/>
-                <a:cs typeface="Times New Roman" pitchFamily="34" charset="-120"/>
-              </a:rPr>
-              <a:t>Maritime influence: </a:t>
-            </a:r>
-            <a:pPr algn="l" indent="0" marL="0">
-              <a:spcAft>
-                <a:spcPts val="800"/>
-              </a:spcAft>
-              <a:buNone/>
-            </a:pPr>
-            <a:r>
-              <a:rPr lang="en-US" sz="4000" dirty="0">
-                <a:solidFill>
-                  <a:srgbClr val="111111"/>
-                </a:solidFill>
-                <a:latin typeface="Times New Roman" pitchFamily="34" charset="0"/>
-                <a:ea typeface="Times New Roman" pitchFamily="34" charset="-122"/>
-                <a:cs typeface="Times New Roman" pitchFamily="34" charset="-120"/>
-              </a:rPr>
-              <a:t>Coastal places like Douala and Kribi have small temperature ranges.</a:t>
-            </a:r>
-            <a:endParaRPr lang="en-US" sz="4000" dirty="0"/>
+              <a:t>Illustration: land and sea</a:t>
+            </a:r>
+            <a:endParaRPr lang="en-US" sz="1600" dirty="0"/>
           </a:p>
         </p:txBody>
       </p:sp>
@@ -15839,7 +16247,7 @@
         <p:spPr>
           <a:xfrm>
             <a:off x="0" y="658368"/>
-            <a:ext cx="5120640" cy="5833872"/>
+            <a:ext cx="3840480" cy="5833872"/>
           </a:xfrm>
           <a:prstGeom prst="rect">
             <a:avLst/>
@@ -15854,8 +16262,8 @@
         </p:nvSpPr>
         <p:spPr>
           <a:xfrm>
-            <a:off x="5349240" y="1005840"/>
-            <a:ext cx="6522415" cy="731520"/>
+            <a:off x="4069080" y="1005840"/>
+            <a:ext cx="7802575" cy="731520"/>
           </a:xfrm>
           <a:prstGeom prst="rect">
             <a:avLst/>
@@ -15881,7 +16289,7 @@
                 <a:ea typeface="Times New Roman" pitchFamily="34" charset="-122"/>
                 <a:cs typeface="Times New Roman" pitchFamily="34" charset="-120"/>
               </a:rPr>
-              <a:t>1. Nature of the Surface: Land and Water (continued)</a:t>
+              <a:t>1. Nature of the Surface</a:t>
             </a:r>
             <a:endParaRPr lang="en-US" sz="3600" dirty="0"/>
           </a:p>
@@ -15895,8 +16303,8 @@
         </p:nvSpPr>
         <p:spPr>
           <a:xfrm>
-            <a:off x="5349240" y="1783080"/>
-            <a:ext cx="6522415" cy="4663440"/>
+            <a:off x="4069080" y="1783080"/>
+            <a:ext cx="7802575" cy="4663440"/>
           </a:xfrm>
           <a:prstGeom prst="rect">
             <a:avLst/>
@@ -15923,7 +16331,7 @@
                 <a:ea typeface="Times New Roman" pitchFamily="34" charset="-122"/>
                 <a:cs typeface="Times New Roman" pitchFamily="34" charset="-120"/>
               </a:rPr>
-              <a:t>Continentality: </a:t>
+              <a:t>Water surfaces: </a:t>
             </a:r>
             <a:pPr algn="l" indent="0" marL="0">
               <a:spcAft>
@@ -15940,7 +16348,7 @@
                 <a:ea typeface="Times New Roman" pitchFamily="34" charset="-122"/>
                 <a:cs typeface="Times New Roman" pitchFamily="34" charset="-120"/>
               </a:rPr>
-              <a:t>Inland places like Garoua and Maroua have larger ranges: very hot days in March–April and cool nights in December–January.</a:t>
+              <a:t>Water heats and cools slowly because it has a high specific heat, it is transparent and it is mixed by waves and currents. It therefore stores heat and moderates the temperature of the air above it.</a:t>
             </a:r>
             <a:endParaRPr lang="en-US" sz="4000" dirty="0"/>
           </a:p>
@@ -16058,129 +16466,9 @@
           </a:p>
         </p:txBody>
       </p:sp>
-      <p:sp>
-        <p:nvSpPr>
-          <p:cNvPr id="3" name="Text 1"/>
-          <p:cNvSpPr/>
-          <p:nvPr/>
-        </p:nvSpPr>
-        <p:spPr>
-          <a:xfrm>
-            <a:off x="365760" y="1005840"/>
-            <a:ext cx="11460175" cy="731520"/>
-          </a:xfrm>
-          <a:prstGeom prst="rect">
-            <a:avLst/>
-          </a:prstGeom>
-          <a:noFill/>
-          <a:ln/>
-        </p:spPr>
-        <p:txBody>
-          <a:bodyPr wrap="square" lIns="0" tIns="0" rIns="0" bIns="0" rtlCol="0" anchor="ctr">
-            <a:normAutofit/>
-          </a:bodyPr>
-          <a:lstStyle/>
-          <a:p>
-            <a:pPr algn="ctr" indent="0" marL="0">
-              <a:buNone/>
-            </a:pPr>
-            <a:r>
-              <a:rPr lang="en-US" sz="3600" b="1" dirty="0">
-                <a:solidFill>
-                  <a:srgbClr val="990011"/>
-                </a:solidFill>
-                <a:latin typeface="Times New Roman" pitchFamily="34" charset="0"/>
-                <a:ea typeface="Times New Roman" pitchFamily="34" charset="-122"/>
-                <a:cs typeface="Times New Roman" pitchFamily="34" charset="-120"/>
-              </a:rPr>
-              <a:t>2. Relief</a:t>
-            </a:r>
-            <a:endParaRPr lang="en-US" sz="3600" dirty="0"/>
-          </a:p>
-        </p:txBody>
-      </p:sp>
-      <p:sp>
-        <p:nvSpPr>
-          <p:cNvPr id="4" name="Text 2"/>
-          <p:cNvSpPr/>
-          <p:nvPr/>
-        </p:nvSpPr>
-        <p:spPr>
-          <a:xfrm>
-            <a:off x="365760" y="1783080"/>
-            <a:ext cx="4846320" cy="4617720"/>
-          </a:xfrm>
-          <a:prstGeom prst="rect">
-            <a:avLst/>
-          </a:prstGeom>
-          <a:noFill/>
-          <a:ln/>
-        </p:spPr>
-        <p:txBody>
-          <a:bodyPr wrap="square" lIns="0" tIns="0" rIns="0" bIns="0" rtlCol="0" anchor="t"/>
-          <a:lstStyle/>
-          <a:p>
-            <a:pPr algn="l" indent="0" marL="0">
-              <a:spcAft>
-                <a:spcPts val="800"/>
-              </a:spcAft>
-              <a:buNone/>
-            </a:pPr>
-            <a:r>
-              <a:rPr lang="en-US" sz="3600" i="1" dirty="0">
-                <a:solidFill>
-                  <a:srgbClr val="111111"/>
-                </a:solidFill>
-                <a:latin typeface="Times New Roman" pitchFamily="34" charset="0"/>
-                <a:ea typeface="Times New Roman" pitchFamily="34" charset="-122"/>
-                <a:cs typeface="Times New Roman" pitchFamily="34" charset="-120"/>
-              </a:rPr>
-              <a:t>Relief influences temperature as follows:</a:t>
-            </a:r>
-            <a:endParaRPr lang="en-US" sz="3600" dirty="0"/>
-          </a:p>
-          <a:p>
-            <a:pPr algn="l" indent="0" marL="0">
-              <a:spcAft>
-                <a:spcPts val="800"/>
-              </a:spcAft>
-              <a:buNone/>
-            </a:pPr>
-            <a:r>
-              <a:rPr lang="en-US" sz="3600" b="1" dirty="0">
-                <a:solidFill>
-                  <a:srgbClr val="111111"/>
-                </a:solidFill>
-                <a:latin typeface="Times New Roman" pitchFamily="34" charset="0"/>
-                <a:ea typeface="Times New Roman" pitchFamily="34" charset="-122"/>
-                <a:cs typeface="Times New Roman" pitchFamily="34" charset="-120"/>
-              </a:rPr>
-              <a:t>Altitude: </a:t>
-            </a:r>
-            <a:pPr algn="l" indent="0" marL="0">
-              <a:spcAft>
-                <a:spcPts val="800"/>
-              </a:spcAft>
-              <a:buNone/>
-            </a:pPr>
-            <a:r>
-              <a:rPr lang="en-US" sz="3600" dirty="0">
-                <a:solidFill>
-                  <a:srgbClr val="111111"/>
-                </a:solidFill>
-                <a:latin typeface="Times New Roman" pitchFamily="34" charset="0"/>
-                <a:ea typeface="Times New Roman" pitchFamily="34" charset="-122"/>
-                <a:cs typeface="Times New Roman" pitchFamily="34" charset="-120"/>
-              </a:rPr>
-              <a:t>Temperature falls by about 6.5 °C per 1,000 m, so the Mandara Mountains and Ngaoundéré are cooler than Garoua.</a:t>
-            </a:r>
-            <a:endParaRPr lang="en-US" sz="3600" dirty="0"/>
-          </a:p>
-        </p:txBody>
-      </p:sp>
       <p:pic>
         <p:nvPicPr>
-          <p:cNvPr id="5" name="Image 0" descr="/home/claude/f4/img/v2/f2t_kilimanjaro.jpg">    </p:cNvPr>
+          <p:cNvPr id="3" name="Image 0" descr="/home/claude/f4/img/minesec_sheet.png">    </p:cNvPr>
           <p:cNvPicPr>
             <a:picLocks noChangeAspect="1"/>
           </p:cNvPicPr>
@@ -16194,8 +16482,8 @@
         </p:blipFill>
         <p:spPr>
           <a:xfrm>
-            <a:off x="5349240" y="2071212"/>
-            <a:ext cx="6659575" cy="3693983"/>
+            <a:off x="0" y="658368"/>
+            <a:ext cx="2468880" cy="5833872"/>
           </a:xfrm>
           <a:prstGeom prst="rect">
             <a:avLst/>
@@ -16204,14 +16492,14 @@
       </p:pic>
       <p:sp>
         <p:nvSpPr>
-          <p:cNvPr id="6" name="Text 3"/>
+          <p:cNvPr id="4" name="Text 1"/>
           <p:cNvSpPr/>
           <p:nvPr/>
         </p:nvSpPr>
         <p:spPr>
           <a:xfrm>
-            <a:off x="5349240" y="6089904"/>
-            <a:ext cx="6659575" cy="347472"/>
+            <a:off x="2697480" y="1005840"/>
+            <a:ext cx="9174175" cy="731520"/>
           </a:xfrm>
           <a:prstGeom prst="rect">
             <a:avLst/>
@@ -16220,24 +16508,85 @@
           <a:ln/>
         </p:spPr>
         <p:txBody>
-          <a:bodyPr wrap="square" lIns="0" tIns="0" rIns="0" bIns="0" rtlCol="0" anchor="ctr"/>
+          <a:bodyPr wrap="square" lIns="0" tIns="0" rIns="0" bIns="0" rtlCol="0" anchor="ctr">
+            <a:normAutofit/>
+          </a:bodyPr>
           <a:lstStyle/>
           <a:p>
             <a:pPr algn="ctr" indent="0" marL="0">
               <a:buNone/>
             </a:pPr>
             <a:r>
-              <a:rPr lang="en-US" sz="1600" i="1" dirty="0">
-                <a:solidFill>
-                  <a:srgbClr val="555555"/>
+              <a:rPr lang="en-US" sz="3600" b="1" dirty="0">
+                <a:solidFill>
+                  <a:srgbClr val="990011"/>
                 </a:solidFill>
                 <a:latin typeface="Times New Roman" pitchFamily="34" charset="0"/>
                 <a:ea typeface="Times New Roman" pitchFamily="34" charset="-122"/>
                 <a:cs typeface="Times New Roman" pitchFamily="34" charset="-120"/>
               </a:rPr>
-              <a:t>Illustration: snow on Kilimanjaro</a:t>
-            </a:r>
-            <a:endParaRPr lang="en-US" sz="1600" dirty="0"/>
+              <a:t>1. Nature of the Surface</a:t>
+            </a:r>
+            <a:endParaRPr lang="en-US" sz="3600" dirty="0"/>
+          </a:p>
+        </p:txBody>
+      </p:sp>
+      <p:sp>
+        <p:nvSpPr>
+          <p:cNvPr id="5" name="Text 2"/>
+          <p:cNvSpPr/>
+          <p:nvPr/>
+        </p:nvSpPr>
+        <p:spPr>
+          <a:xfrm>
+            <a:off x="2697480" y="1783080"/>
+            <a:ext cx="9174175" cy="4663440"/>
+          </a:xfrm>
+          <a:prstGeom prst="rect">
+            <a:avLst/>
+          </a:prstGeom>
+          <a:noFill/>
+          <a:ln/>
+        </p:spPr>
+        <p:txBody>
+          <a:bodyPr wrap="square" lIns="0" tIns="0" rIns="0" bIns="0" rtlCol="0" anchor="t"/>
+          <a:lstStyle/>
+          <a:p>
+            <a:pPr algn="l" indent="0" marL="0">
+              <a:spcAft>
+                <a:spcPts val="800"/>
+              </a:spcAft>
+              <a:buNone/>
+            </a:pPr>
+            <a:r>
+              <a:rPr lang="en-US" sz="4000" b="1" dirty="0">
+                <a:solidFill>
+                  <a:srgbClr val="111111"/>
+                </a:solidFill>
+                <a:latin typeface="Times New Roman" pitchFamily="34" charset="0"/>
+                <a:ea typeface="Times New Roman" pitchFamily="34" charset="-122"/>
+                <a:cs typeface="Times New Roman" pitchFamily="34" charset="-120"/>
+              </a:rPr>
+              <a:t>Distance from the sea: </a:t>
+            </a:r>
+            <a:pPr algn="l" indent="0" marL="0">
+              <a:spcAft>
+                <a:spcPts val="800"/>
+              </a:spcAft>
+              <a:buNone/>
+            </a:pPr>
+            <a:r>
+              <a:rPr lang="en-US" sz="4000" dirty="0">
+                <a:solidFill>
+                  <a:srgbClr val="111111"/>
+                </a:solidFill>
+                <a:latin typeface="Times New Roman" pitchFamily="34" charset="0"/>
+                <a:ea typeface="Times New Roman" pitchFamily="34" charset="-122"/>
+                <a:cs typeface="Times New Roman" pitchFamily="34" charset="-120"/>
+              </a:rPr>
+              <a:t>Coastal places such as Douala and Kribi have a small range of temperature because the sea keeps them mild. Inland places such as Garoua and Maroua have a large range, with very hot days in March and April and cool nights in December and January.</a:t>
+            </a:r>
+            <a:endParaRPr lang="en-US" sz="4000" dirty="0"/>
           </a:p>
         </p:txBody>
       </p:sp>
@@ -16403,7 +16752,7 @@
         <p:spPr>
           <a:xfrm>
             <a:off x="365760" y="1783080"/>
-            <a:ext cx="4846320" cy="4617720"/>
+            <a:ext cx="6035040" cy="4617720"/>
           </a:xfrm>
           <a:prstGeom prst="rect">
             <a:avLst/>
@@ -16422,7 +16771,7 @@
               <a:buNone/>
             </a:pPr>
             <a:r>
-              <a:rPr lang="en-US" sz="3600" b="1" dirty="0">
+              <a:rPr lang="en-US" sz="2800" i="1" dirty="0">
                 <a:solidFill>
                   <a:srgbClr val="111111"/>
                 </a:solidFill>
@@ -16430,8 +16779,11 @@
                 <a:ea typeface="Times New Roman" pitchFamily="34" charset="-122"/>
                 <a:cs typeface="Times New Roman" pitchFamily="34" charset="-120"/>
               </a:rPr>
-              <a:t>Aspect: </a:t>
-            </a:r>
+              <a:t>Relief influences temperature in the following ways:</a:t>
+            </a:r>
+            <a:endParaRPr lang="en-US" sz="2800" dirty="0"/>
+          </a:p>
+          <a:p>
             <a:pPr algn="l" indent="0" marL="0">
               <a:spcAft>
                 <a:spcPts val="800"/>
@@ -16439,7 +16791,7 @@
               <a:buNone/>
             </a:pPr>
             <a:r>
-              <a:rPr lang="en-US" sz="3600" dirty="0">
+              <a:rPr lang="en-US" sz="2800" b="1" dirty="0">
                 <a:solidFill>
                   <a:srgbClr val="111111"/>
                 </a:solidFill>
@@ -16447,15 +16799,32 @@
                 <a:ea typeface="Times New Roman" pitchFamily="34" charset="-122"/>
                 <a:cs typeface="Times New Roman" pitchFamily="34" charset="-120"/>
               </a:rPr>
-              <a:t>In the northern hemisphere, south-facing slopes receive more sun and are warmer and drier than north-facing slopes.</a:t>
-            </a:r>
-            <a:endParaRPr lang="en-US" sz="3600" dirty="0"/>
+              <a:t>Altitude above sea level: </a:t>
+            </a:r>
+            <a:pPr algn="l" indent="0" marL="0">
+              <a:spcAft>
+                <a:spcPts val="800"/>
+              </a:spcAft>
+              <a:buNone/>
+            </a:pPr>
+            <a:r>
+              <a:rPr lang="en-US" sz="2800" dirty="0">
+                <a:solidFill>
+                  <a:srgbClr val="111111"/>
+                </a:solidFill>
+                <a:latin typeface="Times New Roman" pitchFamily="34" charset="0"/>
+                <a:ea typeface="Times New Roman" pitchFamily="34" charset="-122"/>
+                <a:cs typeface="Times New Roman" pitchFamily="34" charset="-120"/>
+              </a:rPr>
+              <a:t>Temperature falls by about 6.5 °C for every 1,000 m of height, because the air is thinner and further from the heated ground. This is why Ngaoundéré (about 1,100 m) and the Mandara Mountains are cooler than Garoua.</a:t>
+            </a:r>
+            <a:endParaRPr lang="en-US" sz="2800" dirty="0"/>
           </a:p>
         </p:txBody>
       </p:sp>
       <p:pic>
         <p:nvPicPr>
-          <p:cNvPr id="5" name="Image 0" descr="/home/claude/f4/img/v2/aspect_big.png">    </p:cNvPr>
+          <p:cNvPr id="5" name="Image 0" descr="/home/claude/f4/img/v2/f2t_kilimanjaro.jpg">    </p:cNvPr>
           <p:cNvPicPr>
             <a:picLocks noChangeAspect="1"/>
           </p:cNvPicPr>
@@ -16469,8 +16838,8 @@
         </p:blipFill>
         <p:spPr>
           <a:xfrm>
-            <a:off x="5349240" y="2617506"/>
-            <a:ext cx="6659575" cy="2601397"/>
+            <a:off x="6537960" y="2400897"/>
+            <a:ext cx="5470855" cy="3034615"/>
           </a:xfrm>
           <a:prstGeom prst="rect">
             <a:avLst/>
@@ -16485,8 +16854,8 @@
         </p:nvSpPr>
         <p:spPr>
           <a:xfrm>
-            <a:off x="5349240" y="6089904"/>
-            <a:ext cx="6659575" cy="347472"/>
+            <a:off x="6537960" y="6089904"/>
+            <a:ext cx="5470855" cy="347472"/>
           </a:xfrm>
           <a:prstGeom prst="rect">
             <a:avLst/>
@@ -16510,7 +16879,7 @@
                 <a:ea typeface="Times New Roman" pitchFamily="34" charset="-122"/>
                 <a:cs typeface="Times New Roman" pitchFamily="34" charset="-120"/>
               </a:rPr>
-              <a:t>Illustration: the aspect of slopes</a:t>
+              <a:t>Illustration: a snow-capped mountain in the tropics</a:t>
             </a:r>
             <a:endParaRPr lang="en-US" sz="1600" dirty="0"/>
           </a:p>
@@ -16628,9 +16997,109 @@
           </a:p>
         </p:txBody>
       </p:sp>
+      <p:sp>
+        <p:nvSpPr>
+          <p:cNvPr id="3" name="Text 1"/>
+          <p:cNvSpPr/>
+          <p:nvPr/>
+        </p:nvSpPr>
+        <p:spPr>
+          <a:xfrm>
+            <a:off x="365760" y="1005840"/>
+            <a:ext cx="11460175" cy="731520"/>
+          </a:xfrm>
+          <a:prstGeom prst="rect">
+            <a:avLst/>
+          </a:prstGeom>
+          <a:noFill/>
+          <a:ln/>
+        </p:spPr>
+        <p:txBody>
+          <a:bodyPr wrap="square" lIns="0" tIns="0" rIns="0" bIns="0" rtlCol="0" anchor="ctr">
+            <a:normAutofit/>
+          </a:bodyPr>
+          <a:lstStyle/>
+          <a:p>
+            <a:pPr algn="ctr" indent="0" marL="0">
+              <a:buNone/>
+            </a:pPr>
+            <a:r>
+              <a:rPr lang="en-US" sz="3600" b="1" dirty="0">
+                <a:solidFill>
+                  <a:srgbClr val="990011"/>
+                </a:solidFill>
+                <a:latin typeface="Times New Roman" pitchFamily="34" charset="0"/>
+                <a:ea typeface="Times New Roman" pitchFamily="34" charset="-122"/>
+                <a:cs typeface="Times New Roman" pitchFamily="34" charset="-120"/>
+              </a:rPr>
+              <a:t>2. Relief</a:t>
+            </a:r>
+            <a:endParaRPr lang="en-US" sz="3600" dirty="0"/>
+          </a:p>
+        </p:txBody>
+      </p:sp>
+      <p:sp>
+        <p:nvSpPr>
+          <p:cNvPr id="4" name="Text 2"/>
+          <p:cNvSpPr/>
+          <p:nvPr/>
+        </p:nvSpPr>
+        <p:spPr>
+          <a:xfrm>
+            <a:off x="365760" y="1783080"/>
+            <a:ext cx="6035040" cy="4617720"/>
+          </a:xfrm>
+          <a:prstGeom prst="rect">
+            <a:avLst/>
+          </a:prstGeom>
+          <a:noFill/>
+          <a:ln/>
+        </p:spPr>
+        <p:txBody>
+          <a:bodyPr wrap="square" lIns="0" tIns="0" rIns="0" bIns="0" rtlCol="0" anchor="t"/>
+          <a:lstStyle/>
+          <a:p>
+            <a:pPr algn="l" indent="0" marL="0">
+              <a:spcAft>
+                <a:spcPts val="800"/>
+              </a:spcAft>
+              <a:buNone/>
+            </a:pPr>
+            <a:r>
+              <a:rPr lang="en-US" sz="3200" b="1" dirty="0">
+                <a:solidFill>
+                  <a:srgbClr val="111111"/>
+                </a:solidFill>
+                <a:latin typeface="Times New Roman" pitchFamily="34" charset="0"/>
+                <a:ea typeface="Times New Roman" pitchFamily="34" charset="-122"/>
+                <a:cs typeface="Times New Roman" pitchFamily="34" charset="-120"/>
+              </a:rPr>
+              <a:t>Aspect of slope: </a:t>
+            </a:r>
+            <a:pPr algn="l" indent="0" marL="0">
+              <a:spcAft>
+                <a:spcPts val="800"/>
+              </a:spcAft>
+              <a:buNone/>
+            </a:pPr>
+            <a:r>
+              <a:rPr lang="en-US" sz="3200" dirty="0">
+                <a:solidFill>
+                  <a:srgbClr val="111111"/>
+                </a:solidFill>
+                <a:latin typeface="Times New Roman" pitchFamily="34" charset="0"/>
+                <a:ea typeface="Times New Roman" pitchFamily="34" charset="-122"/>
+                <a:cs typeface="Times New Roman" pitchFamily="34" charset="-120"/>
+              </a:rPr>
+              <a:t>In the northern hemisphere, the adret (south-facing slope) receives the rays of the sun more directly and is warmer and drier. The ubac (north-facing slope) is shaded, so it is cooler, and in the Alps villages and farms are built on the adret.</a:t>
+            </a:r>
+            <a:endParaRPr lang="en-US" sz="3200" dirty="0"/>
+          </a:p>
+        </p:txBody>
+      </p:sp>
       <p:pic>
         <p:nvPicPr>
-          <p:cNvPr id="3" name="Image 0" descr="/home/claude/f4/img/minesec_sheet.png">    </p:cNvPr>
+          <p:cNvPr id="5" name="Image 0" descr="/home/claude/f4/img/v2/aspect_big.png">    </p:cNvPr>
           <p:cNvPicPr>
             <a:picLocks noChangeAspect="1"/>
           </p:cNvPicPr>
@@ -16644,8 +17113,8 @@
         </p:blipFill>
         <p:spPr>
           <a:xfrm>
-            <a:off x="0" y="658368"/>
-            <a:ext cx="5120640" cy="5833872"/>
+            <a:off x="6537960" y="2849678"/>
+            <a:ext cx="5470855" cy="2137053"/>
           </a:xfrm>
           <a:prstGeom prst="rect">
             <a:avLst/>
@@ -16654,14 +17123,14 @@
       </p:pic>
       <p:sp>
         <p:nvSpPr>
-          <p:cNvPr id="4" name="Text 1"/>
+          <p:cNvPr id="6" name="Text 3"/>
           <p:cNvSpPr/>
           <p:nvPr/>
         </p:nvSpPr>
         <p:spPr>
           <a:xfrm>
-            <a:off x="5349240" y="1005840"/>
-            <a:ext cx="6522415" cy="731520"/>
+            <a:off x="6537960" y="6089904"/>
+            <a:ext cx="5470855" cy="347472"/>
           </a:xfrm>
           <a:prstGeom prst="rect">
             <a:avLst/>
@@ -16670,85 +17139,24 @@
           <a:ln/>
         </p:spPr>
         <p:txBody>
-          <a:bodyPr wrap="square" lIns="0" tIns="0" rIns="0" bIns="0" rtlCol="0" anchor="ctr">
-            <a:normAutofit/>
-          </a:bodyPr>
+          <a:bodyPr wrap="square" lIns="0" tIns="0" rIns="0" bIns="0" rtlCol="0" anchor="ctr"/>
           <a:lstStyle/>
           <a:p>
             <a:pPr algn="ctr" indent="0" marL="0">
               <a:buNone/>
             </a:pPr>
             <a:r>
-              <a:rPr lang="en-US" sz="3600" b="1" dirty="0">
-                <a:solidFill>
-                  <a:srgbClr val="990011"/>
+              <a:rPr lang="en-US" sz="1600" i="1" dirty="0">
+                <a:solidFill>
+                  <a:srgbClr val="555555"/>
                 </a:solidFill>
                 <a:latin typeface="Times New Roman" pitchFamily="34" charset="0"/>
                 <a:ea typeface="Times New Roman" pitchFamily="34" charset="-122"/>
                 <a:cs typeface="Times New Roman" pitchFamily="34" charset="-120"/>
               </a:rPr>
-              <a:t>2. Relief</a:t>
-            </a:r>
-            <a:endParaRPr lang="en-US" sz="3600" dirty="0"/>
-          </a:p>
-        </p:txBody>
-      </p:sp>
-      <p:sp>
-        <p:nvSpPr>
-          <p:cNvPr id="5" name="Text 2"/>
-          <p:cNvSpPr/>
-          <p:nvPr/>
-        </p:nvSpPr>
-        <p:spPr>
-          <a:xfrm>
-            <a:off x="5349240" y="1783080"/>
-            <a:ext cx="6522415" cy="4663440"/>
-          </a:xfrm>
-          <a:prstGeom prst="rect">
-            <a:avLst/>
-          </a:prstGeom>
-          <a:noFill/>
-          <a:ln/>
-        </p:spPr>
-        <p:txBody>
-          <a:bodyPr wrap="square" lIns="0" tIns="0" rIns="0" bIns="0" rtlCol="0" anchor="t"/>
-          <a:lstStyle/>
-          <a:p>
-            <a:pPr algn="l" indent="0" marL="0">
-              <a:spcAft>
-                <a:spcPts val="800"/>
-              </a:spcAft>
-              <a:buNone/>
-            </a:pPr>
-            <a:r>
-              <a:rPr lang="en-US" sz="4000" b="1" dirty="0">
-                <a:solidFill>
-                  <a:srgbClr val="111111"/>
-                </a:solidFill>
-                <a:latin typeface="Times New Roman" pitchFamily="34" charset="0"/>
-                <a:ea typeface="Times New Roman" pitchFamily="34" charset="-122"/>
-                <a:cs typeface="Times New Roman" pitchFamily="34" charset="-120"/>
-              </a:rPr>
-              <a:t>Valleys: </a:t>
-            </a:r>
-            <a:pPr algn="l" indent="0" marL="0">
-              <a:spcAft>
-                <a:spcPts val="800"/>
-              </a:spcAft>
-              <a:buNone/>
-            </a:pPr>
-            <a:r>
-              <a:rPr lang="en-US" sz="4000" dirty="0">
-                <a:solidFill>
-                  <a:srgbClr val="111111"/>
-                </a:solidFill>
-                <a:latin typeface="Times New Roman" pitchFamily="34" charset="0"/>
-                <a:ea typeface="Times New Roman" pitchFamily="34" charset="-122"/>
-                <a:cs typeface="Times New Roman" pitchFamily="34" charset="-120"/>
-              </a:rPr>
-              <a:t>Cold air can drain into valleys at night, making them cooler than the slopes.</a:t>
-            </a:r>
-            <a:endParaRPr lang="en-US" sz="4000" dirty="0"/>
+              <a:t>Illustration: adret and ubac</a:t>
+            </a:r>
+            <a:endParaRPr lang="en-US" sz="1600" dirty="0"/>
           </a:p>
         </p:txBody>
       </p:sp>
@@ -16899,7 +17307,7 @@
                 <a:ea typeface="Times New Roman" pitchFamily="34" charset="-122"/>
                 <a:cs typeface="Times New Roman" pitchFamily="34" charset="-120"/>
               </a:rPr>
-              <a:t>3. Ocean Currents, Winds and Clouds</a:t>
+              <a:t>3. Ocean Currents</a:t>
             </a:r>
             <a:endParaRPr lang="en-US" sz="3600" dirty="0"/>
           </a:p>
@@ -16914,7 +17322,7 @@
         <p:spPr>
           <a:xfrm>
             <a:off x="365760" y="1783080"/>
-            <a:ext cx="4846320" cy="4617720"/>
+            <a:ext cx="6035040" cy="4617720"/>
           </a:xfrm>
           <a:prstGeom prst="rect">
             <a:avLst/>
@@ -16933,7 +17341,7 @@
               <a:buNone/>
             </a:pPr>
             <a:r>
-              <a:rPr lang="en-US" sz="3600" i="1" dirty="0">
+              <a:rPr lang="en-US" sz="2800" i="1" dirty="0">
                 <a:solidFill>
                   <a:srgbClr val="111111"/>
                 </a:solidFill>
@@ -16941,9 +17349,9 @@
                 <a:ea typeface="Times New Roman" pitchFamily="34" charset="-122"/>
                 <a:cs typeface="Times New Roman" pitchFamily="34" charset="-120"/>
               </a:rPr>
-              <a:t>Ocean currents, winds and clouds influence temperature as follows:</a:t>
-            </a:r>
-            <a:endParaRPr lang="en-US" sz="3600" dirty="0"/>
+              <a:t>Ocean currents influence temperature in the following ways:</a:t>
+            </a:r>
+            <a:endParaRPr lang="en-US" sz="2800" dirty="0"/>
           </a:p>
           <a:p>
             <a:pPr algn="l" indent="0" marL="0">
@@ -16953,7 +17361,7 @@
               <a:buNone/>
             </a:pPr>
             <a:r>
-              <a:rPr lang="en-US" sz="3600" b="1" dirty="0">
+              <a:rPr lang="en-US" sz="2800" b="1" dirty="0">
                 <a:solidFill>
                   <a:srgbClr val="111111"/>
                 </a:solidFill>
@@ -16970,7 +17378,7 @@
               <a:buNone/>
             </a:pPr>
             <a:r>
-              <a:rPr lang="en-US" sz="3600" dirty="0">
+              <a:rPr lang="en-US" sz="2800" dirty="0">
                 <a:solidFill>
                   <a:srgbClr val="111111"/>
                 </a:solidFill>
@@ -16978,9 +17386,9 @@
                 <a:ea typeface="Times New Roman" pitchFamily="34" charset="-122"/>
                 <a:cs typeface="Times New Roman" pitchFamily="34" charset="-120"/>
               </a:rPr>
-              <a:t>They warm the coasts they touch, like the Guinea Current along the coast of Cameroon.</a:t>
-            </a:r>
-            <a:endParaRPr lang="en-US" sz="3600" dirty="0"/>
+              <a:t>Warm currents flow from the tropics towards the poles and warm the air of the coasts they touch. For example, the North Atlantic Drift keeps the ports of Norway free of ice in winter, and the Guinea Current keeps the coast of Cameroon warm.</a:t>
+            </a:r>
+            <a:endParaRPr lang="en-US" sz="2800" dirty="0"/>
           </a:p>
         </p:txBody>
       </p:sp>
@@ -17000,8 +17408,8 @@
         </p:blipFill>
         <p:spPr>
           <a:xfrm>
-            <a:off x="5349240" y="2253310"/>
-            <a:ext cx="6659575" cy="3329788"/>
+            <a:off x="6537960" y="2550490"/>
+            <a:ext cx="5470855" cy="2735428"/>
           </a:xfrm>
           <a:prstGeom prst="rect">
             <a:avLst/>
@@ -17016,8 +17424,8 @@
         </p:nvSpPr>
         <p:spPr>
           <a:xfrm>
-            <a:off x="5349240" y="6089904"/>
-            <a:ext cx="6659575" cy="347472"/>
+            <a:off x="6537960" y="6089904"/>
+            <a:ext cx="5470855" cy="347472"/>
           </a:xfrm>
           <a:prstGeom prst="rect">
             <a:avLst/>
@@ -17176,7 +17584,7 @@
         <p:spPr>
           <a:xfrm>
             <a:off x="0" y="658368"/>
-            <a:ext cx="3840480" cy="5833872"/>
+            <a:ext cx="5120640" cy="5833872"/>
           </a:xfrm>
           <a:prstGeom prst="rect">
             <a:avLst/>
@@ -17191,8 +17599,8 @@
         </p:nvSpPr>
         <p:spPr>
           <a:xfrm>
-            <a:off x="4069080" y="1005840"/>
-            <a:ext cx="7802575" cy="731520"/>
+            <a:off x="5349240" y="1005840"/>
+            <a:ext cx="6522415" cy="731520"/>
           </a:xfrm>
           <a:prstGeom prst="rect">
             <a:avLst/>
@@ -17218,7 +17626,7 @@
                 <a:ea typeface="Times New Roman" pitchFamily="34" charset="-122"/>
                 <a:cs typeface="Times New Roman" pitchFamily="34" charset="-120"/>
               </a:rPr>
-              <a:t>3. Ocean Currents, Winds and Clouds</a:t>
+              <a:t>3. Ocean Currents</a:t>
             </a:r>
             <a:endParaRPr lang="en-US" sz="3600" dirty="0"/>
           </a:p>
@@ -17232,8 +17640,8 @@
         </p:nvSpPr>
         <p:spPr>
           <a:xfrm>
-            <a:off x="4069080" y="1783080"/>
-            <a:ext cx="7802575" cy="4663440"/>
+            <a:off x="5349240" y="1783080"/>
+            <a:ext cx="6522415" cy="4663440"/>
           </a:xfrm>
           <a:prstGeom prst="rect">
             <a:avLst/>
@@ -17277,44 +17685,7 @@
                 <a:ea typeface="Times New Roman" pitchFamily="34" charset="-122"/>
                 <a:cs typeface="Times New Roman" pitchFamily="34" charset="-120"/>
               </a:rPr>
-              <a:t>They cool and dry the coasts they touch, like the Benguela Current off Namibia.</a:t>
-            </a:r>
-            <a:endParaRPr lang="en-US" sz="4000" dirty="0"/>
-          </a:p>
-          <a:p>
-            <a:pPr algn="l" indent="0" marL="0">
-              <a:spcAft>
-                <a:spcPts val="800"/>
-              </a:spcAft>
-              <a:buNone/>
-            </a:pPr>
-            <a:r>
-              <a:rPr lang="en-US" sz="4000" b="1" dirty="0">
-                <a:solidFill>
-                  <a:srgbClr val="111111"/>
-                </a:solidFill>
-                <a:latin typeface="Times New Roman" pitchFamily="34" charset="0"/>
-                <a:ea typeface="Times New Roman" pitchFamily="34" charset="-122"/>
-                <a:cs typeface="Times New Roman" pitchFamily="34" charset="-120"/>
-              </a:rPr>
-              <a:t>Prevailing winds: </a:t>
-            </a:r>
-            <a:pPr algn="l" indent="0" marL="0">
-              <a:spcAft>
-                <a:spcPts val="800"/>
-              </a:spcAft>
-              <a:buNone/>
-            </a:pPr>
-            <a:r>
-              <a:rPr lang="en-US" sz="4000" dirty="0">
-                <a:solidFill>
-                  <a:srgbClr val="111111"/>
-                </a:solidFill>
-                <a:latin typeface="Times New Roman" pitchFamily="34" charset="0"/>
-                <a:ea typeface="Times New Roman" pitchFamily="34" charset="-122"/>
-                <a:cs typeface="Times New Roman" pitchFamily="34" charset="-120"/>
-              </a:rPr>
-              <a:t>Winds from hot regions raise temperatures, like the Harmattan; winds from the sea or cold regions lower them.</a:t>
+              <a:t>Cold currents flow from the poles towards the Equator and cool the air above them. For example, the Benguela Current cools the coast of Namibia and helps to form the Namib Desert.</a:t>
             </a:r>
             <a:endParaRPr lang="en-US" sz="4000" dirty="0"/>
           </a:p>
@@ -17432,9 +17803,129 @@
           </a:p>
         </p:txBody>
       </p:sp>
+      <p:sp>
+        <p:nvSpPr>
+          <p:cNvPr id="3" name="Text 1"/>
+          <p:cNvSpPr/>
+          <p:nvPr/>
+        </p:nvSpPr>
+        <p:spPr>
+          <a:xfrm>
+            <a:off x="365760" y="1005840"/>
+            <a:ext cx="11460175" cy="731520"/>
+          </a:xfrm>
+          <a:prstGeom prst="rect">
+            <a:avLst/>
+          </a:prstGeom>
+          <a:noFill/>
+          <a:ln/>
+        </p:spPr>
+        <p:txBody>
+          <a:bodyPr wrap="square" lIns="0" tIns="0" rIns="0" bIns="0" rtlCol="0" anchor="ctr">
+            <a:normAutofit/>
+          </a:bodyPr>
+          <a:lstStyle/>
+          <a:p>
+            <a:pPr algn="ctr" indent="0" marL="0">
+              <a:buNone/>
+            </a:pPr>
+            <a:r>
+              <a:rPr lang="en-US" sz="3600" b="1" dirty="0">
+                <a:solidFill>
+                  <a:srgbClr val="990011"/>
+                </a:solidFill>
+                <a:latin typeface="Times New Roman" pitchFamily="34" charset="0"/>
+                <a:ea typeface="Times New Roman" pitchFamily="34" charset="-122"/>
+                <a:cs typeface="Times New Roman" pitchFamily="34" charset="-120"/>
+              </a:rPr>
+              <a:t>4. Prevailing Winds</a:t>
+            </a:r>
+            <a:endParaRPr lang="en-US" sz="3600" dirty="0"/>
+          </a:p>
+        </p:txBody>
+      </p:sp>
+      <p:sp>
+        <p:nvSpPr>
+          <p:cNvPr id="4" name="Text 2"/>
+          <p:cNvSpPr/>
+          <p:nvPr/>
+        </p:nvSpPr>
+        <p:spPr>
+          <a:xfrm>
+            <a:off x="365760" y="1783080"/>
+            <a:ext cx="6035040" cy="4617720"/>
+          </a:xfrm>
+          <a:prstGeom prst="rect">
+            <a:avLst/>
+          </a:prstGeom>
+          <a:noFill/>
+          <a:ln/>
+        </p:spPr>
+        <p:txBody>
+          <a:bodyPr wrap="square" lIns="0" tIns="0" rIns="0" bIns="0" rtlCol="0" anchor="t"/>
+          <a:lstStyle/>
+          <a:p>
+            <a:pPr algn="l" indent="0" marL="0">
+              <a:spcAft>
+                <a:spcPts val="800"/>
+              </a:spcAft>
+              <a:buNone/>
+            </a:pPr>
+            <a:r>
+              <a:rPr lang="en-US" sz="3000" i="1" dirty="0">
+                <a:solidFill>
+                  <a:srgbClr val="111111"/>
+                </a:solidFill>
+                <a:latin typeface="Times New Roman" pitchFamily="34" charset="0"/>
+                <a:ea typeface="Times New Roman" pitchFamily="34" charset="-122"/>
+                <a:cs typeface="Times New Roman" pitchFamily="34" charset="-120"/>
+              </a:rPr>
+              <a:t>Prevailing winds influence temperature in the following ways:</a:t>
+            </a:r>
+            <a:endParaRPr lang="en-US" sz="3000" dirty="0"/>
+          </a:p>
+          <a:p>
+            <a:pPr algn="l" indent="0" marL="0">
+              <a:spcAft>
+                <a:spcPts val="800"/>
+              </a:spcAft>
+              <a:buNone/>
+            </a:pPr>
+            <a:r>
+              <a:rPr lang="en-US" sz="3000" b="1" dirty="0">
+                <a:solidFill>
+                  <a:srgbClr val="111111"/>
+                </a:solidFill>
+                <a:latin typeface="Times New Roman" pitchFamily="34" charset="0"/>
+                <a:ea typeface="Times New Roman" pitchFamily="34" charset="-122"/>
+                <a:cs typeface="Times New Roman" pitchFamily="34" charset="-120"/>
+              </a:rPr>
+              <a:t>Winds from warm regions: </a:t>
+            </a:r>
+            <a:pPr algn="l" indent="0" marL="0">
+              <a:spcAft>
+                <a:spcPts val="800"/>
+              </a:spcAft>
+              <a:buNone/>
+            </a:pPr>
+            <a:r>
+              <a:rPr lang="en-US" sz="3000" dirty="0">
+                <a:solidFill>
+                  <a:srgbClr val="111111"/>
+                </a:solidFill>
+                <a:latin typeface="Times New Roman" pitchFamily="34" charset="0"/>
+                <a:ea typeface="Times New Roman" pitchFamily="34" charset="-122"/>
+                <a:cs typeface="Times New Roman" pitchFamily="34" charset="-120"/>
+              </a:rPr>
+              <a:t>Winds carry the temperature of the regions they come from. For example, the Harmattan brings hot, dry air from the Sahara, so it raises the day temperature of Garoua in February and March.</a:t>
+            </a:r>
+            <a:endParaRPr lang="en-US" sz="3000" dirty="0"/>
+          </a:p>
+        </p:txBody>
+      </p:sp>
       <p:pic>
         <p:nvPicPr>
-          <p:cNvPr id="3" name="Image 0" descr="/home/claude/f4/img/minesec_sheet.png">    </p:cNvPr>
+          <p:cNvPr id="5" name="Image 0" descr="/home/claude/f4/img/v2/f2t_harmattan.jpg">    </p:cNvPr>
           <p:cNvPicPr>
             <a:picLocks noChangeAspect="1"/>
           </p:cNvPicPr>
@@ -17448,8 +17939,8 @@
         </p:blipFill>
         <p:spPr>
           <a:xfrm>
-            <a:off x="0" y="658368"/>
-            <a:ext cx="3840480" cy="5833872"/>
+            <a:off x="6537960" y="2400897"/>
+            <a:ext cx="5470855" cy="3034615"/>
           </a:xfrm>
           <a:prstGeom prst="rect">
             <a:avLst/>
@@ -17458,14 +17949,14 @@
       </p:pic>
       <p:sp>
         <p:nvSpPr>
-          <p:cNvPr id="4" name="Text 1"/>
+          <p:cNvPr id="6" name="Text 3"/>
           <p:cNvSpPr/>
           <p:nvPr/>
         </p:nvSpPr>
         <p:spPr>
           <a:xfrm>
-            <a:off x="4069080" y="1005840"/>
-            <a:ext cx="7802575" cy="731520"/>
+            <a:off x="6537960" y="6089904"/>
+            <a:ext cx="5470855" cy="347472"/>
           </a:xfrm>
           <a:prstGeom prst="rect">
             <a:avLst/>
@@ -17474,122 +17965,24 @@
           <a:ln/>
         </p:spPr>
         <p:txBody>
-          <a:bodyPr wrap="square" lIns="0" tIns="0" rIns="0" bIns="0" rtlCol="0" anchor="ctr">
-            <a:normAutofit/>
-          </a:bodyPr>
+          <a:bodyPr wrap="square" lIns="0" tIns="0" rIns="0" bIns="0" rtlCol="0" anchor="ctr"/>
           <a:lstStyle/>
           <a:p>
             <a:pPr algn="ctr" indent="0" marL="0">
               <a:buNone/>
             </a:pPr>
             <a:r>
-              <a:rPr lang="en-US" sz="3600" b="1" dirty="0">
-                <a:solidFill>
-                  <a:srgbClr val="990011"/>
+              <a:rPr lang="en-US" sz="1600" i="1" dirty="0">
+                <a:solidFill>
+                  <a:srgbClr val="555555"/>
                 </a:solidFill>
                 <a:latin typeface="Times New Roman" pitchFamily="34" charset="0"/>
                 <a:ea typeface="Times New Roman" pitchFamily="34" charset="-122"/>
                 <a:cs typeface="Times New Roman" pitchFamily="34" charset="-120"/>
               </a:rPr>
-              <a:t>3. Ocean Currents, Winds and Clouds (continued)</a:t>
-            </a:r>
-            <a:endParaRPr lang="en-US" sz="3600" dirty="0"/>
-          </a:p>
-        </p:txBody>
-      </p:sp>
-      <p:sp>
-        <p:nvSpPr>
-          <p:cNvPr id="5" name="Text 2"/>
-          <p:cNvSpPr/>
-          <p:nvPr/>
-        </p:nvSpPr>
-        <p:spPr>
-          <a:xfrm>
-            <a:off x="4069080" y="1783080"/>
-            <a:ext cx="7802575" cy="4663440"/>
-          </a:xfrm>
-          <a:prstGeom prst="rect">
-            <a:avLst/>
-          </a:prstGeom>
-          <a:noFill/>
-          <a:ln/>
-        </p:spPr>
-        <p:txBody>
-          <a:bodyPr wrap="square" lIns="0" tIns="0" rIns="0" bIns="0" rtlCol="0" anchor="t"/>
-          <a:lstStyle/>
-          <a:p>
-            <a:pPr algn="l" indent="0" marL="0">
-              <a:spcAft>
-                <a:spcPts val="800"/>
-              </a:spcAft>
-              <a:buNone/>
-            </a:pPr>
-            <a:r>
-              <a:rPr lang="en-US" sz="4000" b="1" dirty="0">
-                <a:solidFill>
-                  <a:srgbClr val="111111"/>
-                </a:solidFill>
-                <a:latin typeface="Times New Roman" pitchFamily="34" charset="0"/>
-                <a:ea typeface="Times New Roman" pitchFamily="34" charset="-122"/>
-                <a:cs typeface="Times New Roman" pitchFamily="34" charset="-120"/>
-              </a:rPr>
-              <a:t>Cloud cover by day: </a:t>
-            </a:r>
-            <a:pPr algn="l" indent="0" marL="0">
-              <a:spcAft>
-                <a:spcPts val="800"/>
-              </a:spcAft>
-              <a:buNone/>
-            </a:pPr>
-            <a:r>
-              <a:rPr lang="en-US" sz="4000" dirty="0">
-                <a:solidFill>
-                  <a:srgbClr val="111111"/>
-                </a:solidFill>
-                <a:latin typeface="Times New Roman" pitchFamily="34" charset="0"/>
-                <a:ea typeface="Times New Roman" pitchFamily="34" charset="-122"/>
-                <a:cs typeface="Times New Roman" pitchFamily="34" charset="-120"/>
-              </a:rPr>
-              <a:t>Clouds reflect sunlight, so cloudy days are cooler.</a:t>
-            </a:r>
-            <a:endParaRPr lang="en-US" sz="4000" dirty="0"/>
-          </a:p>
-          <a:p>
-            <a:pPr algn="l" indent="0" marL="0">
-              <a:spcAft>
-                <a:spcPts val="800"/>
-              </a:spcAft>
-              <a:buNone/>
-            </a:pPr>
-            <a:r>
-              <a:rPr lang="en-US" sz="4000" b="1" dirty="0">
-                <a:solidFill>
-                  <a:srgbClr val="111111"/>
-                </a:solidFill>
-                <a:latin typeface="Times New Roman" pitchFamily="34" charset="0"/>
-                <a:ea typeface="Times New Roman" pitchFamily="34" charset="-122"/>
-                <a:cs typeface="Times New Roman" pitchFamily="34" charset="-120"/>
-              </a:rPr>
-              <a:t>Cloud cover by night: </a:t>
-            </a:r>
-            <a:pPr algn="l" indent="0" marL="0">
-              <a:spcAft>
-                <a:spcPts val="800"/>
-              </a:spcAft>
-              <a:buNone/>
-            </a:pPr>
-            <a:r>
-              <a:rPr lang="en-US" sz="4000" dirty="0">
-                <a:solidFill>
-                  <a:srgbClr val="111111"/>
-                </a:solidFill>
-                <a:latin typeface="Times New Roman" pitchFamily="34" charset="0"/>
-                <a:ea typeface="Times New Roman" pitchFamily="34" charset="-122"/>
-                <a:cs typeface="Times New Roman" pitchFamily="34" charset="-120"/>
-              </a:rPr>
-              <a:t>Clouds trap terrestrial radiation like a blanket, so cloudy nights are warmer than clear nights.</a:t>
-            </a:r>
-            <a:endParaRPr lang="en-US" sz="4000" dirty="0"/>
+              <a:t>Illustration: the Harmattan</a:t>
+            </a:r>
+            <a:endParaRPr lang="en-US" sz="1600" dirty="0"/>
           </a:p>
         </p:txBody>
       </p:sp>
@@ -17705,129 +18098,9 @@
           </a:p>
         </p:txBody>
       </p:sp>
-      <p:sp>
-        <p:nvSpPr>
-          <p:cNvPr id="3" name="Text 1"/>
-          <p:cNvSpPr/>
-          <p:nvPr/>
-        </p:nvSpPr>
-        <p:spPr>
-          <a:xfrm>
-            <a:off x="365760" y="1005840"/>
-            <a:ext cx="11460175" cy="731520"/>
-          </a:xfrm>
-          <a:prstGeom prst="rect">
-            <a:avLst/>
-          </a:prstGeom>
-          <a:noFill/>
-          <a:ln/>
-        </p:spPr>
-        <p:txBody>
-          <a:bodyPr wrap="square" lIns="0" tIns="0" rIns="0" bIns="0" rtlCol="0" anchor="ctr">
-            <a:normAutofit/>
-          </a:bodyPr>
-          <a:lstStyle/>
-          <a:p>
-            <a:pPr algn="ctr" indent="0" marL="0">
-              <a:buNone/>
-            </a:pPr>
-            <a:r>
-              <a:rPr lang="en-US" sz="3600" b="1" dirty="0">
-                <a:solidFill>
-                  <a:srgbClr val="990011"/>
-                </a:solidFill>
-                <a:latin typeface="Times New Roman" pitchFamily="34" charset="0"/>
-                <a:ea typeface="Times New Roman" pitchFamily="34" charset="-122"/>
-                <a:cs typeface="Times New Roman" pitchFamily="34" charset="-120"/>
-              </a:rPr>
-              <a:t>4. Urbanisation: the Urban Heat Island</a:t>
-            </a:r>
-            <a:endParaRPr lang="en-US" sz="3600" dirty="0"/>
-          </a:p>
-        </p:txBody>
-      </p:sp>
-      <p:sp>
-        <p:nvSpPr>
-          <p:cNvPr id="4" name="Text 2"/>
-          <p:cNvSpPr/>
-          <p:nvPr/>
-        </p:nvSpPr>
-        <p:spPr>
-          <a:xfrm>
-            <a:off x="365760" y="1783080"/>
-            <a:ext cx="4846320" cy="4617720"/>
-          </a:xfrm>
-          <a:prstGeom prst="rect">
-            <a:avLst/>
-          </a:prstGeom>
-          <a:noFill/>
-          <a:ln/>
-        </p:spPr>
-        <p:txBody>
-          <a:bodyPr wrap="square" lIns="0" tIns="0" rIns="0" bIns="0" rtlCol="0" anchor="t"/>
-          <a:lstStyle/>
-          <a:p>
-            <a:pPr algn="l" indent="0" marL="0">
-              <a:spcAft>
-                <a:spcPts val="800"/>
-              </a:spcAft>
-              <a:buNone/>
-            </a:pPr>
-            <a:r>
-              <a:rPr lang="en-US" sz="3600" i="1" dirty="0">
-                <a:solidFill>
-                  <a:srgbClr val="111111"/>
-                </a:solidFill>
-                <a:latin typeface="Times New Roman" pitchFamily="34" charset="0"/>
-                <a:ea typeface="Times New Roman" pitchFamily="34" charset="-122"/>
-                <a:cs typeface="Times New Roman" pitchFamily="34" charset="-120"/>
-              </a:rPr>
-              <a:t>Towns are warmer than the countryside for the following reasons:</a:t>
-            </a:r>
-            <a:endParaRPr lang="en-US" sz="3600" dirty="0"/>
-          </a:p>
-          <a:p>
-            <a:pPr algn="l" indent="0" marL="0">
-              <a:spcAft>
-                <a:spcPts val="800"/>
-              </a:spcAft>
-              <a:buNone/>
-            </a:pPr>
-            <a:r>
-              <a:rPr lang="en-US" sz="3600" b="1" dirty="0">
-                <a:solidFill>
-                  <a:srgbClr val="111111"/>
-                </a:solidFill>
-                <a:latin typeface="Times New Roman" pitchFamily="34" charset="0"/>
-                <a:ea typeface="Times New Roman" pitchFamily="34" charset="-122"/>
-                <a:cs typeface="Times New Roman" pitchFamily="34" charset="-120"/>
-              </a:rPr>
-              <a:t>Surfaces: </a:t>
-            </a:r>
-            <a:pPr algn="l" indent="0" marL="0">
-              <a:spcAft>
-                <a:spcPts val="800"/>
-              </a:spcAft>
-              <a:buNone/>
-            </a:pPr>
-            <a:r>
-              <a:rPr lang="en-US" sz="3600" dirty="0">
-                <a:solidFill>
-                  <a:srgbClr val="111111"/>
-                </a:solidFill>
-                <a:latin typeface="Times New Roman" pitchFamily="34" charset="0"/>
-                <a:ea typeface="Times New Roman" pitchFamily="34" charset="-122"/>
-                <a:cs typeface="Times New Roman" pitchFamily="34" charset="-120"/>
-              </a:rPr>
-              <a:t>Concrete, tar and roofs absorb and store more heat than soil and plants.</a:t>
-            </a:r>
-            <a:endParaRPr lang="en-US" sz="3600" dirty="0"/>
-          </a:p>
-        </p:txBody>
-      </p:sp>
       <p:pic>
         <p:nvPicPr>
-          <p:cNvPr id="5" name="Image 0" descr="/home/claude/f4/img/v2/heat_island_big.png">    </p:cNvPr>
+          <p:cNvPr id="3" name="Image 0" descr="/home/claude/f4/img/minesec_sheet.png">    </p:cNvPr>
           <p:cNvPicPr>
             <a:picLocks noChangeAspect="1"/>
           </p:cNvPicPr>
@@ -17841,8 +18114,8 @@
         </p:blipFill>
         <p:spPr>
           <a:xfrm>
-            <a:off x="5349240" y="2617506"/>
-            <a:ext cx="6659575" cy="2601397"/>
+            <a:off x="0" y="658368"/>
+            <a:ext cx="3840480" cy="5833872"/>
           </a:xfrm>
           <a:prstGeom prst="rect">
             <a:avLst/>
@@ -17851,14 +18124,14 @@
       </p:pic>
       <p:sp>
         <p:nvSpPr>
-          <p:cNvPr id="6" name="Text 3"/>
+          <p:cNvPr id="4" name="Text 1"/>
           <p:cNvSpPr/>
           <p:nvPr/>
         </p:nvSpPr>
         <p:spPr>
           <a:xfrm>
-            <a:off x="5349240" y="6089904"/>
-            <a:ext cx="6659575" cy="347472"/>
+            <a:off x="4069080" y="1005840"/>
+            <a:ext cx="7802575" cy="731520"/>
           </a:xfrm>
           <a:prstGeom prst="rect">
             <a:avLst/>
@@ -17867,24 +18140,85 @@
           <a:ln/>
         </p:spPr>
         <p:txBody>
-          <a:bodyPr wrap="square" lIns="0" tIns="0" rIns="0" bIns="0" rtlCol="0" anchor="ctr"/>
+          <a:bodyPr wrap="square" lIns="0" tIns="0" rIns="0" bIns="0" rtlCol="0" anchor="ctr">
+            <a:normAutofit/>
+          </a:bodyPr>
           <a:lstStyle/>
           <a:p>
             <a:pPr algn="ctr" indent="0" marL="0">
               <a:buNone/>
             </a:pPr>
             <a:r>
-              <a:rPr lang="en-US" sz="1600" i="1" dirty="0">
-                <a:solidFill>
-                  <a:srgbClr val="555555"/>
+              <a:rPr lang="en-US" sz="3600" b="1" dirty="0">
+                <a:solidFill>
+                  <a:srgbClr val="990011"/>
                 </a:solidFill>
                 <a:latin typeface="Times New Roman" pitchFamily="34" charset="0"/>
                 <a:ea typeface="Times New Roman" pitchFamily="34" charset="-122"/>
                 <a:cs typeface="Times New Roman" pitchFamily="34" charset="-120"/>
               </a:rPr>
-              <a:t>Illustration: the urban heat island</a:t>
-            </a:r>
-            <a:endParaRPr lang="en-US" sz="1600" dirty="0"/>
+              <a:t>4. Prevailing Winds</a:t>
+            </a:r>
+            <a:endParaRPr lang="en-US" sz="3600" dirty="0"/>
+          </a:p>
+        </p:txBody>
+      </p:sp>
+      <p:sp>
+        <p:nvSpPr>
+          <p:cNvPr id="5" name="Text 2"/>
+          <p:cNvSpPr/>
+          <p:nvPr/>
+        </p:nvSpPr>
+        <p:spPr>
+          <a:xfrm>
+            <a:off x="4069080" y="1783080"/>
+            <a:ext cx="7802575" cy="4663440"/>
+          </a:xfrm>
+          <a:prstGeom prst="rect">
+            <a:avLst/>
+          </a:prstGeom>
+          <a:noFill/>
+          <a:ln/>
+        </p:spPr>
+        <p:txBody>
+          <a:bodyPr wrap="square" lIns="0" tIns="0" rIns="0" bIns="0" rtlCol="0" anchor="t"/>
+          <a:lstStyle/>
+          <a:p>
+            <a:pPr algn="l" indent="0" marL="0">
+              <a:spcAft>
+                <a:spcPts val="800"/>
+              </a:spcAft>
+              <a:buNone/>
+            </a:pPr>
+            <a:r>
+              <a:rPr lang="en-US" sz="4000" b="1" dirty="0">
+                <a:solidFill>
+                  <a:srgbClr val="111111"/>
+                </a:solidFill>
+                <a:latin typeface="Times New Roman" pitchFamily="34" charset="0"/>
+                <a:ea typeface="Times New Roman" pitchFamily="34" charset="-122"/>
+                <a:cs typeface="Times New Roman" pitchFamily="34" charset="-120"/>
+              </a:rPr>
+              <a:t>Winds from the sea or cold regions: </a:t>
+            </a:r>
+            <a:pPr algn="l" indent="0" marL="0">
+              <a:spcAft>
+                <a:spcPts val="800"/>
+              </a:spcAft>
+              <a:buNone/>
+            </a:pPr>
+            <a:r>
+              <a:rPr lang="en-US" sz="4000" dirty="0">
+                <a:solidFill>
+                  <a:srgbClr val="111111"/>
+                </a:solidFill>
+                <a:latin typeface="Times New Roman" pitchFamily="34" charset="0"/>
+                <a:ea typeface="Times New Roman" pitchFamily="34" charset="-122"/>
+                <a:cs typeface="Times New Roman" pitchFamily="34" charset="-120"/>
+              </a:rPr>
+              <a:t>Winds that blow from the sea keep coastal places mild, as the westerlies do in western Europe. Winds from cold regions lower temperatures, as polar winds do in North America in winter.</a:t>
+            </a:r>
+            <a:endParaRPr lang="en-US" sz="4000" dirty="0"/>
           </a:p>
         </p:txBody>
       </p:sp>
@@ -18059,7 +18393,7 @@
                 <a:ea typeface="Times New Roman" pitchFamily="34" charset="-122"/>
                 <a:cs typeface="Times New Roman" pitchFamily="34" charset="-120"/>
               </a:rPr>
-              <a:t>4. Urbanisation: the Urban Heat Island</a:t>
+              <a:t>5. Cloud Cover</a:t>
             </a:r>
             <a:endParaRPr lang="en-US" sz="3600" dirty="0"/>
           </a:p>
@@ -18093,7 +18427,7 @@
               <a:buNone/>
             </a:pPr>
             <a:r>
-              <a:rPr lang="en-US" sz="4000" b="1" dirty="0">
+              <a:rPr lang="en-US" sz="4000" i="1" dirty="0">
                 <a:solidFill>
                   <a:srgbClr val="111111"/>
                 </a:solidFill>
@@ -18101,8 +18435,11 @@
                 <a:ea typeface="Times New Roman" pitchFamily="34" charset="-122"/>
                 <a:cs typeface="Times New Roman" pitchFamily="34" charset="-120"/>
               </a:rPr>
-              <a:t>Human heat: </a:t>
-            </a:r>
+              <a:t>Cloud cover influences temperature in the following ways:</a:t>
+            </a:r>
+            <a:endParaRPr lang="en-US" sz="4000" dirty="0"/>
+          </a:p>
+          <a:p>
             <a:pPr algn="l" indent="0" marL="0">
               <a:spcAft>
                 <a:spcPts val="800"/>
@@ -18110,7 +18447,7 @@
               <a:buNone/>
             </a:pPr>
             <a:r>
-              <a:rPr lang="en-US" sz="4000" dirty="0">
+              <a:rPr lang="en-US" sz="4000" b="1" dirty="0">
                 <a:solidFill>
                   <a:srgbClr val="111111"/>
                 </a:solidFill>
@@ -18118,11 +18455,8 @@
                 <a:ea typeface="Times New Roman" pitchFamily="34" charset="-122"/>
                 <a:cs typeface="Times New Roman" pitchFamily="34" charset="-120"/>
               </a:rPr>
-              <a:t>Vehicles, motorbikes, air conditioners and factories give off heat.</a:t>
-            </a:r>
-            <a:endParaRPr lang="en-US" sz="4000" dirty="0"/>
-          </a:p>
-          <a:p>
+              <a:t>By day: </a:t>
+            </a:r>
             <a:pPr algn="l" indent="0" marL="0">
               <a:spcAft>
                 <a:spcPts val="800"/>
@@ -18130,7 +18464,7 @@
               <a:buNone/>
             </a:pPr>
             <a:r>
-              <a:rPr lang="en-US" sz="4000" b="1" dirty="0">
+              <a:rPr lang="en-US" sz="4000" dirty="0">
                 <a:solidFill>
                   <a:srgbClr val="111111"/>
                 </a:solidFill>
@@ -18138,61 +18472,7 @@
                 <a:ea typeface="Times New Roman" pitchFamily="34" charset="-122"/>
                 <a:cs typeface="Times New Roman" pitchFamily="34" charset="-120"/>
               </a:rPr>
-              <a:t>Lack of vegetation: </a:t>
-            </a:r>
-            <a:pPr algn="l" indent="0" marL="0">
-              <a:spcAft>
-                <a:spcPts val="800"/>
-              </a:spcAft>
-              <a:buNone/>
-            </a:pPr>
-            <a:r>
-              <a:rPr lang="en-US" sz="4000" dirty="0">
-                <a:solidFill>
-                  <a:srgbClr val="111111"/>
-                </a:solidFill>
-                <a:latin typeface="Times New Roman" pitchFamily="34" charset="0"/>
-                <a:ea typeface="Times New Roman" pitchFamily="34" charset="-122"/>
-                <a:cs typeface="Times New Roman" pitchFamily="34" charset="-120"/>
-              </a:rPr>
-              <a:t>Few trees mean less shade and less cooling by transpiration.</a:t>
-            </a:r>
-            <a:endParaRPr lang="en-US" sz="4000" dirty="0"/>
-          </a:p>
-          <a:p>
-            <a:pPr algn="l" indent="0" marL="0">
-              <a:spcAft>
-                <a:spcPts val="800"/>
-              </a:spcAft>
-              <a:buNone/>
-            </a:pPr>
-            <a:r>
-              <a:rPr lang="en-US" sz="4000" b="1" dirty="0">
-                <a:solidFill>
-                  <a:srgbClr val="111111"/>
-                </a:solidFill>
-                <a:latin typeface="Times New Roman" pitchFamily="34" charset="0"/>
-                <a:ea typeface="Times New Roman" pitchFamily="34" charset="-122"/>
-                <a:cs typeface="Times New Roman" pitchFamily="34" charset="-120"/>
-              </a:rPr>
-              <a:t>Building shape: </a:t>
-            </a:r>
-            <a:pPr algn="l" indent="0" marL="0">
-              <a:spcAft>
-                <a:spcPts val="800"/>
-              </a:spcAft>
-              <a:buNone/>
-            </a:pPr>
-            <a:r>
-              <a:rPr lang="en-US" sz="4000" dirty="0">
-                <a:solidFill>
-                  <a:srgbClr val="111111"/>
-                </a:solidFill>
-                <a:latin typeface="Times New Roman" pitchFamily="34" charset="0"/>
-                <a:ea typeface="Times New Roman" pitchFamily="34" charset="-122"/>
-                <a:cs typeface="Times New Roman" pitchFamily="34" charset="-120"/>
-              </a:rPr>
-              <a:t>Tall buildings trap heat in the narrow streets between them.</a:t>
+              <a:t>Clouds reflect a large part of the solar radiation back to space before it reaches the ground. Cloudy days, as in the rainy season, are therefore cooler than clear days.</a:t>
             </a:r>
             <a:endParaRPr lang="en-US" sz="4000" dirty="0"/>
           </a:p>
@@ -18304,7 +18584,7 @@
                 <a:ea typeface="Calibri" pitchFamily="34" charset="-122"/>
                 <a:cs typeface="Calibri" pitchFamily="34" charset="-120"/>
               </a:rPr>
-              <a:t>FORMATIVE EVALUATION</a:t>
+              <a:t>BOARD SUMMARY</a:t>
             </a:r>
             <a:endParaRPr lang="en-US" sz="1400" dirty="0"/>
           </a:p>
@@ -18327,7 +18607,7 @@
         <p:spPr>
           <a:xfrm>
             <a:off x="0" y="658368"/>
-            <a:ext cx="5120640" cy="5833872"/>
+            <a:ext cx="2468880" cy="5833872"/>
           </a:xfrm>
           <a:prstGeom prst="rect">
             <a:avLst/>
@@ -18342,8 +18622,8 @@
         </p:nvSpPr>
         <p:spPr>
           <a:xfrm>
-            <a:off x="5349240" y="1005840"/>
-            <a:ext cx="6522415" cy="731520"/>
+            <a:off x="2697480" y="1005840"/>
+            <a:ext cx="9174175" cy="731520"/>
           </a:xfrm>
           <a:prstGeom prst="rect">
             <a:avLst/>
@@ -18369,7 +18649,7 @@
                 <a:ea typeface="Times New Roman" pitchFamily="34" charset="-122"/>
                 <a:cs typeface="Times New Roman" pitchFamily="34" charset="-120"/>
               </a:rPr>
-              <a:t>Evaluation 1</a:t>
+              <a:t>5. Cloud Cover</a:t>
             </a:r>
             <a:endParaRPr lang="en-US" sz="3600" dirty="0"/>
           </a:p>
@@ -18383,8 +18663,8 @@
         </p:nvSpPr>
         <p:spPr>
           <a:xfrm>
-            <a:off x="5349240" y="1783080"/>
-            <a:ext cx="6522415" cy="4663440"/>
+            <a:off x="2697480" y="1783080"/>
+            <a:ext cx="9174175" cy="4663440"/>
           </a:xfrm>
           <a:prstGeom prst="rect">
             <a:avLst/>
@@ -18403,7 +18683,7 @@
               <a:buNone/>
             </a:pPr>
             <a:r>
-              <a:rPr lang="en-US" sz="4000" dirty="0">
+              <a:rPr lang="en-US" sz="4000" b="1" dirty="0">
                 <a:solidFill>
                   <a:srgbClr val="111111"/>
                 </a:solidFill>
@@ -18411,7 +18691,24 @@
                 <a:ea typeface="Times New Roman" pitchFamily="34" charset="-122"/>
                 <a:cs typeface="Times New Roman" pitchFamily="34" charset="-120"/>
               </a:rPr>
-              <a:t>Distinguish a maritime climate from a continental climate.</a:t>
+              <a:t>By night: </a:t>
+            </a:r>
+            <a:pPr algn="l" indent="0" marL="0">
+              <a:spcAft>
+                <a:spcPts val="800"/>
+              </a:spcAft>
+              <a:buNone/>
+            </a:pPr>
+            <a:r>
+              <a:rPr lang="en-US" sz="4000" dirty="0">
+                <a:solidFill>
+                  <a:srgbClr val="111111"/>
+                </a:solidFill>
+                <a:latin typeface="Times New Roman" pitchFamily="34" charset="0"/>
+                <a:ea typeface="Times New Roman" pitchFamily="34" charset="-122"/>
+                <a:cs typeface="Times New Roman" pitchFamily="34" charset="-120"/>
+              </a:rPr>
+              <a:t>Clouds absorb the heat given off by the ground and send it back down, acting like a blanket. Cloudy nights are therefore warmer than clear nights, which explains the cold nights of the Harmattan season in the North.</a:t>
             </a:r>
             <a:endParaRPr lang="en-US" sz="4000" dirty="0"/>
           </a:p>
@@ -18742,15 +19039,135 @@
                 <a:ea typeface="Calibri" pitchFamily="34" charset="-122"/>
                 <a:cs typeface="Calibri" pitchFamily="34" charset="-120"/>
               </a:rPr>
-              <a:t>FORMATIVE EVALUATION</a:t>
+              <a:t>BOARD SUMMARY</a:t>
             </a:r>
             <a:endParaRPr lang="en-US" sz="1400" dirty="0"/>
+          </a:p>
+        </p:txBody>
+      </p:sp>
+      <p:sp>
+        <p:nvSpPr>
+          <p:cNvPr id="3" name="Text 1"/>
+          <p:cNvSpPr/>
+          <p:nvPr/>
+        </p:nvSpPr>
+        <p:spPr>
+          <a:xfrm>
+            <a:off x="365760" y="1005840"/>
+            <a:ext cx="11460175" cy="731520"/>
+          </a:xfrm>
+          <a:prstGeom prst="rect">
+            <a:avLst/>
+          </a:prstGeom>
+          <a:noFill/>
+          <a:ln/>
+        </p:spPr>
+        <p:txBody>
+          <a:bodyPr wrap="square" lIns="0" tIns="0" rIns="0" bIns="0" rtlCol="0" anchor="ctr">
+            <a:normAutofit/>
+          </a:bodyPr>
+          <a:lstStyle/>
+          <a:p>
+            <a:pPr algn="ctr" indent="0" marL="0">
+              <a:buNone/>
+            </a:pPr>
+            <a:r>
+              <a:rPr lang="en-US" sz="3600" b="1" dirty="0">
+                <a:solidFill>
+                  <a:srgbClr val="990011"/>
+                </a:solidFill>
+                <a:latin typeface="Times New Roman" pitchFamily="34" charset="0"/>
+                <a:ea typeface="Times New Roman" pitchFamily="34" charset="-122"/>
+                <a:cs typeface="Times New Roman" pitchFamily="34" charset="-120"/>
+              </a:rPr>
+              <a:t>6. Urbanisation: the Heat Island</a:t>
+            </a:r>
+            <a:endParaRPr lang="en-US" sz="3600" dirty="0"/>
+          </a:p>
+        </p:txBody>
+      </p:sp>
+      <p:sp>
+        <p:nvSpPr>
+          <p:cNvPr id="4" name="Text 2"/>
+          <p:cNvSpPr/>
+          <p:nvPr/>
+        </p:nvSpPr>
+        <p:spPr>
+          <a:xfrm>
+            <a:off x="365760" y="1783080"/>
+            <a:ext cx="6035040" cy="4617720"/>
+          </a:xfrm>
+          <a:prstGeom prst="rect">
+            <a:avLst/>
+          </a:prstGeom>
+          <a:noFill/>
+          <a:ln/>
+        </p:spPr>
+        <p:txBody>
+          <a:bodyPr wrap="square" lIns="0" tIns="0" rIns="0" bIns="0" rtlCol="0" anchor="t"/>
+          <a:lstStyle/>
+          <a:p>
+            <a:pPr algn="l" indent="0" marL="0">
+              <a:spcAft>
+                <a:spcPts val="800"/>
+              </a:spcAft>
+              <a:buNone/>
+            </a:pPr>
+            <a:r>
+              <a:rPr lang="en-US" sz="2800" i="1" dirty="0">
+                <a:solidFill>
+                  <a:srgbClr val="111111"/>
+                </a:solidFill>
+                <a:latin typeface="Times New Roman" pitchFamily="34" charset="0"/>
+                <a:ea typeface="Times New Roman" pitchFamily="34" charset="-122"/>
+                <a:cs typeface="Times New Roman" pitchFamily="34" charset="-120"/>
+              </a:rPr>
+              <a:t>Towns are warmer than the countryside for the following reasons:</a:t>
+            </a:r>
+            <a:endParaRPr lang="en-US" sz="2800" dirty="0"/>
+          </a:p>
+          <a:p>
+            <a:pPr algn="l" indent="0" marL="0">
+              <a:spcAft>
+                <a:spcPts val="800"/>
+              </a:spcAft>
+              <a:buNone/>
+            </a:pPr>
+            <a:r>
+              <a:rPr lang="en-US" sz="2800" b="1" dirty="0">
+                <a:solidFill>
+                  <a:srgbClr val="111111"/>
+                </a:solidFill>
+                <a:latin typeface="Times New Roman" pitchFamily="34" charset="0"/>
+                <a:ea typeface="Times New Roman" pitchFamily="34" charset="-122"/>
+                <a:cs typeface="Times New Roman" pitchFamily="34" charset="-120"/>
+              </a:rPr>
+              <a:t>Artificial surfaces: </a:t>
+            </a:r>
+            <a:pPr algn="l" indent="0" marL="0">
+              <a:spcAft>
+                <a:spcPts val="800"/>
+              </a:spcAft>
+              <a:buNone/>
+            </a:pPr>
+            <a:r>
+              <a:rPr lang="en-US" sz="2800" dirty="0">
+                <a:solidFill>
+                  <a:srgbClr val="111111"/>
+                </a:solidFill>
+                <a:latin typeface="Times New Roman" pitchFamily="34" charset="0"/>
+                <a:ea typeface="Times New Roman" pitchFamily="34" charset="-122"/>
+                <a:cs typeface="Times New Roman" pitchFamily="34" charset="-120"/>
+              </a:rPr>
+              <a:t>Concrete, tar and metal roofs absorb more solar energy than soil and plants and release it slowly at night. For this reason, a large town can be 2 to 5 °C warmer than the countryside after sunset.</a:t>
+            </a:r>
+            <a:endParaRPr lang="en-US" sz="2800" dirty="0"/>
           </a:p>
         </p:txBody>
       </p:sp>
       <p:pic>
         <p:nvPicPr>
-          <p:cNvPr id="3" name="Image 0" descr="/home/claude/f4/img/minesec_sheet.png">    </p:cNvPr>
+          <p:cNvPr id="5" name="Image 0" descr="/home/claude/f4/img/v2/heat_island_big.png">    </p:cNvPr>
           <p:cNvPicPr>
             <a:picLocks noChangeAspect="1"/>
           </p:cNvPicPr>
@@ -18764,8 +19181,8 @@
         </p:blipFill>
         <p:spPr>
           <a:xfrm>
-            <a:off x="0" y="658368"/>
-            <a:ext cx="5120640" cy="5833872"/>
+            <a:off x="6537960" y="2849678"/>
+            <a:ext cx="5470855" cy="2137053"/>
           </a:xfrm>
           <a:prstGeom prst="rect">
             <a:avLst/>
@@ -18774,14 +19191,14 @@
       </p:pic>
       <p:sp>
         <p:nvSpPr>
-          <p:cNvPr id="4" name="Text 1"/>
+          <p:cNvPr id="6" name="Text 3"/>
           <p:cNvSpPr/>
           <p:nvPr/>
         </p:nvSpPr>
         <p:spPr>
           <a:xfrm>
-            <a:off x="5349240" y="1005840"/>
-            <a:ext cx="6522415" cy="731520"/>
+            <a:off x="6537960" y="6089904"/>
+            <a:ext cx="5470855" cy="347472"/>
           </a:xfrm>
           <a:prstGeom prst="rect">
             <a:avLst/>
@@ -18790,68 +19207,24 @@
           <a:ln/>
         </p:spPr>
         <p:txBody>
-          <a:bodyPr wrap="square" lIns="0" tIns="0" rIns="0" bIns="0" rtlCol="0" anchor="ctr">
-            <a:normAutofit/>
-          </a:bodyPr>
+          <a:bodyPr wrap="square" lIns="0" tIns="0" rIns="0" bIns="0" rtlCol="0" anchor="ctr"/>
           <a:lstStyle/>
           <a:p>
             <a:pPr algn="ctr" indent="0" marL="0">
               <a:buNone/>
             </a:pPr>
             <a:r>
-              <a:rPr lang="en-US" sz="3600" b="1" dirty="0">
-                <a:solidFill>
-                  <a:srgbClr val="990011"/>
+              <a:rPr lang="en-US" sz="1600" i="1" dirty="0">
+                <a:solidFill>
+                  <a:srgbClr val="555555"/>
                 </a:solidFill>
                 <a:latin typeface="Times New Roman" pitchFamily="34" charset="0"/>
                 <a:ea typeface="Times New Roman" pitchFamily="34" charset="-122"/>
                 <a:cs typeface="Times New Roman" pitchFamily="34" charset="-120"/>
               </a:rPr>
-              <a:t>Expected Answer</a:t>
-            </a:r>
-            <a:endParaRPr lang="en-US" sz="3600" dirty="0"/>
-          </a:p>
-        </p:txBody>
-      </p:sp>
-      <p:sp>
-        <p:nvSpPr>
-          <p:cNvPr id="5" name="Text 2"/>
-          <p:cNvSpPr/>
-          <p:nvPr/>
-        </p:nvSpPr>
-        <p:spPr>
-          <a:xfrm>
-            <a:off x="5349240" y="1783080"/>
-            <a:ext cx="6522415" cy="4663440"/>
-          </a:xfrm>
-          <a:prstGeom prst="rect">
-            <a:avLst/>
-          </a:prstGeom>
-          <a:noFill/>
-          <a:ln/>
-        </p:spPr>
-        <p:txBody>
-          <a:bodyPr wrap="square" lIns="0" tIns="0" rIns="0" bIns="0" rtlCol="0" anchor="t"/>
-          <a:lstStyle/>
-          <a:p>
-            <a:pPr algn="l" indent="0" marL="0">
-              <a:spcAft>
-                <a:spcPts val="800"/>
-              </a:spcAft>
-              <a:buNone/>
-            </a:pPr>
-            <a:r>
-              <a:rPr lang="en-US" sz="4000" dirty="0">
-                <a:solidFill>
-                  <a:srgbClr val="111111"/>
-                </a:solidFill>
-                <a:latin typeface="Times New Roman" pitchFamily="34" charset="0"/>
-                <a:ea typeface="Times New Roman" pitchFamily="34" charset="-122"/>
-                <a:cs typeface="Times New Roman" pitchFamily="34" charset="-120"/>
-              </a:rPr>
-              <a:t>A maritime climate near the sea has small temperature ranges; a continental climate far inland has large ranges.</a:t>
-            </a:r>
-            <a:endParaRPr lang="en-US" sz="4000" dirty="0"/>
+              <a:t>Illustration: the urban heat island</a:t>
+            </a:r>
+            <a:endParaRPr lang="en-US" sz="1600" dirty="0"/>
           </a:p>
         </p:txBody>
       </p:sp>
@@ -18961,7 +19334,7 @@
                 <a:ea typeface="Calibri" pitchFamily="34" charset="-122"/>
                 <a:cs typeface="Calibri" pitchFamily="34" charset="-120"/>
               </a:rPr>
-              <a:t>FORMATIVE EVALUATION</a:t>
+              <a:t>BOARD SUMMARY</a:t>
             </a:r>
             <a:endParaRPr lang="en-US" sz="1400" dirty="0"/>
           </a:p>
@@ -18984,7 +19357,7 @@
         <p:spPr>
           <a:xfrm>
             <a:off x="0" y="658368"/>
-            <a:ext cx="5120640" cy="5833872"/>
+            <a:ext cx="3840480" cy="5833872"/>
           </a:xfrm>
           <a:prstGeom prst="rect">
             <a:avLst/>
@@ -18999,8 +19372,8 @@
         </p:nvSpPr>
         <p:spPr>
           <a:xfrm>
-            <a:off x="5349240" y="1005840"/>
-            <a:ext cx="6522415" cy="731520"/>
+            <a:off x="4069080" y="1005840"/>
+            <a:ext cx="7802575" cy="731520"/>
           </a:xfrm>
           <a:prstGeom prst="rect">
             <a:avLst/>
@@ -19026,7 +19399,7 @@
                 <a:ea typeface="Times New Roman" pitchFamily="34" charset="-122"/>
                 <a:cs typeface="Times New Roman" pitchFamily="34" charset="-120"/>
               </a:rPr>
-              <a:t>Evaluation 2</a:t>
+              <a:t>6. Urbanisation: the Heat Island</a:t>
             </a:r>
             <a:endParaRPr lang="en-US" sz="3600" dirty="0"/>
           </a:p>
@@ -19040,8 +19413,8 @@
         </p:nvSpPr>
         <p:spPr>
           <a:xfrm>
-            <a:off x="5349240" y="1783080"/>
-            <a:ext cx="6522415" cy="4663440"/>
+            <a:off x="4069080" y="1783080"/>
+            <a:ext cx="7802575" cy="4663440"/>
           </a:xfrm>
           <a:prstGeom prst="rect">
             <a:avLst/>
@@ -19060,7 +19433,7 @@
               <a:buNone/>
             </a:pPr>
             <a:r>
-              <a:rPr lang="en-US" sz="4000" dirty="0">
+              <a:rPr lang="en-US" sz="4000" b="1" dirty="0">
                 <a:solidFill>
                   <a:srgbClr val="111111"/>
                 </a:solidFill>
@@ -19068,7 +19441,24 @@
                 <a:ea typeface="Times New Roman" pitchFamily="34" charset="-122"/>
                 <a:cs typeface="Times New Roman" pitchFamily="34" charset="-120"/>
               </a:rPr>
-              <a:t>Explain the double role of clouds on temperature.</a:t>
+              <a:t>Heat from human activities: </a:t>
+            </a:r>
+            <a:pPr algn="l" indent="0" marL="0">
+              <a:spcAft>
+                <a:spcPts val="800"/>
+              </a:spcAft>
+              <a:buNone/>
+            </a:pPr>
+            <a:r>
+              <a:rPr lang="en-US" sz="4000" dirty="0">
+                <a:solidFill>
+                  <a:srgbClr val="111111"/>
+                </a:solidFill>
+                <a:latin typeface="Times New Roman" pitchFamily="34" charset="0"/>
+                <a:ea typeface="Times New Roman" pitchFamily="34" charset="-122"/>
+                <a:cs typeface="Times New Roman" pitchFamily="34" charset="-120"/>
+              </a:rPr>
+              <a:t>Vehicles, motorbikes, air conditioners, kitchens and factories all release heat into the air. The more people and activities a town has, the more heat it produces.</a:t>
             </a:r>
             <a:endParaRPr lang="en-US" sz="4000" dirty="0"/>
           </a:p>
@@ -19180,7 +19570,7 @@
                 <a:ea typeface="Calibri" pitchFamily="34" charset="-122"/>
                 <a:cs typeface="Calibri" pitchFamily="34" charset="-120"/>
               </a:rPr>
-              <a:t>FORMATIVE EVALUATION</a:t>
+              <a:t>BOARD SUMMARY</a:t>
             </a:r>
             <a:endParaRPr lang="en-US" sz="1400" dirty="0"/>
           </a:p>
@@ -19203,7 +19593,7 @@
         <p:spPr>
           <a:xfrm>
             <a:off x="0" y="658368"/>
-            <a:ext cx="5120640" cy="5833872"/>
+            <a:ext cx="3840480" cy="5833872"/>
           </a:xfrm>
           <a:prstGeom prst="rect">
             <a:avLst/>
@@ -19218,8 +19608,8 @@
         </p:nvSpPr>
         <p:spPr>
           <a:xfrm>
-            <a:off x="5349240" y="1005840"/>
-            <a:ext cx="6522415" cy="731520"/>
+            <a:off x="4069080" y="1005840"/>
+            <a:ext cx="7802575" cy="731520"/>
           </a:xfrm>
           <a:prstGeom prst="rect">
             <a:avLst/>
@@ -19245,7 +19635,7 @@
                 <a:ea typeface="Times New Roman" pitchFamily="34" charset="-122"/>
                 <a:cs typeface="Times New Roman" pitchFamily="34" charset="-120"/>
               </a:rPr>
-              <a:t>Expected Answer</a:t>
+              <a:t>6. Urbanisation: the Heat Island</a:t>
             </a:r>
             <a:endParaRPr lang="en-US" sz="3600" dirty="0"/>
           </a:p>
@@ -19259,8 +19649,8 @@
         </p:nvSpPr>
         <p:spPr>
           <a:xfrm>
-            <a:off x="5349240" y="1783080"/>
-            <a:ext cx="6522415" cy="4663440"/>
+            <a:off x="4069080" y="1783080"/>
+            <a:ext cx="7802575" cy="4663440"/>
           </a:xfrm>
           <a:prstGeom prst="rect">
             <a:avLst/>
@@ -19279,7 +19669,7 @@
               <a:buNone/>
             </a:pPr>
             <a:r>
-              <a:rPr lang="en-US" sz="4000" dirty="0">
+              <a:rPr lang="en-US" sz="4000" b="1" dirty="0">
                 <a:solidFill>
                   <a:srgbClr val="111111"/>
                 </a:solidFill>
@@ -19287,7 +19677,24 @@
                 <a:ea typeface="Times New Roman" pitchFamily="34" charset="-122"/>
                 <a:cs typeface="Times New Roman" pitchFamily="34" charset="-120"/>
               </a:rPr>
-              <a:t>By day they reflect sunlight and cool the ground; at night they trap heat and keep it warm.</a:t>
+              <a:t>Lack of vegetation: </a:t>
+            </a:r>
+            <a:pPr algn="l" indent="0" marL="0">
+              <a:spcAft>
+                <a:spcPts val="800"/>
+              </a:spcAft>
+              <a:buNone/>
+            </a:pPr>
+            <a:r>
+              <a:rPr lang="en-US" sz="4000" dirty="0">
+                <a:solidFill>
+                  <a:srgbClr val="111111"/>
+                </a:solidFill>
+                <a:latin typeface="Times New Roman" pitchFamily="34" charset="0"/>
+                <a:ea typeface="Times New Roman" pitchFamily="34" charset="-122"/>
+                <a:cs typeface="Times New Roman" pitchFamily="34" charset="-120"/>
+              </a:rPr>
+              <a:t>Towns have few trees and little open water, so there is less shade and less cooling by evaporation and transpiration. The heat is therefore used to warm the air instead.</a:t>
             </a:r>
             <a:endParaRPr lang="en-US" sz="4000" dirty="0"/>
           </a:p>
@@ -19399,7 +19806,7 @@
                 <a:ea typeface="Calibri" pitchFamily="34" charset="-122"/>
                 <a:cs typeface="Calibri" pitchFamily="34" charset="-120"/>
               </a:rPr>
-              <a:t>REMEDIATION</a:t>
+              <a:t>BOARD SUMMARY</a:t>
             </a:r>
             <a:endParaRPr lang="en-US" sz="1400" dirty="0"/>
           </a:p>
@@ -19422,7 +19829,7 @@
         <p:spPr>
           <a:xfrm>
             <a:off x="0" y="658368"/>
-            <a:ext cx="1463040" cy="5833872"/>
+            <a:ext cx="3840480" cy="5833872"/>
           </a:xfrm>
           <a:prstGeom prst="rect">
             <a:avLst/>
@@ -19437,8 +19844,8 @@
         </p:nvSpPr>
         <p:spPr>
           <a:xfrm>
-            <a:off x="1691640" y="1005840"/>
-            <a:ext cx="10180015" cy="731520"/>
+            <a:off x="4069080" y="1005840"/>
+            <a:ext cx="7802575" cy="731520"/>
           </a:xfrm>
           <a:prstGeom prst="rect">
             <a:avLst/>
@@ -19464,7 +19871,7 @@
                 <a:ea typeface="Times New Roman" pitchFamily="34" charset="-122"/>
                 <a:cs typeface="Times New Roman" pitchFamily="34" charset="-120"/>
               </a:rPr>
-              <a:t>Remediation</a:t>
+              <a:t>6. Urbanisation: the Heat Island</a:t>
             </a:r>
             <a:endParaRPr lang="en-US" sz="3600" dirty="0"/>
           </a:p>
@@ -19478,8 +19885,8 @@
         </p:nvSpPr>
         <p:spPr>
           <a:xfrm>
-            <a:off x="1691640" y="1783080"/>
-            <a:ext cx="10180015" cy="4663440"/>
+            <a:off x="4069080" y="1783080"/>
+            <a:ext cx="7802575" cy="4663440"/>
           </a:xfrm>
           <a:prstGeom prst="rect">
             <a:avLst/>
@@ -19506,18 +19913,13 @@
                 <a:ea typeface="Times New Roman" pitchFamily="34" charset="-122"/>
                 <a:cs typeface="Times New Roman" pitchFamily="34" charset="-120"/>
               </a:rPr>
-              <a:t>Fill in the blanks:</a:t>
-            </a:r>
-            <a:endParaRPr lang="en-US" sz="4000" dirty="0"/>
-          </a:p>
-          <a:p>
-            <a:pPr algn="l" marL="342900" indent="-342900">
+              <a:t>Buildings and pollution: </a:t>
+            </a:r>
+            <a:pPr algn="l" indent="0" marL="0">
               <a:spcAft>
                 <a:spcPts val="800"/>
               </a:spcAft>
-              <a:buSzPct val="100000"/>
-              <a:buFont typeface="+mj-lt"/>
-              <a:buAutoNum type="arabicPeriod" startAt="1"/>
+              <a:buNone/>
             </a:pPr>
             <a:r>
               <a:rPr lang="en-US" sz="4000" dirty="0">
@@ -19528,51 +19930,7 @@
                 <a:ea typeface="Times New Roman" pitchFamily="34" charset="-122"/>
                 <a:cs typeface="Times New Roman" pitchFamily="34" charset="-120"/>
               </a:rPr>
-              <a:t>Temperature falls by about ______ °C per 1,000 m.</a:t>
-            </a:r>
-            <a:endParaRPr lang="en-US" sz="4000" dirty="0"/>
-          </a:p>
-          <a:p>
-            <a:pPr algn="l" marL="342900" indent="-342900">
-              <a:spcAft>
-                <a:spcPts val="800"/>
-              </a:spcAft>
-              <a:buSzPct val="100000"/>
-              <a:buFont typeface="+mj-lt"/>
-              <a:buAutoNum type="arabicPeriod" startAt="1"/>
-            </a:pPr>
-            <a:r>
-              <a:rPr lang="en-US" sz="4000" dirty="0">
-                <a:solidFill>
-                  <a:srgbClr val="111111"/>
-                </a:solidFill>
-                <a:latin typeface="Times New Roman" pitchFamily="34" charset="0"/>
-                <a:ea typeface="Times New Roman" pitchFamily="34" charset="-122"/>
-                <a:cs typeface="Times New Roman" pitchFamily="34" charset="-120"/>
-              </a:rPr>
-              <a:t>The direction a slope faces is its ______.</a:t>
-            </a:r>
-            <a:endParaRPr lang="en-US" sz="4000" dirty="0"/>
-          </a:p>
-          <a:p>
-            <a:pPr algn="l" marL="342900" indent="-342900">
-              <a:spcAft>
-                <a:spcPts val="800"/>
-              </a:spcAft>
-              <a:buSzPct val="100000"/>
-              <a:buFont typeface="+mj-lt"/>
-              <a:buAutoNum type="arabicPeriod" startAt="1"/>
-            </a:pPr>
-            <a:r>
-              <a:rPr lang="en-US" sz="4000" dirty="0">
-                <a:solidFill>
-                  <a:srgbClr val="111111"/>
-                </a:solidFill>
-                <a:latin typeface="Times New Roman" pitchFamily="34" charset="0"/>
-                <a:ea typeface="Times New Roman" pitchFamily="34" charset="-122"/>
-                <a:cs typeface="Times New Roman" pitchFamily="34" charset="-120"/>
-              </a:rPr>
-              <a:t>A town warmer than the countryside is an urban heat ______.</a:t>
+              <a:t>Tall buildings trap heat in narrow streets and slow down the wind that could carry it away. A layer of pollution over the town also absorbs heat and sends it back to the ground.</a:t>
             </a:r>
             <a:endParaRPr lang="en-US" sz="4000" dirty="0"/>
           </a:p>
@@ -19684,7 +20042,7 @@
                 <a:ea typeface="Calibri" pitchFamily="34" charset="-122"/>
                 <a:cs typeface="Calibri" pitchFamily="34" charset="-120"/>
               </a:rPr>
-              <a:t>HOMEWORK</a:t>
+              <a:t>FORMATIVE EVALUATION</a:t>
             </a:r>
             <a:endParaRPr lang="en-US" sz="1400" dirty="0"/>
           </a:p>
@@ -19749,7 +20107,7 @@
                 <a:ea typeface="Times New Roman" pitchFamily="34" charset="-122"/>
                 <a:cs typeface="Times New Roman" pitchFamily="34" charset="-120"/>
               </a:rPr>
-              <a:t>Homework</a:t>
+              <a:t>Evaluation 1</a:t>
             </a:r>
             <a:endParaRPr lang="en-US" sz="3600" dirty="0"/>
           </a:p>
@@ -19791,7 +20149,7 @@
                 <a:ea typeface="Times New Roman" pitchFamily="34" charset="-122"/>
                 <a:cs typeface="Times New Roman" pitchFamily="34" charset="-120"/>
               </a:rPr>
-              <a:t>Define the environmental lapse rate.</a:t>
+              <a:t>Distinguish a maritime climate from a continental climate.</a:t>
             </a:r>
             <a:endParaRPr lang="en-US" sz="4000" dirty="0"/>
           </a:p>
@@ -19903,7 +20261,7 @@
                 <a:ea typeface="Calibri" pitchFamily="34" charset="-122"/>
                 <a:cs typeface="Calibri" pitchFamily="34" charset="-120"/>
               </a:rPr>
-              <a:t>NEXT LESSON</a:t>
+              <a:t>FORMATIVE EVALUATION</a:t>
             </a:r>
             <a:endParaRPr lang="en-US" sz="1400" dirty="0"/>
           </a:p>
@@ -19968,7 +20326,7 @@
                 <a:ea typeface="Times New Roman" pitchFamily="34" charset="-122"/>
                 <a:cs typeface="Times New Roman" pitchFamily="34" charset="-120"/>
               </a:rPr>
-              <a:t>Next Lesson</a:t>
+              <a:t>Expected Answer</a:t>
             </a:r>
             <a:endParaRPr lang="en-US" sz="3600" dirty="0"/>
           </a:p>
@@ -19992,17 +20350,17 @@
           <a:ln/>
         </p:spPr>
         <p:txBody>
-          <a:bodyPr wrap="square" lIns="0" tIns="0" rIns="0" bIns="0" rtlCol="0" anchor="ctr"/>
-          <a:lstStyle/>
-          <a:p>
-            <a:pPr algn="ctr" indent="0" marL="0">
+          <a:bodyPr wrap="square" lIns="0" tIns="0" rIns="0" bIns="0" rtlCol="0" anchor="t"/>
+          <a:lstStyle/>
+          <a:p>
+            <a:pPr algn="l" indent="0" marL="0">
               <a:spcAft>
                 <a:spcPts val="800"/>
               </a:spcAft>
               <a:buNone/>
             </a:pPr>
             <a:r>
-              <a:rPr lang="en-US" sz="4000" b="1" dirty="0">
+              <a:rPr lang="en-US" sz="4000" dirty="0">
                 <a:solidFill>
                   <a:srgbClr val="111111"/>
                 </a:solidFill>
@@ -20010,27 +20368,7 @@
                 <a:ea typeface="Times New Roman" pitchFamily="34" charset="-122"/>
                 <a:cs typeface="Times New Roman" pitchFamily="34" charset="-120"/>
               </a:rPr>
-              <a:t>Our next lesson will be on:</a:t>
-            </a:r>
-            <a:endParaRPr lang="en-US" sz="4000" dirty="0"/>
-          </a:p>
-          <a:p>
-            <a:pPr algn="ctr" indent="0" marL="0">
-              <a:spcAft>
-                <a:spcPts val="800"/>
-              </a:spcAft>
-              <a:buNone/>
-            </a:pPr>
-            <a:r>
-              <a:rPr lang="en-US" sz="4000" b="1" dirty="0">
-                <a:solidFill>
-                  <a:srgbClr val="990011"/>
-                </a:solidFill>
-                <a:latin typeface="Times New Roman" pitchFamily="34" charset="0"/>
-                <a:ea typeface="Times New Roman" pitchFamily="34" charset="-122"/>
-                <a:cs typeface="Times New Roman" pitchFamily="34" charset="-120"/>
-              </a:rPr>
-              <a:t>Lesson 8: Vertical Distribution of Temperature</a:t>
+              <a:t>A maritime climate near the sea has small temperature ranges; a continental climate far inland has large ranges.</a:t>
             </a:r>
             <a:endParaRPr lang="en-US" sz="4000" dirty="0"/>
           </a:p>
@@ -20142,22 +20480,46 @@
                 <a:ea typeface="Calibri" pitchFamily="34" charset="-122"/>
                 <a:cs typeface="Calibri" pitchFamily="34" charset="-120"/>
               </a:rPr>
-              <a:t>BILINGUAL GAME</a:t>
+              <a:t>FORMATIVE EVALUATION</a:t>
             </a:r>
             <a:endParaRPr lang="en-US" sz="1400" dirty="0"/>
           </a:p>
         </p:txBody>
       </p:sp>
-      <p:sp>
-        <p:nvSpPr>
-          <p:cNvPr id="3" name="Text 1"/>
+      <p:pic>
+        <p:nvPicPr>
+          <p:cNvPr id="3" name="Image 0" descr="/home/claude/f4/img/minesec_sheet.png">    </p:cNvPr>
+          <p:cNvPicPr>
+            <a:picLocks noChangeAspect="1"/>
+          </p:cNvPicPr>
+          <p:nvPr/>
+        </p:nvPicPr>
+        <p:blipFill>
+          <a:blip r:embed="rId1"/>
+          <a:stretch>
+            <a:fillRect/>
+          </a:stretch>
+        </p:blipFill>
+        <p:spPr>
+          <a:xfrm>
+            <a:off x="0" y="658368"/>
+            <a:ext cx="5120640" cy="5833872"/>
+          </a:xfrm>
+          <a:prstGeom prst="rect">
+            <a:avLst/>
+          </a:prstGeom>
+        </p:spPr>
+      </p:pic>
+      <p:sp>
+        <p:nvSpPr>
+          <p:cNvPr id="4" name="Text 1"/>
           <p:cNvSpPr/>
           <p:nvPr/>
         </p:nvSpPr>
         <p:spPr>
           <a:xfrm>
-            <a:off x="457200" y="1005840"/>
-            <a:ext cx="11277295" cy="731520"/>
+            <a:off x="5349240" y="1005840"/>
+            <a:ext cx="6522415" cy="731520"/>
           </a:xfrm>
           <a:prstGeom prst="rect">
             <a:avLst/>
@@ -20166,7 +20528,9 @@
           <a:ln/>
         </p:spPr>
         <p:txBody>
-          <a:bodyPr wrap="square" lIns="0" tIns="0" rIns="0" bIns="0" rtlCol="0" anchor="ctr"/>
+          <a:bodyPr wrap="square" lIns="0" tIns="0" rIns="0" bIns="0" rtlCol="0" anchor="ctr">
+            <a:normAutofit/>
+          </a:bodyPr>
           <a:lstStyle/>
           <a:p>
             <a:pPr algn="ctr" indent="0" marL="0">
@@ -20181,6 +20545,1492 @@
                 <a:ea typeface="Times New Roman" pitchFamily="34" charset="-122"/>
                 <a:cs typeface="Times New Roman" pitchFamily="34" charset="-120"/>
               </a:rPr>
+              <a:t>Evaluation 2</a:t>
+            </a:r>
+            <a:endParaRPr lang="en-US" sz="3600" dirty="0"/>
+          </a:p>
+        </p:txBody>
+      </p:sp>
+      <p:sp>
+        <p:nvSpPr>
+          <p:cNvPr id="5" name="Text 2"/>
+          <p:cNvSpPr/>
+          <p:nvPr/>
+        </p:nvSpPr>
+        <p:spPr>
+          <a:xfrm>
+            <a:off x="5349240" y="1783080"/>
+            <a:ext cx="6522415" cy="4663440"/>
+          </a:xfrm>
+          <a:prstGeom prst="rect">
+            <a:avLst/>
+          </a:prstGeom>
+          <a:noFill/>
+          <a:ln/>
+        </p:spPr>
+        <p:txBody>
+          <a:bodyPr wrap="square" lIns="0" tIns="0" rIns="0" bIns="0" rtlCol="0" anchor="t"/>
+          <a:lstStyle/>
+          <a:p>
+            <a:pPr algn="l" indent="0" marL="0">
+              <a:spcAft>
+                <a:spcPts val="800"/>
+              </a:spcAft>
+              <a:buNone/>
+            </a:pPr>
+            <a:r>
+              <a:rPr lang="en-US" sz="4000" dirty="0">
+                <a:solidFill>
+                  <a:srgbClr val="111111"/>
+                </a:solidFill>
+                <a:latin typeface="Times New Roman" pitchFamily="34" charset="0"/>
+                <a:ea typeface="Times New Roman" pitchFamily="34" charset="-122"/>
+                <a:cs typeface="Times New Roman" pitchFamily="34" charset="-120"/>
+              </a:rPr>
+              <a:t>Explain the double role of clouds on temperature.</a:t>
+            </a:r>
+            <a:endParaRPr lang="en-US" sz="4000" dirty="0"/>
+          </a:p>
+        </p:txBody>
+      </p:sp>
+      <p:sp>
+        <p:nvSpPr>
+          <p:cNvPr id="25" name="Slide Number Placeholder 0"/>
+          <p:cNvSpPr>
+            <a:spLocks noGrp="1"/>
+          </p:cNvSpPr>
+          <p:nvPr>
+            <p:ph type="sldNum" sz="quarter" idx="4294967295"/>
+          </p:nvPr>
+        </p:nvSpPr>
+        <p:spPr>
+          <a:xfrm>
+            <a:off x="27432" y="91440"/>
+            <a:ext cx="585216" cy="475488"/>
+          </a:xfrm>
+          <a:prstGeom prst="rect">
+            <a:avLst/>
+          </a:prstGeom>
+          <a:extLst>
+            <a:ext uri="{C572A759-6A51-4108-AA02-DFA0A04FC94B}">
+              <ma14:wrappingTextBoxFlag xmlns:ma14="http://schemas.microsoft.com/office/mac/drawingml/2011/main" val="0"/>
+            </a:ext>
+          </a:extLst>
+        </p:spPr>
+        <p:txBody>
+          <a:bodyPr/>
+          <a:lstStyle>
+            <a:lvl1pPr>
+              <a:defRPr sz="2000">
+                <a:solidFill>
+                  <a:srgbClr val="FFFFFF"/>
+                </a:solidFill>
+                <a:latin typeface="Calibri"/>
+                <a:ea typeface="Calibri"/>
+                <a:cs typeface="Calibri"/>
+              </a:defRPr>
+            </a:lvl1pPr>
+          </a:lstStyle>
+          <a:p>
+            <a:pPr algn="ctr"/>
+            <a:fld id="{F7021451-1387-4CA6-816F-3879F97B5CBC}" type="slidenum">
+              <a:rPr b="1" lang="en-US"/>
+              <a:t>56</a:t>
+            </a:fld>
+            <a:endParaRPr lang="en-US"/>
+          </a:p>
+        </p:txBody>
+      </p:sp>
+    </p:spTree>
+  </p:cSld>
+  <p:clrMapOvr>
+    <a:masterClrMapping/>
+  </p:clrMapOvr>
+</p:sld>
+</file>
+
+<file path=ppt/slides/slide57.xml><?xml version="1.0" encoding="utf-8"?>
+<p:sld xmlns:a="http://schemas.openxmlformats.org/drawingml/2006/main" xmlns:r="http://schemas.openxmlformats.org/officeDocument/2006/relationships" xmlns:p="http://schemas.openxmlformats.org/presentationml/2006/main">
+  <p:cSld name="Slide 57">
+    <p:spTree>
+      <p:nvGrpSpPr>
+        <p:cNvPr id="1" name=""/>
+        <p:cNvGrpSpPr/>
+        <p:nvPr/>
+      </p:nvGrpSpPr>
+      <p:grpSpPr>
+        <a:xfrm>
+          <a:off x="0" y="0"/>
+          <a:ext cx="0" cy="0"/>
+          <a:chOff x="0" y="0"/>
+          <a:chExt cx="0" cy="0"/>
+        </a:xfrm>
+      </p:grpSpPr>
+      <p:sp>
+        <p:nvSpPr>
+          <p:cNvPr id="2" name="Text 0"/>
+          <p:cNvSpPr/>
+          <p:nvPr/>
+        </p:nvSpPr>
+        <p:spPr>
+          <a:xfrm>
+            <a:off x="457200" y="713232"/>
+            <a:ext cx="11368735" cy="274320"/>
+          </a:xfrm>
+          <a:prstGeom prst="rect">
+            <a:avLst/>
+          </a:prstGeom>
+          <a:noFill/>
+          <a:ln/>
+        </p:spPr>
+        <p:txBody>
+          <a:bodyPr wrap="square" lIns="0" tIns="0" rIns="0" bIns="0" rtlCol="0" anchor="ctr"/>
+          <a:lstStyle/>
+          <a:p>
+            <a:pPr algn="r" indent="0" marL="0">
+              <a:buNone/>
+            </a:pPr>
+            <a:r>
+              <a:rPr lang="en-US" sz="1400" b="1" dirty="0">
+                <a:solidFill>
+                  <a:srgbClr val="1C3F6E"/>
+                </a:solidFill>
+                <a:latin typeface="Calibri" pitchFamily="34" charset="0"/>
+                <a:ea typeface="Calibri" pitchFamily="34" charset="-122"/>
+                <a:cs typeface="Calibri" pitchFamily="34" charset="-120"/>
+              </a:rPr>
+              <a:t>FORMATIVE EVALUATION</a:t>
+            </a:r>
+            <a:endParaRPr lang="en-US" sz="1400" dirty="0"/>
+          </a:p>
+        </p:txBody>
+      </p:sp>
+      <p:pic>
+        <p:nvPicPr>
+          <p:cNvPr id="3" name="Image 0" descr="/home/claude/f4/img/minesec_sheet.png">    </p:cNvPr>
+          <p:cNvPicPr>
+            <a:picLocks noChangeAspect="1"/>
+          </p:cNvPicPr>
+          <p:nvPr/>
+        </p:nvPicPr>
+        <p:blipFill>
+          <a:blip r:embed="rId1"/>
+          <a:stretch>
+            <a:fillRect/>
+          </a:stretch>
+        </p:blipFill>
+        <p:spPr>
+          <a:xfrm>
+            <a:off x="0" y="658368"/>
+            <a:ext cx="5120640" cy="5833872"/>
+          </a:xfrm>
+          <a:prstGeom prst="rect">
+            <a:avLst/>
+          </a:prstGeom>
+        </p:spPr>
+      </p:pic>
+      <p:sp>
+        <p:nvSpPr>
+          <p:cNvPr id="4" name="Text 1"/>
+          <p:cNvSpPr/>
+          <p:nvPr/>
+        </p:nvSpPr>
+        <p:spPr>
+          <a:xfrm>
+            <a:off x="5349240" y="1005840"/>
+            <a:ext cx="6522415" cy="731520"/>
+          </a:xfrm>
+          <a:prstGeom prst="rect">
+            <a:avLst/>
+          </a:prstGeom>
+          <a:noFill/>
+          <a:ln/>
+        </p:spPr>
+        <p:txBody>
+          <a:bodyPr wrap="square" lIns="0" tIns="0" rIns="0" bIns="0" rtlCol="0" anchor="ctr">
+            <a:normAutofit/>
+          </a:bodyPr>
+          <a:lstStyle/>
+          <a:p>
+            <a:pPr algn="ctr" indent="0" marL="0">
+              <a:buNone/>
+            </a:pPr>
+            <a:r>
+              <a:rPr lang="en-US" sz="3600" b="1" dirty="0">
+                <a:solidFill>
+                  <a:srgbClr val="990011"/>
+                </a:solidFill>
+                <a:latin typeface="Times New Roman" pitchFamily="34" charset="0"/>
+                <a:ea typeface="Times New Roman" pitchFamily="34" charset="-122"/>
+                <a:cs typeface="Times New Roman" pitchFamily="34" charset="-120"/>
+              </a:rPr>
+              <a:t>Expected Answer</a:t>
+            </a:r>
+            <a:endParaRPr lang="en-US" sz="3600" dirty="0"/>
+          </a:p>
+        </p:txBody>
+      </p:sp>
+      <p:sp>
+        <p:nvSpPr>
+          <p:cNvPr id="5" name="Text 2"/>
+          <p:cNvSpPr/>
+          <p:nvPr/>
+        </p:nvSpPr>
+        <p:spPr>
+          <a:xfrm>
+            <a:off x="5349240" y="1783080"/>
+            <a:ext cx="6522415" cy="4663440"/>
+          </a:xfrm>
+          <a:prstGeom prst="rect">
+            <a:avLst/>
+          </a:prstGeom>
+          <a:noFill/>
+          <a:ln/>
+        </p:spPr>
+        <p:txBody>
+          <a:bodyPr wrap="square" lIns="0" tIns="0" rIns="0" bIns="0" rtlCol="0" anchor="t"/>
+          <a:lstStyle/>
+          <a:p>
+            <a:pPr algn="l" indent="0" marL="0">
+              <a:spcAft>
+                <a:spcPts val="800"/>
+              </a:spcAft>
+              <a:buNone/>
+            </a:pPr>
+            <a:r>
+              <a:rPr lang="en-US" sz="4000" dirty="0">
+                <a:solidFill>
+                  <a:srgbClr val="111111"/>
+                </a:solidFill>
+                <a:latin typeface="Times New Roman" pitchFamily="34" charset="0"/>
+                <a:ea typeface="Times New Roman" pitchFamily="34" charset="-122"/>
+                <a:cs typeface="Times New Roman" pitchFamily="34" charset="-120"/>
+              </a:rPr>
+              <a:t>By day they reflect sunlight and cool the ground; at night they trap heat and keep it warm.</a:t>
+            </a:r>
+            <a:endParaRPr lang="en-US" sz="4000" dirty="0"/>
+          </a:p>
+        </p:txBody>
+      </p:sp>
+      <p:sp>
+        <p:nvSpPr>
+          <p:cNvPr id="25" name="Slide Number Placeholder 0"/>
+          <p:cNvSpPr>
+            <a:spLocks noGrp="1"/>
+          </p:cNvSpPr>
+          <p:nvPr>
+            <p:ph type="sldNum" sz="quarter" idx="4294967295"/>
+          </p:nvPr>
+        </p:nvSpPr>
+        <p:spPr>
+          <a:xfrm>
+            <a:off x="27432" y="91440"/>
+            <a:ext cx="585216" cy="475488"/>
+          </a:xfrm>
+          <a:prstGeom prst="rect">
+            <a:avLst/>
+          </a:prstGeom>
+          <a:extLst>
+            <a:ext uri="{C572A759-6A51-4108-AA02-DFA0A04FC94B}">
+              <ma14:wrappingTextBoxFlag xmlns:ma14="http://schemas.microsoft.com/office/mac/drawingml/2011/main" val="0"/>
+            </a:ext>
+          </a:extLst>
+        </p:spPr>
+        <p:txBody>
+          <a:bodyPr/>
+          <a:lstStyle>
+            <a:lvl1pPr>
+              <a:defRPr sz="2000">
+                <a:solidFill>
+                  <a:srgbClr val="FFFFFF"/>
+                </a:solidFill>
+                <a:latin typeface="Calibri"/>
+                <a:ea typeface="Calibri"/>
+                <a:cs typeface="Calibri"/>
+              </a:defRPr>
+            </a:lvl1pPr>
+          </a:lstStyle>
+          <a:p>
+            <a:pPr algn="ctr"/>
+            <a:fld id="{F7021451-1387-4CA6-816F-3879F97B5CBC}" type="slidenum">
+              <a:rPr b="1" lang="en-US"/>
+              <a:t>57</a:t>
+            </a:fld>
+            <a:endParaRPr lang="en-US"/>
+          </a:p>
+        </p:txBody>
+      </p:sp>
+    </p:spTree>
+  </p:cSld>
+  <p:clrMapOvr>
+    <a:masterClrMapping/>
+  </p:clrMapOvr>
+</p:sld>
+</file>
+
+<file path=ppt/slides/slide58.xml><?xml version="1.0" encoding="utf-8"?>
+<p:sld xmlns:a="http://schemas.openxmlformats.org/drawingml/2006/main" xmlns:r="http://schemas.openxmlformats.org/officeDocument/2006/relationships" xmlns:p="http://schemas.openxmlformats.org/presentationml/2006/main">
+  <p:cSld name="Slide 58">
+    <p:spTree>
+      <p:nvGrpSpPr>
+        <p:cNvPr id="1" name=""/>
+        <p:cNvGrpSpPr/>
+        <p:nvPr/>
+      </p:nvGrpSpPr>
+      <p:grpSpPr>
+        <a:xfrm>
+          <a:off x="0" y="0"/>
+          <a:ext cx="0" cy="0"/>
+          <a:chOff x="0" y="0"/>
+          <a:chExt cx="0" cy="0"/>
+        </a:xfrm>
+      </p:grpSpPr>
+      <p:sp>
+        <p:nvSpPr>
+          <p:cNvPr id="2" name="Text 0"/>
+          <p:cNvSpPr/>
+          <p:nvPr/>
+        </p:nvSpPr>
+        <p:spPr>
+          <a:xfrm>
+            <a:off x="457200" y="713232"/>
+            <a:ext cx="11368735" cy="274320"/>
+          </a:xfrm>
+          <a:prstGeom prst="rect">
+            <a:avLst/>
+          </a:prstGeom>
+          <a:noFill/>
+          <a:ln/>
+        </p:spPr>
+        <p:txBody>
+          <a:bodyPr wrap="square" lIns="0" tIns="0" rIns="0" bIns="0" rtlCol="0" anchor="ctr"/>
+          <a:lstStyle/>
+          <a:p>
+            <a:pPr algn="r" indent="0" marL="0">
+              <a:buNone/>
+            </a:pPr>
+            <a:r>
+              <a:rPr lang="en-US" sz="1400" b="1" dirty="0">
+                <a:solidFill>
+                  <a:srgbClr val="1C3F6E"/>
+                </a:solidFill>
+                <a:latin typeface="Calibri" pitchFamily="34" charset="0"/>
+                <a:ea typeface="Calibri" pitchFamily="34" charset="-122"/>
+                <a:cs typeface="Calibri" pitchFamily="34" charset="-120"/>
+              </a:rPr>
+              <a:t>REMEDIATION</a:t>
+            </a:r>
+            <a:endParaRPr lang="en-US" sz="1400" dirty="0"/>
+          </a:p>
+        </p:txBody>
+      </p:sp>
+      <p:pic>
+        <p:nvPicPr>
+          <p:cNvPr id="3" name="Image 0" descr="/home/claude/f4/img/minesec_sheet.png">    </p:cNvPr>
+          <p:cNvPicPr>
+            <a:picLocks noChangeAspect="1"/>
+          </p:cNvPicPr>
+          <p:nvPr/>
+        </p:nvPicPr>
+        <p:blipFill>
+          <a:blip r:embed="rId1"/>
+          <a:stretch>
+            <a:fillRect/>
+          </a:stretch>
+        </p:blipFill>
+        <p:spPr>
+          <a:xfrm>
+            <a:off x="0" y="658368"/>
+            <a:ext cx="1463040" cy="5833872"/>
+          </a:xfrm>
+          <a:prstGeom prst="rect">
+            <a:avLst/>
+          </a:prstGeom>
+        </p:spPr>
+      </p:pic>
+      <p:sp>
+        <p:nvSpPr>
+          <p:cNvPr id="4" name="Text 1"/>
+          <p:cNvSpPr/>
+          <p:nvPr/>
+        </p:nvSpPr>
+        <p:spPr>
+          <a:xfrm>
+            <a:off x="1691640" y="1005840"/>
+            <a:ext cx="10180015" cy="731520"/>
+          </a:xfrm>
+          <a:prstGeom prst="rect">
+            <a:avLst/>
+          </a:prstGeom>
+          <a:noFill/>
+          <a:ln/>
+        </p:spPr>
+        <p:txBody>
+          <a:bodyPr wrap="square" lIns="0" tIns="0" rIns="0" bIns="0" rtlCol="0" anchor="ctr">
+            <a:normAutofit/>
+          </a:bodyPr>
+          <a:lstStyle/>
+          <a:p>
+            <a:pPr algn="ctr" indent="0" marL="0">
+              <a:buNone/>
+            </a:pPr>
+            <a:r>
+              <a:rPr lang="en-US" sz="3600" b="1" dirty="0">
+                <a:solidFill>
+                  <a:srgbClr val="990011"/>
+                </a:solidFill>
+                <a:latin typeface="Times New Roman" pitchFamily="34" charset="0"/>
+                <a:ea typeface="Times New Roman" pitchFamily="34" charset="-122"/>
+                <a:cs typeface="Times New Roman" pitchFamily="34" charset="-120"/>
+              </a:rPr>
+              <a:t>Remediation</a:t>
+            </a:r>
+            <a:endParaRPr lang="en-US" sz="3600" dirty="0"/>
+          </a:p>
+        </p:txBody>
+      </p:sp>
+      <p:sp>
+        <p:nvSpPr>
+          <p:cNvPr id="5" name="Text 2"/>
+          <p:cNvSpPr/>
+          <p:nvPr/>
+        </p:nvSpPr>
+        <p:spPr>
+          <a:xfrm>
+            <a:off x="1691640" y="1783080"/>
+            <a:ext cx="10180015" cy="4663440"/>
+          </a:xfrm>
+          <a:prstGeom prst="rect">
+            <a:avLst/>
+          </a:prstGeom>
+          <a:noFill/>
+          <a:ln/>
+        </p:spPr>
+        <p:txBody>
+          <a:bodyPr wrap="square" lIns="0" tIns="0" rIns="0" bIns="0" rtlCol="0" anchor="t"/>
+          <a:lstStyle/>
+          <a:p>
+            <a:pPr algn="l" indent="0" marL="0">
+              <a:spcAft>
+                <a:spcPts val="800"/>
+              </a:spcAft>
+              <a:buNone/>
+            </a:pPr>
+            <a:r>
+              <a:rPr lang="en-US" sz="4000" b="1" dirty="0">
+                <a:solidFill>
+                  <a:srgbClr val="111111"/>
+                </a:solidFill>
+                <a:latin typeface="Times New Roman" pitchFamily="34" charset="0"/>
+                <a:ea typeface="Times New Roman" pitchFamily="34" charset="-122"/>
+                <a:cs typeface="Times New Roman" pitchFamily="34" charset="-120"/>
+              </a:rPr>
+              <a:t>Fill in the blanks:</a:t>
+            </a:r>
+            <a:endParaRPr lang="en-US" sz="4000" dirty="0"/>
+          </a:p>
+          <a:p>
+            <a:pPr algn="l" marL="342900" indent="-342900">
+              <a:spcAft>
+                <a:spcPts val="800"/>
+              </a:spcAft>
+              <a:buSzPct val="100000"/>
+              <a:buFont typeface="+mj-lt"/>
+              <a:buAutoNum type="arabicPeriod" startAt="1"/>
+            </a:pPr>
+            <a:r>
+              <a:rPr lang="en-US" sz="4000" dirty="0">
+                <a:solidFill>
+                  <a:srgbClr val="111111"/>
+                </a:solidFill>
+                <a:latin typeface="Times New Roman" pitchFamily="34" charset="0"/>
+                <a:ea typeface="Times New Roman" pitchFamily="34" charset="-122"/>
+                <a:cs typeface="Times New Roman" pitchFamily="34" charset="-120"/>
+              </a:rPr>
+              <a:t>Temperature falls by about ______ °C per 1,000 m.</a:t>
+            </a:r>
+            <a:endParaRPr lang="en-US" sz="4000" dirty="0"/>
+          </a:p>
+          <a:p>
+            <a:pPr algn="l" marL="342900" indent="-342900">
+              <a:spcAft>
+                <a:spcPts val="800"/>
+              </a:spcAft>
+              <a:buSzPct val="100000"/>
+              <a:buFont typeface="+mj-lt"/>
+              <a:buAutoNum type="arabicPeriod" startAt="1"/>
+            </a:pPr>
+            <a:r>
+              <a:rPr lang="en-US" sz="4000" dirty="0">
+                <a:solidFill>
+                  <a:srgbClr val="111111"/>
+                </a:solidFill>
+                <a:latin typeface="Times New Roman" pitchFamily="34" charset="0"/>
+                <a:ea typeface="Times New Roman" pitchFamily="34" charset="-122"/>
+                <a:cs typeface="Times New Roman" pitchFamily="34" charset="-120"/>
+              </a:rPr>
+              <a:t>The direction a slope faces is its ______.</a:t>
+            </a:r>
+            <a:endParaRPr lang="en-US" sz="4000" dirty="0"/>
+          </a:p>
+          <a:p>
+            <a:pPr algn="l" marL="342900" indent="-342900">
+              <a:spcAft>
+                <a:spcPts val="800"/>
+              </a:spcAft>
+              <a:buSzPct val="100000"/>
+              <a:buFont typeface="+mj-lt"/>
+              <a:buAutoNum type="arabicPeriod" startAt="1"/>
+            </a:pPr>
+            <a:r>
+              <a:rPr lang="en-US" sz="4000" dirty="0">
+                <a:solidFill>
+                  <a:srgbClr val="111111"/>
+                </a:solidFill>
+                <a:latin typeface="Times New Roman" pitchFamily="34" charset="0"/>
+                <a:ea typeface="Times New Roman" pitchFamily="34" charset="-122"/>
+                <a:cs typeface="Times New Roman" pitchFamily="34" charset="-120"/>
+              </a:rPr>
+              <a:t>A town warmer than the countryside is an urban heat ______.</a:t>
+            </a:r>
+            <a:endParaRPr lang="en-US" sz="4000" dirty="0"/>
+          </a:p>
+        </p:txBody>
+      </p:sp>
+      <p:sp>
+        <p:nvSpPr>
+          <p:cNvPr id="25" name="Slide Number Placeholder 0"/>
+          <p:cNvSpPr>
+            <a:spLocks noGrp="1"/>
+          </p:cNvSpPr>
+          <p:nvPr>
+            <p:ph type="sldNum" sz="quarter" idx="4294967295"/>
+          </p:nvPr>
+        </p:nvSpPr>
+        <p:spPr>
+          <a:xfrm>
+            <a:off x="27432" y="91440"/>
+            <a:ext cx="585216" cy="475488"/>
+          </a:xfrm>
+          <a:prstGeom prst="rect">
+            <a:avLst/>
+          </a:prstGeom>
+          <a:extLst>
+            <a:ext uri="{C572A759-6A51-4108-AA02-DFA0A04FC94B}">
+              <ma14:wrappingTextBoxFlag xmlns:ma14="http://schemas.microsoft.com/office/mac/drawingml/2011/main" val="0"/>
+            </a:ext>
+          </a:extLst>
+        </p:spPr>
+        <p:txBody>
+          <a:bodyPr/>
+          <a:lstStyle>
+            <a:lvl1pPr>
+              <a:defRPr sz="2000">
+                <a:solidFill>
+                  <a:srgbClr val="FFFFFF"/>
+                </a:solidFill>
+                <a:latin typeface="Calibri"/>
+                <a:ea typeface="Calibri"/>
+                <a:cs typeface="Calibri"/>
+              </a:defRPr>
+            </a:lvl1pPr>
+          </a:lstStyle>
+          <a:p>
+            <a:pPr algn="ctr"/>
+            <a:fld id="{F7021451-1387-4CA6-816F-3879F97B5CBC}" type="slidenum">
+              <a:rPr b="1" lang="en-US"/>
+              <a:t>58</a:t>
+            </a:fld>
+            <a:endParaRPr lang="en-US"/>
+          </a:p>
+        </p:txBody>
+      </p:sp>
+    </p:spTree>
+  </p:cSld>
+  <p:clrMapOvr>
+    <a:masterClrMapping/>
+  </p:clrMapOvr>
+</p:sld>
+</file>
+
+<file path=ppt/slides/slide59.xml><?xml version="1.0" encoding="utf-8"?>
+<p:sld xmlns:a="http://schemas.openxmlformats.org/drawingml/2006/main" xmlns:r="http://schemas.openxmlformats.org/officeDocument/2006/relationships" xmlns:p="http://schemas.openxmlformats.org/presentationml/2006/main">
+  <p:cSld name="Slide 59">
+    <p:spTree>
+      <p:nvGrpSpPr>
+        <p:cNvPr id="1" name=""/>
+        <p:cNvGrpSpPr/>
+        <p:nvPr/>
+      </p:nvGrpSpPr>
+      <p:grpSpPr>
+        <a:xfrm>
+          <a:off x="0" y="0"/>
+          <a:ext cx="0" cy="0"/>
+          <a:chOff x="0" y="0"/>
+          <a:chExt cx="0" cy="0"/>
+        </a:xfrm>
+      </p:grpSpPr>
+      <p:sp>
+        <p:nvSpPr>
+          <p:cNvPr id="2" name="Text 0"/>
+          <p:cNvSpPr/>
+          <p:nvPr/>
+        </p:nvSpPr>
+        <p:spPr>
+          <a:xfrm>
+            <a:off x="457200" y="713232"/>
+            <a:ext cx="11368735" cy="274320"/>
+          </a:xfrm>
+          <a:prstGeom prst="rect">
+            <a:avLst/>
+          </a:prstGeom>
+          <a:noFill/>
+          <a:ln/>
+        </p:spPr>
+        <p:txBody>
+          <a:bodyPr wrap="square" lIns="0" tIns="0" rIns="0" bIns="0" rtlCol="0" anchor="ctr"/>
+          <a:lstStyle/>
+          <a:p>
+            <a:pPr algn="r" indent="0" marL="0">
+              <a:buNone/>
+            </a:pPr>
+            <a:r>
+              <a:rPr lang="en-US" sz="1400" b="1" dirty="0">
+                <a:solidFill>
+                  <a:srgbClr val="1C3F6E"/>
+                </a:solidFill>
+                <a:latin typeface="Calibri" pitchFamily="34" charset="0"/>
+                <a:ea typeface="Calibri" pitchFamily="34" charset="-122"/>
+                <a:cs typeface="Calibri" pitchFamily="34" charset="-120"/>
+              </a:rPr>
+              <a:t>HOMEWORK</a:t>
+            </a:r>
+            <a:endParaRPr lang="en-US" sz="1400" dirty="0"/>
+          </a:p>
+        </p:txBody>
+      </p:sp>
+      <p:pic>
+        <p:nvPicPr>
+          <p:cNvPr id="3" name="Image 0" descr="/home/claude/f4/img/minesec_sheet.png">    </p:cNvPr>
+          <p:cNvPicPr>
+            <a:picLocks noChangeAspect="1"/>
+          </p:cNvPicPr>
+          <p:nvPr/>
+        </p:nvPicPr>
+        <p:blipFill>
+          <a:blip r:embed="rId1"/>
+          <a:stretch>
+            <a:fillRect/>
+          </a:stretch>
+        </p:blipFill>
+        <p:spPr>
+          <a:xfrm>
+            <a:off x="0" y="658368"/>
+            <a:ext cx="5120640" cy="5833872"/>
+          </a:xfrm>
+          <a:prstGeom prst="rect">
+            <a:avLst/>
+          </a:prstGeom>
+        </p:spPr>
+      </p:pic>
+      <p:sp>
+        <p:nvSpPr>
+          <p:cNvPr id="4" name="Text 1"/>
+          <p:cNvSpPr/>
+          <p:nvPr/>
+        </p:nvSpPr>
+        <p:spPr>
+          <a:xfrm>
+            <a:off x="5349240" y="1005840"/>
+            <a:ext cx="6522415" cy="731520"/>
+          </a:xfrm>
+          <a:prstGeom prst="rect">
+            <a:avLst/>
+          </a:prstGeom>
+          <a:noFill/>
+          <a:ln/>
+        </p:spPr>
+        <p:txBody>
+          <a:bodyPr wrap="square" lIns="0" tIns="0" rIns="0" bIns="0" rtlCol="0" anchor="ctr">
+            <a:normAutofit/>
+          </a:bodyPr>
+          <a:lstStyle/>
+          <a:p>
+            <a:pPr algn="ctr" indent="0" marL="0">
+              <a:buNone/>
+            </a:pPr>
+            <a:r>
+              <a:rPr lang="en-US" sz="3600" b="1" dirty="0">
+                <a:solidFill>
+                  <a:srgbClr val="990011"/>
+                </a:solidFill>
+                <a:latin typeface="Times New Roman" pitchFamily="34" charset="0"/>
+                <a:ea typeface="Times New Roman" pitchFamily="34" charset="-122"/>
+                <a:cs typeface="Times New Roman" pitchFamily="34" charset="-120"/>
+              </a:rPr>
+              <a:t>Homework</a:t>
+            </a:r>
+            <a:endParaRPr lang="en-US" sz="3600" dirty="0"/>
+          </a:p>
+        </p:txBody>
+      </p:sp>
+      <p:sp>
+        <p:nvSpPr>
+          <p:cNvPr id="5" name="Text 2"/>
+          <p:cNvSpPr/>
+          <p:nvPr/>
+        </p:nvSpPr>
+        <p:spPr>
+          <a:xfrm>
+            <a:off x="5349240" y="1783080"/>
+            <a:ext cx="6522415" cy="4663440"/>
+          </a:xfrm>
+          <a:prstGeom prst="rect">
+            <a:avLst/>
+          </a:prstGeom>
+          <a:noFill/>
+          <a:ln/>
+        </p:spPr>
+        <p:txBody>
+          <a:bodyPr wrap="square" lIns="0" tIns="0" rIns="0" bIns="0" rtlCol="0" anchor="t"/>
+          <a:lstStyle/>
+          <a:p>
+            <a:pPr algn="l" indent="0" marL="0">
+              <a:spcAft>
+                <a:spcPts val="800"/>
+              </a:spcAft>
+              <a:buNone/>
+            </a:pPr>
+            <a:r>
+              <a:rPr lang="en-US" sz="4000" dirty="0">
+                <a:solidFill>
+                  <a:srgbClr val="111111"/>
+                </a:solidFill>
+                <a:latin typeface="Times New Roman" pitchFamily="34" charset="0"/>
+                <a:ea typeface="Times New Roman" pitchFamily="34" charset="-122"/>
+                <a:cs typeface="Times New Roman" pitchFamily="34" charset="-120"/>
+              </a:rPr>
+              <a:t>Define the environmental lapse rate.</a:t>
+            </a:r>
+            <a:endParaRPr lang="en-US" sz="4000" dirty="0"/>
+          </a:p>
+        </p:txBody>
+      </p:sp>
+      <p:sp>
+        <p:nvSpPr>
+          <p:cNvPr id="25" name="Slide Number Placeholder 0"/>
+          <p:cNvSpPr>
+            <a:spLocks noGrp="1"/>
+          </p:cNvSpPr>
+          <p:nvPr>
+            <p:ph type="sldNum" sz="quarter" idx="4294967295"/>
+          </p:nvPr>
+        </p:nvSpPr>
+        <p:spPr>
+          <a:xfrm>
+            <a:off x="27432" y="91440"/>
+            <a:ext cx="585216" cy="475488"/>
+          </a:xfrm>
+          <a:prstGeom prst="rect">
+            <a:avLst/>
+          </a:prstGeom>
+          <a:extLst>
+            <a:ext uri="{C572A759-6A51-4108-AA02-DFA0A04FC94B}">
+              <ma14:wrappingTextBoxFlag xmlns:ma14="http://schemas.microsoft.com/office/mac/drawingml/2011/main" val="0"/>
+            </a:ext>
+          </a:extLst>
+        </p:spPr>
+        <p:txBody>
+          <a:bodyPr/>
+          <a:lstStyle>
+            <a:lvl1pPr>
+              <a:defRPr sz="2000">
+                <a:solidFill>
+                  <a:srgbClr val="FFFFFF"/>
+                </a:solidFill>
+                <a:latin typeface="Calibri"/>
+                <a:ea typeface="Calibri"/>
+                <a:cs typeface="Calibri"/>
+              </a:defRPr>
+            </a:lvl1pPr>
+          </a:lstStyle>
+          <a:p>
+            <a:pPr algn="ctr"/>
+            <a:fld id="{F7021451-1387-4CA6-816F-3879F97B5CBC}" type="slidenum">
+              <a:rPr b="1" lang="en-US"/>
+              <a:t>59</a:t>
+            </a:fld>
+            <a:endParaRPr lang="en-US"/>
+          </a:p>
+        </p:txBody>
+      </p:sp>
+    </p:spTree>
+  </p:cSld>
+  <p:clrMapOvr>
+    <a:masterClrMapping/>
+  </p:clrMapOvr>
+</p:sld>
+</file>
+
+<file path=ppt/slides/slide6.xml><?xml version="1.0" encoding="utf-8"?>
+<p:sld xmlns:a="http://schemas.openxmlformats.org/drawingml/2006/main" xmlns:r="http://schemas.openxmlformats.org/officeDocument/2006/relationships" xmlns:p="http://schemas.openxmlformats.org/presentationml/2006/main">
+  <p:cSld name="Slide 6">
+    <p:spTree>
+      <p:nvGrpSpPr>
+        <p:cNvPr id="1" name=""/>
+        <p:cNvGrpSpPr/>
+        <p:nvPr/>
+      </p:nvGrpSpPr>
+      <p:grpSpPr>
+        <a:xfrm>
+          <a:off x="0" y="0"/>
+          <a:ext cx="0" cy="0"/>
+          <a:chOff x="0" y="0"/>
+          <a:chExt cx="0" cy="0"/>
+        </a:xfrm>
+      </p:grpSpPr>
+      <p:sp>
+        <p:nvSpPr>
+          <p:cNvPr id="2" name="Text 0"/>
+          <p:cNvSpPr/>
+          <p:nvPr/>
+        </p:nvSpPr>
+        <p:spPr>
+          <a:xfrm>
+            <a:off x="457200" y="713232"/>
+            <a:ext cx="11368735" cy="274320"/>
+          </a:xfrm>
+          <a:prstGeom prst="rect">
+            <a:avLst/>
+          </a:prstGeom>
+          <a:noFill/>
+          <a:ln/>
+        </p:spPr>
+        <p:txBody>
+          <a:bodyPr wrap="square" lIns="0" tIns="0" rIns="0" bIns="0" rtlCol="0" anchor="ctr"/>
+          <a:lstStyle/>
+          <a:p>
+            <a:pPr algn="r" indent="0" marL="0">
+              <a:buNone/>
+            </a:pPr>
+            <a:r>
+              <a:rPr lang="en-US" sz="1400" b="1" dirty="0">
+                <a:solidFill>
+                  <a:srgbClr val="1C3F6E"/>
+                </a:solidFill>
+                <a:latin typeface="Calibri" pitchFamily="34" charset="0"/>
+                <a:ea typeface="Calibri" pitchFamily="34" charset="-122"/>
+                <a:cs typeface="Calibri" pitchFamily="34" charset="-120"/>
+              </a:rPr>
+              <a:t>LESSON PLAN</a:t>
+            </a:r>
+            <a:endParaRPr lang="en-US" sz="1400" dirty="0"/>
+          </a:p>
+        </p:txBody>
+      </p:sp>
+      <p:pic>
+        <p:nvPicPr>
+          <p:cNvPr id="3" name="Image 0" descr="/home/claude/f4/img/minesec_sheet.png">    </p:cNvPr>
+          <p:cNvPicPr>
+            <a:picLocks noChangeAspect="1"/>
+          </p:cNvPicPr>
+          <p:nvPr/>
+        </p:nvPicPr>
+        <p:blipFill>
+          <a:blip r:embed="rId1"/>
+          <a:stretch>
+            <a:fillRect/>
+          </a:stretch>
+        </p:blipFill>
+        <p:spPr>
+          <a:xfrm>
+            <a:off x="0" y="658368"/>
+            <a:ext cx="2468880" cy="5833872"/>
+          </a:xfrm>
+          <a:prstGeom prst="rect">
+            <a:avLst/>
+          </a:prstGeom>
+        </p:spPr>
+      </p:pic>
+      <p:sp>
+        <p:nvSpPr>
+          <p:cNvPr id="4" name="Text 1"/>
+          <p:cNvSpPr/>
+          <p:nvPr/>
+        </p:nvSpPr>
+        <p:spPr>
+          <a:xfrm>
+            <a:off x="2697480" y="1005840"/>
+            <a:ext cx="9174175" cy="731520"/>
+          </a:xfrm>
+          <a:prstGeom prst="rect">
+            <a:avLst/>
+          </a:prstGeom>
+          <a:noFill/>
+          <a:ln/>
+        </p:spPr>
+        <p:txBody>
+          <a:bodyPr wrap="square" lIns="0" tIns="0" rIns="0" bIns="0" rtlCol="0" anchor="ctr">
+            <a:normAutofit/>
+          </a:bodyPr>
+          <a:lstStyle/>
+          <a:p>
+            <a:pPr algn="ctr" indent="0" marL="0">
+              <a:buNone/>
+            </a:pPr>
+            <a:r>
+              <a:rPr lang="en-US" sz="3600" b="1" dirty="0">
+                <a:solidFill>
+                  <a:srgbClr val="990011"/>
+                </a:solidFill>
+                <a:latin typeface="Times New Roman" pitchFamily="34" charset="0"/>
+                <a:ea typeface="Times New Roman" pitchFamily="34" charset="-122"/>
+                <a:cs typeface="Times New Roman" pitchFamily="34" charset="-120"/>
+              </a:rPr>
+              <a:t>Lesson Plan</a:t>
+            </a:r>
+            <a:endParaRPr lang="en-US" sz="3600" dirty="0"/>
+          </a:p>
+        </p:txBody>
+      </p:sp>
+      <p:sp>
+        <p:nvSpPr>
+          <p:cNvPr id="5" name="Text 2"/>
+          <p:cNvSpPr/>
+          <p:nvPr/>
+        </p:nvSpPr>
+        <p:spPr>
+          <a:xfrm>
+            <a:off x="2697480" y="1783080"/>
+            <a:ext cx="9174175" cy="4663440"/>
+          </a:xfrm>
+          <a:prstGeom prst="rect">
+            <a:avLst/>
+          </a:prstGeom>
+          <a:noFill/>
+          <a:ln/>
+        </p:spPr>
+        <p:txBody>
+          <a:bodyPr wrap="square" lIns="0" tIns="0" rIns="0" bIns="0" rtlCol="0" anchor="t"/>
+          <a:lstStyle/>
+          <a:p>
+            <a:pPr algn="l" marL="342900" indent="-342900">
+              <a:spcAft>
+                <a:spcPts val="800"/>
+              </a:spcAft>
+              <a:buSzPct val="100000"/>
+              <a:buFont typeface="+mj-lt"/>
+              <a:buAutoNum type="arabicPeriod" startAt="1"/>
+            </a:pPr>
+            <a:r>
+              <a:rPr lang="en-US" sz="4000" dirty="0">
+                <a:solidFill>
+                  <a:srgbClr val="111111"/>
+                </a:solidFill>
+                <a:latin typeface="Times New Roman" pitchFamily="34" charset="0"/>
+                <a:ea typeface="Times New Roman" pitchFamily="34" charset="-122"/>
+                <a:cs typeface="Times New Roman" pitchFamily="34" charset="-120"/>
+              </a:rPr>
+              <a:t>Correction of the homework</a:t>
+            </a:r>
+            <a:endParaRPr lang="en-US" sz="4000" dirty="0"/>
+          </a:p>
+          <a:p>
+            <a:pPr algn="l" marL="342900" indent="-342900">
+              <a:spcAft>
+                <a:spcPts val="800"/>
+              </a:spcAft>
+              <a:buSzPct val="100000"/>
+              <a:buFont typeface="+mj-lt"/>
+              <a:buAutoNum type="arabicPeriod" startAt="1"/>
+            </a:pPr>
+            <a:r>
+              <a:rPr lang="en-US" sz="4000" dirty="0">
+                <a:solidFill>
+                  <a:srgbClr val="111111"/>
+                </a:solidFill>
+                <a:latin typeface="Times New Roman" pitchFamily="34" charset="0"/>
+                <a:ea typeface="Times New Roman" pitchFamily="34" charset="-122"/>
+                <a:cs typeface="Times New Roman" pitchFamily="34" charset="-120"/>
+              </a:rPr>
+              <a:t>Objectives and recall</a:t>
+            </a:r>
+            <a:endParaRPr lang="en-US" sz="4000" dirty="0"/>
+          </a:p>
+          <a:p>
+            <a:pPr algn="l" marL="342900" indent="-342900">
+              <a:spcAft>
+                <a:spcPts val="800"/>
+              </a:spcAft>
+              <a:buSzPct val="100000"/>
+              <a:buFont typeface="+mj-lt"/>
+              <a:buAutoNum type="arabicPeriod" startAt="1"/>
+            </a:pPr>
+            <a:r>
+              <a:rPr lang="en-US" sz="4000" dirty="0">
+                <a:solidFill>
+                  <a:srgbClr val="111111"/>
+                </a:solidFill>
+                <a:latin typeface="Times New Roman" pitchFamily="34" charset="0"/>
+                <a:ea typeface="Times New Roman" pitchFamily="34" charset="-122"/>
+                <a:cs typeface="Times New Roman" pitchFamily="34" charset="-120"/>
+              </a:rPr>
+              <a:t>Real-life situation and action to take</a:t>
+            </a:r>
+            <a:endParaRPr lang="en-US" sz="4000" dirty="0"/>
+          </a:p>
+          <a:p>
+            <a:pPr algn="l" marL="342900" indent="-342900">
+              <a:spcAft>
+                <a:spcPts val="800"/>
+              </a:spcAft>
+              <a:buSzPct val="100000"/>
+              <a:buFont typeface="+mj-lt"/>
+              <a:buAutoNum type="arabicPeriod" startAt="1"/>
+            </a:pPr>
+            <a:r>
+              <a:rPr lang="en-US" sz="4000" dirty="0">
+                <a:solidFill>
+                  <a:srgbClr val="111111"/>
+                </a:solidFill>
+                <a:latin typeface="Times New Roman" pitchFamily="34" charset="0"/>
+                <a:ea typeface="Times New Roman" pitchFamily="34" charset="-122"/>
+                <a:cs typeface="Times New Roman" pitchFamily="34" charset="-120"/>
+              </a:rPr>
+              <a:t>Learning activities</a:t>
+            </a:r>
+            <a:endParaRPr lang="en-US" sz="4000" dirty="0"/>
+          </a:p>
+          <a:p>
+            <a:pPr algn="l" marL="342900" indent="-342900">
+              <a:spcAft>
+                <a:spcPts val="800"/>
+              </a:spcAft>
+              <a:buSzPct val="100000"/>
+              <a:buFont typeface="+mj-lt"/>
+              <a:buAutoNum type="arabicPeriod" startAt="1"/>
+            </a:pPr>
+            <a:r>
+              <a:rPr lang="en-US" sz="4000" dirty="0">
+                <a:solidFill>
+                  <a:srgbClr val="111111"/>
+                </a:solidFill>
+                <a:latin typeface="Times New Roman" pitchFamily="34" charset="0"/>
+                <a:ea typeface="Times New Roman" pitchFamily="34" charset="-122"/>
+                <a:cs typeface="Times New Roman" pitchFamily="34" charset="-120"/>
+              </a:rPr>
+              <a:t>Board summary</a:t>
+            </a:r>
+            <a:endParaRPr lang="en-US" sz="4000" dirty="0"/>
+          </a:p>
+          <a:p>
+            <a:pPr algn="l" marL="342900" indent="-342900">
+              <a:spcAft>
+                <a:spcPts val="800"/>
+              </a:spcAft>
+              <a:buSzPct val="100000"/>
+              <a:buFont typeface="+mj-lt"/>
+              <a:buAutoNum type="arabicPeriod" startAt="1"/>
+            </a:pPr>
+            <a:r>
+              <a:rPr lang="en-US" sz="4000" dirty="0">
+                <a:solidFill>
+                  <a:srgbClr val="111111"/>
+                </a:solidFill>
+                <a:latin typeface="Times New Roman" pitchFamily="34" charset="0"/>
+                <a:ea typeface="Times New Roman" pitchFamily="34" charset="-122"/>
+                <a:cs typeface="Times New Roman" pitchFamily="34" charset="-120"/>
+              </a:rPr>
+              <a:t>Evaluation, remediation and homework</a:t>
+            </a:r>
+            <a:endParaRPr lang="en-US" sz="4000" dirty="0"/>
+          </a:p>
+        </p:txBody>
+      </p:sp>
+      <p:sp>
+        <p:nvSpPr>
+          <p:cNvPr id="25" name="Slide Number Placeholder 0"/>
+          <p:cNvSpPr>
+            <a:spLocks noGrp="1"/>
+          </p:cNvSpPr>
+          <p:nvPr>
+            <p:ph type="sldNum" sz="quarter" idx="4294967295"/>
+          </p:nvPr>
+        </p:nvSpPr>
+        <p:spPr>
+          <a:xfrm>
+            <a:off x="27432" y="91440"/>
+            <a:ext cx="585216" cy="475488"/>
+          </a:xfrm>
+          <a:prstGeom prst="rect">
+            <a:avLst/>
+          </a:prstGeom>
+          <a:extLst>
+            <a:ext uri="{C572A759-6A51-4108-AA02-DFA0A04FC94B}">
+              <ma14:wrappingTextBoxFlag xmlns:ma14="http://schemas.microsoft.com/office/mac/drawingml/2011/main" val="0"/>
+            </a:ext>
+          </a:extLst>
+        </p:spPr>
+        <p:txBody>
+          <a:bodyPr/>
+          <a:lstStyle>
+            <a:lvl1pPr>
+              <a:defRPr sz="2000">
+                <a:solidFill>
+                  <a:srgbClr val="FFFFFF"/>
+                </a:solidFill>
+                <a:latin typeface="Calibri"/>
+                <a:ea typeface="Calibri"/>
+                <a:cs typeface="Calibri"/>
+              </a:defRPr>
+            </a:lvl1pPr>
+          </a:lstStyle>
+          <a:p>
+            <a:pPr algn="ctr"/>
+            <a:fld id="{F7021451-1387-4CA6-816F-3879F97B5CBC}" type="slidenum">
+              <a:rPr b="1" lang="en-US"/>
+              <a:t>6</a:t>
+            </a:fld>
+            <a:endParaRPr lang="en-US"/>
+          </a:p>
+        </p:txBody>
+      </p:sp>
+    </p:spTree>
+  </p:cSld>
+  <p:clrMapOvr>
+    <a:masterClrMapping/>
+  </p:clrMapOvr>
+</p:sld>
+</file>
+
+<file path=ppt/slides/slide60.xml><?xml version="1.0" encoding="utf-8"?>
+<p:sld xmlns:a="http://schemas.openxmlformats.org/drawingml/2006/main" xmlns:r="http://schemas.openxmlformats.org/officeDocument/2006/relationships" xmlns:p="http://schemas.openxmlformats.org/presentationml/2006/main">
+  <p:cSld name="Slide 60">
+    <p:spTree>
+      <p:nvGrpSpPr>
+        <p:cNvPr id="1" name=""/>
+        <p:cNvGrpSpPr/>
+        <p:nvPr/>
+      </p:nvGrpSpPr>
+      <p:grpSpPr>
+        <a:xfrm>
+          <a:off x="0" y="0"/>
+          <a:ext cx="0" cy="0"/>
+          <a:chOff x="0" y="0"/>
+          <a:chExt cx="0" cy="0"/>
+        </a:xfrm>
+      </p:grpSpPr>
+      <p:sp>
+        <p:nvSpPr>
+          <p:cNvPr id="2" name="Text 0"/>
+          <p:cNvSpPr/>
+          <p:nvPr/>
+        </p:nvSpPr>
+        <p:spPr>
+          <a:xfrm>
+            <a:off x="457200" y="713232"/>
+            <a:ext cx="11368735" cy="274320"/>
+          </a:xfrm>
+          <a:prstGeom prst="rect">
+            <a:avLst/>
+          </a:prstGeom>
+          <a:noFill/>
+          <a:ln/>
+        </p:spPr>
+        <p:txBody>
+          <a:bodyPr wrap="square" lIns="0" tIns="0" rIns="0" bIns="0" rtlCol="0" anchor="ctr"/>
+          <a:lstStyle/>
+          <a:p>
+            <a:pPr algn="r" indent="0" marL="0">
+              <a:buNone/>
+            </a:pPr>
+            <a:r>
+              <a:rPr lang="en-US" sz="1400" b="1" dirty="0">
+                <a:solidFill>
+                  <a:srgbClr val="1C3F6E"/>
+                </a:solidFill>
+                <a:latin typeface="Calibri" pitchFamily="34" charset="0"/>
+                <a:ea typeface="Calibri" pitchFamily="34" charset="-122"/>
+                <a:cs typeface="Calibri" pitchFamily="34" charset="-120"/>
+              </a:rPr>
+              <a:t>NEXT LESSON</a:t>
+            </a:r>
+            <a:endParaRPr lang="en-US" sz="1400" dirty="0"/>
+          </a:p>
+        </p:txBody>
+      </p:sp>
+      <p:pic>
+        <p:nvPicPr>
+          <p:cNvPr id="3" name="Image 0" descr="/home/claude/f4/img/minesec_sheet.png">    </p:cNvPr>
+          <p:cNvPicPr>
+            <a:picLocks noChangeAspect="1"/>
+          </p:cNvPicPr>
+          <p:nvPr/>
+        </p:nvPicPr>
+        <p:blipFill>
+          <a:blip r:embed="rId1"/>
+          <a:stretch>
+            <a:fillRect/>
+          </a:stretch>
+        </p:blipFill>
+        <p:spPr>
+          <a:xfrm>
+            <a:off x="0" y="658368"/>
+            <a:ext cx="5120640" cy="5833872"/>
+          </a:xfrm>
+          <a:prstGeom prst="rect">
+            <a:avLst/>
+          </a:prstGeom>
+        </p:spPr>
+      </p:pic>
+      <p:sp>
+        <p:nvSpPr>
+          <p:cNvPr id="4" name="Text 1"/>
+          <p:cNvSpPr/>
+          <p:nvPr/>
+        </p:nvSpPr>
+        <p:spPr>
+          <a:xfrm>
+            <a:off x="5349240" y="1005840"/>
+            <a:ext cx="6522415" cy="731520"/>
+          </a:xfrm>
+          <a:prstGeom prst="rect">
+            <a:avLst/>
+          </a:prstGeom>
+          <a:noFill/>
+          <a:ln/>
+        </p:spPr>
+        <p:txBody>
+          <a:bodyPr wrap="square" lIns="0" tIns="0" rIns="0" bIns="0" rtlCol="0" anchor="ctr">
+            <a:normAutofit/>
+          </a:bodyPr>
+          <a:lstStyle/>
+          <a:p>
+            <a:pPr algn="ctr" indent="0" marL="0">
+              <a:buNone/>
+            </a:pPr>
+            <a:r>
+              <a:rPr lang="en-US" sz="3600" b="1" dirty="0">
+                <a:solidFill>
+                  <a:srgbClr val="990011"/>
+                </a:solidFill>
+                <a:latin typeface="Times New Roman" pitchFamily="34" charset="0"/>
+                <a:ea typeface="Times New Roman" pitchFamily="34" charset="-122"/>
+                <a:cs typeface="Times New Roman" pitchFamily="34" charset="-120"/>
+              </a:rPr>
+              <a:t>Next Lesson</a:t>
+            </a:r>
+            <a:endParaRPr lang="en-US" sz="3600" dirty="0"/>
+          </a:p>
+        </p:txBody>
+      </p:sp>
+      <p:sp>
+        <p:nvSpPr>
+          <p:cNvPr id="5" name="Text 2"/>
+          <p:cNvSpPr/>
+          <p:nvPr/>
+        </p:nvSpPr>
+        <p:spPr>
+          <a:xfrm>
+            <a:off x="5349240" y="1783080"/>
+            <a:ext cx="6522415" cy="4663440"/>
+          </a:xfrm>
+          <a:prstGeom prst="rect">
+            <a:avLst/>
+          </a:prstGeom>
+          <a:noFill/>
+          <a:ln/>
+        </p:spPr>
+        <p:txBody>
+          <a:bodyPr wrap="square" lIns="0" tIns="0" rIns="0" bIns="0" rtlCol="0" anchor="ctr"/>
+          <a:lstStyle/>
+          <a:p>
+            <a:pPr algn="ctr" indent="0" marL="0">
+              <a:spcAft>
+                <a:spcPts val="800"/>
+              </a:spcAft>
+              <a:buNone/>
+            </a:pPr>
+            <a:r>
+              <a:rPr lang="en-US" sz="4000" b="1" dirty="0">
+                <a:solidFill>
+                  <a:srgbClr val="111111"/>
+                </a:solidFill>
+                <a:latin typeface="Times New Roman" pitchFamily="34" charset="0"/>
+                <a:ea typeface="Times New Roman" pitchFamily="34" charset="-122"/>
+                <a:cs typeface="Times New Roman" pitchFamily="34" charset="-120"/>
+              </a:rPr>
+              <a:t>Our next lesson will be on:</a:t>
+            </a:r>
+            <a:endParaRPr lang="en-US" sz="4000" dirty="0"/>
+          </a:p>
+          <a:p>
+            <a:pPr algn="ctr" indent="0" marL="0">
+              <a:spcAft>
+                <a:spcPts val="800"/>
+              </a:spcAft>
+              <a:buNone/>
+            </a:pPr>
+            <a:r>
+              <a:rPr lang="en-US" sz="4000" b="1" dirty="0">
+                <a:solidFill>
+                  <a:srgbClr val="990011"/>
+                </a:solidFill>
+                <a:latin typeface="Times New Roman" pitchFamily="34" charset="0"/>
+                <a:ea typeface="Times New Roman" pitchFamily="34" charset="-122"/>
+                <a:cs typeface="Times New Roman" pitchFamily="34" charset="-120"/>
+              </a:rPr>
+              <a:t>Lesson 8: Vertical Distribution of Temperature</a:t>
+            </a:r>
+            <a:endParaRPr lang="en-US" sz="4000" dirty="0"/>
+          </a:p>
+        </p:txBody>
+      </p:sp>
+      <p:sp>
+        <p:nvSpPr>
+          <p:cNvPr id="25" name="Slide Number Placeholder 0"/>
+          <p:cNvSpPr>
+            <a:spLocks noGrp="1"/>
+          </p:cNvSpPr>
+          <p:nvPr>
+            <p:ph type="sldNum" sz="quarter" idx="4294967295"/>
+          </p:nvPr>
+        </p:nvSpPr>
+        <p:spPr>
+          <a:xfrm>
+            <a:off x="27432" y="91440"/>
+            <a:ext cx="585216" cy="475488"/>
+          </a:xfrm>
+          <a:prstGeom prst="rect">
+            <a:avLst/>
+          </a:prstGeom>
+          <a:extLst>
+            <a:ext uri="{C572A759-6A51-4108-AA02-DFA0A04FC94B}">
+              <ma14:wrappingTextBoxFlag xmlns:ma14="http://schemas.microsoft.com/office/mac/drawingml/2011/main" val="0"/>
+            </a:ext>
+          </a:extLst>
+        </p:spPr>
+        <p:txBody>
+          <a:bodyPr/>
+          <a:lstStyle>
+            <a:lvl1pPr>
+              <a:defRPr sz="2000">
+                <a:solidFill>
+                  <a:srgbClr val="FFFFFF"/>
+                </a:solidFill>
+                <a:latin typeface="Calibri"/>
+                <a:ea typeface="Calibri"/>
+                <a:cs typeface="Calibri"/>
+              </a:defRPr>
+            </a:lvl1pPr>
+          </a:lstStyle>
+          <a:p>
+            <a:pPr algn="ctr"/>
+            <a:fld id="{F7021451-1387-4CA6-816F-3879F97B5CBC}" type="slidenum">
+              <a:rPr b="1" lang="en-US"/>
+              <a:t>60</a:t>
+            </a:fld>
+            <a:endParaRPr lang="en-US"/>
+          </a:p>
+        </p:txBody>
+      </p:sp>
+    </p:spTree>
+  </p:cSld>
+  <p:clrMapOvr>
+    <a:masterClrMapping/>
+  </p:clrMapOvr>
+</p:sld>
+</file>
+
+<file path=ppt/slides/slide61.xml><?xml version="1.0" encoding="utf-8"?>
+<p:sld xmlns:a="http://schemas.openxmlformats.org/drawingml/2006/main" xmlns:r="http://schemas.openxmlformats.org/officeDocument/2006/relationships" xmlns:p="http://schemas.openxmlformats.org/presentationml/2006/main">
+  <p:cSld name="Slide 61">
+    <p:spTree>
+      <p:nvGrpSpPr>
+        <p:cNvPr id="1" name=""/>
+        <p:cNvGrpSpPr/>
+        <p:nvPr/>
+      </p:nvGrpSpPr>
+      <p:grpSpPr>
+        <a:xfrm>
+          <a:off x="0" y="0"/>
+          <a:ext cx="0" cy="0"/>
+          <a:chOff x="0" y="0"/>
+          <a:chExt cx="0" cy="0"/>
+        </a:xfrm>
+      </p:grpSpPr>
+      <p:sp>
+        <p:nvSpPr>
+          <p:cNvPr id="2" name="Text 0"/>
+          <p:cNvSpPr/>
+          <p:nvPr/>
+        </p:nvSpPr>
+        <p:spPr>
+          <a:xfrm>
+            <a:off x="457200" y="713232"/>
+            <a:ext cx="11368735" cy="274320"/>
+          </a:xfrm>
+          <a:prstGeom prst="rect">
+            <a:avLst/>
+          </a:prstGeom>
+          <a:noFill/>
+          <a:ln/>
+        </p:spPr>
+        <p:txBody>
+          <a:bodyPr wrap="square" lIns="0" tIns="0" rIns="0" bIns="0" rtlCol="0" anchor="ctr"/>
+          <a:lstStyle/>
+          <a:p>
+            <a:pPr algn="r" indent="0" marL="0">
+              <a:buNone/>
+            </a:pPr>
+            <a:r>
+              <a:rPr lang="en-US" sz="1400" b="1" dirty="0">
+                <a:solidFill>
+                  <a:srgbClr val="1C3F6E"/>
+                </a:solidFill>
+                <a:latin typeface="Calibri" pitchFamily="34" charset="0"/>
+                <a:ea typeface="Calibri" pitchFamily="34" charset="-122"/>
+                <a:cs typeface="Calibri" pitchFamily="34" charset="-120"/>
+              </a:rPr>
+              <a:t>BILINGUAL GAME</a:t>
+            </a:r>
+            <a:endParaRPr lang="en-US" sz="1400" dirty="0"/>
+          </a:p>
+        </p:txBody>
+      </p:sp>
+      <p:sp>
+        <p:nvSpPr>
+          <p:cNvPr id="3" name="Text 1"/>
+          <p:cNvSpPr/>
+          <p:nvPr/>
+        </p:nvSpPr>
+        <p:spPr>
+          <a:xfrm>
+            <a:off x="457200" y="1005840"/>
+            <a:ext cx="11277295" cy="731520"/>
+          </a:xfrm>
+          <a:prstGeom prst="rect">
+            <a:avLst/>
+          </a:prstGeom>
+          <a:noFill/>
+          <a:ln/>
+        </p:spPr>
+        <p:txBody>
+          <a:bodyPr wrap="square" lIns="0" tIns="0" rIns="0" bIns="0" rtlCol="0" anchor="ctr"/>
+          <a:lstStyle/>
+          <a:p>
+            <a:pPr algn="ctr" indent="0" marL="0">
+              <a:buNone/>
+            </a:pPr>
+            <a:r>
+              <a:rPr lang="en-US" sz="3600" b="1" dirty="0">
+                <a:solidFill>
+                  <a:srgbClr val="990011"/>
+                </a:solidFill>
+                <a:latin typeface="Times New Roman" pitchFamily="34" charset="0"/>
+                <a:ea typeface="Times New Roman" pitchFamily="34" charset="-122"/>
+                <a:cs typeface="Times New Roman" pitchFamily="34" charset="-120"/>
+              </a:rPr>
               <a:t>Bilingual Game (Jeu Bilingue)</a:t>
             </a:r>
             <a:endParaRPr lang="en-US" sz="3600" dirty="0"/>
@@ -20189,7 +22039,7 @@
       </p:sp>
       <p:graphicFrame>
         <p:nvGraphicFramePr>
-          <p:cNvPr id="57" name="Table 0"/>
+          <p:cNvPr id="62" name="Table 0"/>
           <p:cNvGraphicFramePr>
             <a:graphicFrameLocks noGrp="1"/>
           </p:cNvGraphicFramePr>
@@ -21225,7 +23075,7 @@
             <a:pPr algn="ctr"/>
             <a:fld id="{F7021451-1387-4CA6-816F-3879F97B5CBC}" type="slidenum">
               <a:rPr b="1" lang="en-US"/>
-              <a:t>56</a:t>
+              <a:t>61</a:t>
             </a:fld>
             <a:endParaRPr lang="en-US"/>
           </a:p>
@@ -21239,9 +23089,9 @@
 </p:sld>
 </file>
 
-<file path=ppt/slides/slide57.xml><?xml version="1.0" encoding="utf-8"?>
+<file path=ppt/slides/slide62.xml><?xml version="1.0" encoding="utf-8"?>
 <p:sld xmlns:a="http://schemas.openxmlformats.org/drawingml/2006/main" xmlns:r="http://schemas.openxmlformats.org/officeDocument/2006/relationships" xmlns:p="http://schemas.openxmlformats.org/presentationml/2006/main">
-  <p:cSld name="Slide 57">
+  <p:cSld name="Slide 62">
     <p:spTree>
       <p:nvGrpSpPr>
         <p:cNvPr id="1" name=""/>
@@ -21336,7 +23186,7 @@
       </p:sp>
       <p:graphicFrame>
         <p:nvGraphicFramePr>
-          <p:cNvPr id="58" name="Table 0"/>
+          <p:cNvPr id="63" name="Table 0"/>
           <p:cNvGraphicFramePr>
             <a:graphicFrameLocks noGrp="1"/>
           </p:cNvGraphicFramePr>
@@ -21958,7 +23808,7 @@
             <a:pPr algn="ctr"/>
             <a:fld id="{F7021451-1387-4CA6-816F-3879F97B5CBC}" type="slidenum">
               <a:rPr b="1" lang="en-US"/>
-              <a:t>57</a:t>
+              <a:t>62</a:t>
             </a:fld>
             <a:endParaRPr lang="en-US"/>
           </a:p>
@@ -21972,9 +23822,9 @@
 </p:sld>
 </file>
 
-<file path=ppt/slides/slide58.xml><?xml version="1.0" encoding="utf-8"?>
+<file path=ppt/slides/slide63.xml><?xml version="1.0" encoding="utf-8"?>
 <p:sld xmlns:a="http://schemas.openxmlformats.org/drawingml/2006/main" xmlns:r="http://schemas.openxmlformats.org/officeDocument/2006/relationships" xmlns:p="http://schemas.openxmlformats.org/presentationml/2006/main">
-  <p:cSld name="Slide 58">
+  <p:cSld name="Slide 63">
     <p:spTree>
       <p:nvGrpSpPr>
         <p:cNvPr id="1" name=""/>
@@ -22069,7 +23919,7 @@
       </p:sp>
       <p:graphicFrame>
         <p:nvGraphicFramePr>
-          <p:cNvPr id="59" name="Table 0"/>
+          <p:cNvPr id="64" name="Table 0"/>
           <p:cNvGraphicFramePr>
             <a:graphicFrameLocks noGrp="1"/>
           </p:cNvGraphicFramePr>
@@ -22179,7 +24029,7 @@
                           <a:ea typeface="Calibri" pitchFamily="34" charset="-122"/>
                           <a:cs typeface="Calibri" pitchFamily="34" charset="-120"/>
                         </a:rPr>
-                        <a:t>DEFINITIONS; Nature of the Surface: Land and Water; Relief; Ocean Currents, Winds and Clouds; Urbanisation: the Urban Heat Island.</a:t>
+                        <a:t>DEFINITIONS; Nature of the Surface; Relief; Ocean Currents; Prevailing Winds; Cloud Cover; Urbanisation: the Heat Island.</a:t>
                       </a:r>
                       <a:endParaRPr lang="en-US" sz="1600" dirty="0">
                         <a:latin typeface="Calibri" charset="0"/>
@@ -22829,7 +24679,7 @@
             <a:pPr algn="ctr"/>
             <a:fld id="{F7021451-1387-4CA6-816F-3879F97B5CBC}" type="slidenum">
               <a:rPr b="1" lang="en-US"/>
-              <a:t>58</a:t>
+              <a:t>63</a:t>
             </a:fld>
             <a:endParaRPr lang="en-US"/>
           </a:p>
@@ -22843,9 +24693,9 @@
 </p:sld>
 </file>
 
-<file path=ppt/slides/slide59.xml><?xml version="1.0" encoding="utf-8"?>
+<file path=ppt/slides/slide64.xml><?xml version="1.0" encoding="utf-8"?>
 <p:sld xmlns:a="http://schemas.openxmlformats.org/drawingml/2006/main" xmlns:r="http://schemas.openxmlformats.org/officeDocument/2006/relationships" xmlns:p="http://schemas.openxmlformats.org/presentationml/2006/main">
-  <p:cSld name="Slide 59">
+  <p:cSld name="Slide 64">
     <p:spTree>
       <p:nvGrpSpPr>
         <p:cNvPr id="1" name=""/>
@@ -23154,7 +25004,7 @@
             <a:pPr algn="ctr"/>
             <a:fld id="{F7021451-1387-4CA6-816F-3879F97B5CBC}" type="slidenum">
               <a:rPr b="1" lang="en-US"/>
-              <a:t>59</a:t>
+              <a:t>64</a:t>
             </a:fld>
             <a:endParaRPr lang="en-US"/>
           </a:p>
@@ -23168,9 +25018,9 @@
 </p:sld>
 </file>
 
-<file path=ppt/slides/slide6.xml><?xml version="1.0" encoding="utf-8"?>
+<file path=ppt/slides/slide65.xml><?xml version="1.0" encoding="utf-8"?>
 <p:sld xmlns:a="http://schemas.openxmlformats.org/drawingml/2006/main" xmlns:r="http://schemas.openxmlformats.org/officeDocument/2006/relationships" xmlns:p="http://schemas.openxmlformats.org/presentationml/2006/main">
-  <p:cSld name="Slide 6">
+  <p:cSld name="Slide 65">
     <p:spTree>
       <p:nvGrpSpPr>
         <p:cNvPr id="1" name=""/>
@@ -23218,7 +25068,7 @@
                 <a:ea typeface="Calibri" pitchFamily="34" charset="-122"/>
                 <a:cs typeface="Calibri" pitchFamily="34" charset="-120"/>
               </a:rPr>
-              <a:t>LESSON PLAN</a:t>
+              <a:t>REFERENCES</a:t>
             </a:r>
             <a:endParaRPr lang="en-US" sz="1400" dirty="0"/>
           </a:p>
@@ -23241,7 +25091,7 @@
         <p:spPr>
           <a:xfrm>
             <a:off x="0" y="658368"/>
-            <a:ext cx="2468880" cy="5833872"/>
+            <a:ext cx="5120640" cy="5833872"/>
           </a:xfrm>
           <a:prstGeom prst="rect">
             <a:avLst/>
@@ -23256,8 +25106,8 @@
         </p:nvSpPr>
         <p:spPr>
           <a:xfrm>
-            <a:off x="2697480" y="1005840"/>
-            <a:ext cx="9174175" cy="731520"/>
+            <a:off x="5349240" y="1005840"/>
+            <a:ext cx="6522415" cy="731520"/>
           </a:xfrm>
           <a:prstGeom prst="rect">
             <a:avLst/>
@@ -23283,7 +25133,7 @@
                 <a:ea typeface="Times New Roman" pitchFamily="34" charset="-122"/>
                 <a:cs typeface="Times New Roman" pitchFamily="34" charset="-120"/>
               </a:rPr>
-              <a:t>Lesson Plan</a:t>
+              <a:t>References</a:t>
             </a:r>
             <a:endParaRPr lang="en-US" sz="3600" dirty="0"/>
           </a:p>
@@ -23297,8 +25147,8 @@
         </p:nvSpPr>
         <p:spPr>
           <a:xfrm>
-            <a:off x="2697480" y="1783080"/>
-            <a:ext cx="9174175" cy="4663440"/>
+            <a:off x="5349240" y="1783080"/>
+            <a:ext cx="6522415" cy="4663440"/>
           </a:xfrm>
           <a:prstGeom prst="rect">
             <a:avLst/>
@@ -23315,21 +25165,20 @@
                 <a:spcPts val="800"/>
               </a:spcAft>
               <a:buSzPct val="100000"/>
-              <a:buFont typeface="+mj-lt"/>
-              <a:buAutoNum type="arabicPeriod" startAt="1"/>
-            </a:pPr>
-            <a:r>
-              <a:rPr lang="en-US" sz="4000" dirty="0">
+              <a:buChar char="•"/>
+            </a:pPr>
+            <a:r>
+              <a:rPr lang="en-US" sz="1800" dirty="0">
                 <a:solidFill>
                   <a:srgbClr val="111111"/>
                 </a:solidFill>
-                <a:latin typeface="Times New Roman" pitchFamily="34" charset="0"/>
-                <a:ea typeface="Times New Roman" pitchFamily="34" charset="-122"/>
-                <a:cs typeface="Times New Roman" pitchFamily="34" charset="-120"/>
-              </a:rPr>
-              <a:t>Correction of the homework</a:t>
-            </a:r>
-            <a:endParaRPr lang="en-US" sz="4000" dirty="0"/>
+                <a:latin typeface="Calibri" pitchFamily="34" charset="0"/>
+                <a:ea typeface="Calibri" pitchFamily="34" charset="-122"/>
+                <a:cs typeface="Calibri" pitchFamily="34" charset="-120"/>
+              </a:rPr>
+              <a:t>Geography Syllabus for Sixth Forms (Lower and Upper Sixth), MINESEC, 2019 — Module 1 (Meteorology, Climatology &amp; Hydrology).</a:t>
+            </a:r>
+            <a:endParaRPr lang="en-US" sz="1800" dirty="0"/>
           </a:p>
           <a:p>
             <a:pPr algn="l" marL="342900" indent="-342900">
@@ -23337,21 +25186,20 @@
                 <a:spcPts val="800"/>
               </a:spcAft>
               <a:buSzPct val="100000"/>
-              <a:buFont typeface="+mj-lt"/>
-              <a:buAutoNum type="arabicPeriod" startAt="1"/>
-            </a:pPr>
-            <a:r>
-              <a:rPr lang="en-US" sz="4000" dirty="0">
+              <a:buChar char="•"/>
+            </a:pPr>
+            <a:r>
+              <a:rPr lang="en-US" sz="1800" dirty="0">
                 <a:solidFill>
                   <a:srgbClr val="111111"/>
                 </a:solidFill>
-                <a:latin typeface="Times New Roman" pitchFamily="34" charset="0"/>
-                <a:ea typeface="Times New Roman" pitchFamily="34" charset="-122"/>
-                <a:cs typeface="Times New Roman" pitchFamily="34" charset="-120"/>
-              </a:rPr>
-              <a:t>Objectives and recall</a:t>
-            </a:r>
-            <a:endParaRPr lang="en-US" sz="4000" dirty="0"/>
+                <a:latin typeface="Calibri" pitchFamily="34" charset="0"/>
+                <a:ea typeface="Calibri" pitchFamily="34" charset="-122"/>
+                <a:cs typeface="Calibri" pitchFamily="34" charset="-120"/>
+              </a:rPr>
+              <a:t>Teacher's course notes: Mr KAMDEM E., Meteorology (LSA), GBHS Garoua, 2026.</a:t>
+            </a:r>
+            <a:endParaRPr lang="en-US" sz="1800" dirty="0"/>
           </a:p>
           <a:p>
             <a:pPr algn="l" marL="342900" indent="-342900">
@@ -23359,21 +25207,20 @@
                 <a:spcPts val="800"/>
               </a:spcAft>
               <a:buSzPct val="100000"/>
-              <a:buFont typeface="+mj-lt"/>
-              <a:buAutoNum type="arabicPeriod" startAt="1"/>
-            </a:pPr>
-            <a:r>
-              <a:rPr lang="en-US" sz="4000" dirty="0">
+              <a:buChar char="•"/>
+            </a:pPr>
+            <a:r>
+              <a:rPr lang="en-US" sz="1800" dirty="0">
                 <a:solidFill>
                   <a:srgbClr val="111111"/>
                 </a:solidFill>
-                <a:latin typeface="Times New Roman" pitchFamily="34" charset="0"/>
-                <a:ea typeface="Times New Roman" pitchFamily="34" charset="-122"/>
-                <a:cs typeface="Times New Roman" pitchFamily="34" charset="-120"/>
-              </a:rPr>
-              <a:t>Real-life situation and action to take</a:t>
-            </a:r>
-            <a:endParaRPr lang="en-US" sz="4000" dirty="0"/>
+                <a:latin typeface="Calibri" pitchFamily="34" charset="0"/>
+                <a:ea typeface="Calibri" pitchFamily="34" charset="-122"/>
+                <a:cs typeface="Calibri" pitchFamily="34" charset="-120"/>
+              </a:rPr>
+              <a:t>Photo, Activity 2: “Kilimanjaro” by ian 1602, CC BY-NC 2.0, via Flickr (https://www.flickr.com/photos/98181641@N00/2179855841)</a:t>
+            </a:r>
+            <a:endParaRPr lang="en-US" sz="1800" dirty="0"/>
           </a:p>
           <a:p>
             <a:pPr algn="l" marL="342900" indent="-342900">
@@ -23381,21 +25228,20 @@
                 <a:spcPts val="800"/>
               </a:spcAft>
               <a:buSzPct val="100000"/>
-              <a:buFont typeface="+mj-lt"/>
-              <a:buAutoNum type="arabicPeriod" startAt="1"/>
-            </a:pPr>
-            <a:r>
-              <a:rPr lang="en-US" sz="4000" dirty="0">
+              <a:buChar char="•"/>
+            </a:pPr>
+            <a:r>
+              <a:rPr lang="en-US" sz="1800" dirty="0">
                 <a:solidFill>
                   <a:srgbClr val="111111"/>
                 </a:solidFill>
-                <a:latin typeface="Times New Roman" pitchFamily="34" charset="0"/>
-                <a:ea typeface="Times New Roman" pitchFamily="34" charset="-122"/>
-                <a:cs typeface="Times New Roman" pitchFamily="34" charset="-120"/>
-              </a:rPr>
-              <a:t>Learning activities</a:t>
-            </a:r>
-            <a:endParaRPr lang="en-US" sz="4000" dirty="0"/>
+                <a:latin typeface="Calibri" pitchFamily="34" charset="0"/>
+                <a:ea typeface="Calibri" pitchFamily="34" charset="-122"/>
+                <a:cs typeface="Calibri" pitchFamily="34" charset="-120"/>
+              </a:rPr>
+              <a:t>Photo, board summary (Winds from warm regions): “Bamenda sob a poeira do Harmattan” by carlosoliveirareis, CC BY-NC-SA 2.0, via Flickr (https://www.flickr.com/photos/54218923@N00/387054136)</a:t>
+            </a:r>
+            <a:endParaRPr lang="en-US" sz="1800" dirty="0"/>
           </a:p>
           <a:p>
             <a:pPr algn="l" marL="342900" indent="-342900">
@@ -23403,43 +25249,20 @@
                 <a:spcPts val="800"/>
               </a:spcAft>
               <a:buSzPct val="100000"/>
-              <a:buFont typeface="+mj-lt"/>
-              <a:buAutoNum type="arabicPeriod" startAt="1"/>
-            </a:pPr>
-            <a:r>
-              <a:rPr lang="en-US" sz="4000" dirty="0">
+              <a:buChar char="•"/>
+            </a:pPr>
+            <a:r>
+              <a:rPr lang="en-US" sz="1800" dirty="0">
                 <a:solidFill>
                   <a:srgbClr val="111111"/>
                 </a:solidFill>
-                <a:latin typeface="Times New Roman" pitchFamily="34" charset="0"/>
-                <a:ea typeface="Times New Roman" pitchFamily="34" charset="-122"/>
-                <a:cs typeface="Times New Roman" pitchFamily="34" charset="-120"/>
-              </a:rPr>
-              <a:t>Board summary</a:t>
-            </a:r>
-            <a:endParaRPr lang="en-US" sz="4000" dirty="0"/>
-          </a:p>
-          <a:p>
-            <a:pPr algn="l" marL="342900" indent="-342900">
-              <a:spcAft>
-                <a:spcPts val="800"/>
-              </a:spcAft>
-              <a:buSzPct val="100000"/>
-              <a:buFont typeface="+mj-lt"/>
-              <a:buAutoNum type="arabicPeriod" startAt="1"/>
-            </a:pPr>
-            <a:r>
-              <a:rPr lang="en-US" sz="4000" dirty="0">
-                <a:solidFill>
-                  <a:srgbClr val="111111"/>
-                </a:solidFill>
-                <a:latin typeface="Times New Roman" pitchFamily="34" charset="0"/>
-                <a:ea typeface="Times New Roman" pitchFamily="34" charset="-122"/>
-                <a:cs typeface="Times New Roman" pitchFamily="34" charset="-120"/>
-              </a:rPr>
-              <a:t>Evaluation, remediation and homework</a:t>
-            </a:r>
-            <a:endParaRPr lang="en-US" sz="4000" dirty="0"/>
+                <a:latin typeface="Calibri" pitchFamily="34" charset="0"/>
+                <a:ea typeface="Calibri" pitchFamily="34" charset="-122"/>
+                <a:cs typeface="Calibri" pitchFamily="34" charset="-120"/>
+              </a:rPr>
+              <a:t>Diagrams and animations: drawn for this lesson (Geography Department).</a:t>
+            </a:r>
+            <a:endParaRPr lang="en-US" sz="1800" dirty="0"/>
           </a:p>
         </p:txBody>
       </p:sp>
@@ -23485,290 +25308,7 @@
             <a:pPr algn="ctr"/>
             <a:fld id="{F7021451-1387-4CA6-816F-3879F97B5CBC}" type="slidenum">
               <a:rPr b="1" lang="en-US"/>
-              <a:t>6</a:t>
-            </a:fld>
-            <a:endParaRPr lang="en-US"/>
-          </a:p>
-        </p:txBody>
-      </p:sp>
-    </p:spTree>
-  </p:cSld>
-  <p:clrMapOvr>
-    <a:masterClrMapping/>
-  </p:clrMapOvr>
-</p:sld>
-</file>
-
-<file path=ppt/slides/slide60.xml><?xml version="1.0" encoding="utf-8"?>
-<p:sld xmlns:a="http://schemas.openxmlformats.org/drawingml/2006/main" xmlns:r="http://schemas.openxmlformats.org/officeDocument/2006/relationships" xmlns:p="http://schemas.openxmlformats.org/presentationml/2006/main">
-  <p:cSld name="Slide 60">
-    <p:spTree>
-      <p:nvGrpSpPr>
-        <p:cNvPr id="1" name=""/>
-        <p:cNvGrpSpPr/>
-        <p:nvPr/>
-      </p:nvGrpSpPr>
-      <p:grpSpPr>
-        <a:xfrm>
-          <a:off x="0" y="0"/>
-          <a:ext cx="0" cy="0"/>
-          <a:chOff x="0" y="0"/>
-          <a:chExt cx="0" cy="0"/>
-        </a:xfrm>
-      </p:grpSpPr>
-      <p:sp>
-        <p:nvSpPr>
-          <p:cNvPr id="2" name="Text 0"/>
-          <p:cNvSpPr/>
-          <p:nvPr/>
-        </p:nvSpPr>
-        <p:spPr>
-          <a:xfrm>
-            <a:off x="457200" y="713232"/>
-            <a:ext cx="11368735" cy="274320"/>
-          </a:xfrm>
-          <a:prstGeom prst="rect">
-            <a:avLst/>
-          </a:prstGeom>
-          <a:noFill/>
-          <a:ln/>
-        </p:spPr>
-        <p:txBody>
-          <a:bodyPr wrap="square" lIns="0" tIns="0" rIns="0" bIns="0" rtlCol="0" anchor="ctr"/>
-          <a:lstStyle/>
-          <a:p>
-            <a:pPr algn="r" indent="0" marL="0">
-              <a:buNone/>
-            </a:pPr>
-            <a:r>
-              <a:rPr lang="en-US" sz="1400" b="1" dirty="0">
-                <a:solidFill>
-                  <a:srgbClr val="1C3F6E"/>
-                </a:solidFill>
-                <a:latin typeface="Calibri" pitchFamily="34" charset="0"/>
-                <a:ea typeface="Calibri" pitchFamily="34" charset="-122"/>
-                <a:cs typeface="Calibri" pitchFamily="34" charset="-120"/>
-              </a:rPr>
-              <a:t>REFERENCES</a:t>
-            </a:r>
-            <a:endParaRPr lang="en-US" sz="1400" dirty="0"/>
-          </a:p>
-        </p:txBody>
-      </p:sp>
-      <p:pic>
-        <p:nvPicPr>
-          <p:cNvPr id="3" name="Image 0" descr="/home/claude/f4/img/minesec_sheet.png">    </p:cNvPr>
-          <p:cNvPicPr>
-            <a:picLocks noChangeAspect="1"/>
-          </p:cNvPicPr>
-          <p:nvPr/>
-        </p:nvPicPr>
-        <p:blipFill>
-          <a:blip r:embed="rId1"/>
-          <a:stretch>
-            <a:fillRect/>
-          </a:stretch>
-        </p:blipFill>
-        <p:spPr>
-          <a:xfrm>
-            <a:off x="0" y="658368"/>
-            <a:ext cx="5120640" cy="5833872"/>
-          </a:xfrm>
-          <a:prstGeom prst="rect">
-            <a:avLst/>
-          </a:prstGeom>
-        </p:spPr>
-      </p:pic>
-      <p:sp>
-        <p:nvSpPr>
-          <p:cNvPr id="4" name="Text 1"/>
-          <p:cNvSpPr/>
-          <p:nvPr/>
-        </p:nvSpPr>
-        <p:spPr>
-          <a:xfrm>
-            <a:off x="5349240" y="1005840"/>
-            <a:ext cx="6522415" cy="731520"/>
-          </a:xfrm>
-          <a:prstGeom prst="rect">
-            <a:avLst/>
-          </a:prstGeom>
-          <a:noFill/>
-          <a:ln/>
-        </p:spPr>
-        <p:txBody>
-          <a:bodyPr wrap="square" lIns="0" tIns="0" rIns="0" bIns="0" rtlCol="0" anchor="ctr">
-            <a:normAutofit/>
-          </a:bodyPr>
-          <a:lstStyle/>
-          <a:p>
-            <a:pPr algn="ctr" indent="0" marL="0">
-              <a:buNone/>
-            </a:pPr>
-            <a:r>
-              <a:rPr lang="en-US" sz="3600" b="1" dirty="0">
-                <a:solidFill>
-                  <a:srgbClr val="990011"/>
-                </a:solidFill>
-                <a:latin typeface="Times New Roman" pitchFamily="34" charset="0"/>
-                <a:ea typeface="Times New Roman" pitchFamily="34" charset="-122"/>
-                <a:cs typeface="Times New Roman" pitchFamily="34" charset="-120"/>
-              </a:rPr>
-              <a:t>References</a:t>
-            </a:r>
-            <a:endParaRPr lang="en-US" sz="3600" dirty="0"/>
-          </a:p>
-        </p:txBody>
-      </p:sp>
-      <p:sp>
-        <p:nvSpPr>
-          <p:cNvPr id="5" name="Text 2"/>
-          <p:cNvSpPr/>
-          <p:nvPr/>
-        </p:nvSpPr>
-        <p:spPr>
-          <a:xfrm>
-            <a:off x="5349240" y="1783080"/>
-            <a:ext cx="6522415" cy="4663440"/>
-          </a:xfrm>
-          <a:prstGeom prst="rect">
-            <a:avLst/>
-          </a:prstGeom>
-          <a:noFill/>
-          <a:ln/>
-        </p:spPr>
-        <p:txBody>
-          <a:bodyPr wrap="square" lIns="0" tIns="0" rIns="0" bIns="0" rtlCol="0" anchor="t"/>
-          <a:lstStyle/>
-          <a:p>
-            <a:pPr algn="l" marL="342900" indent="-342900">
-              <a:spcAft>
-                <a:spcPts val="800"/>
-              </a:spcAft>
-              <a:buSzPct val="100000"/>
-              <a:buChar char="•"/>
-            </a:pPr>
-            <a:r>
-              <a:rPr lang="en-US" sz="1800" dirty="0">
-                <a:solidFill>
-                  <a:srgbClr val="111111"/>
-                </a:solidFill>
-                <a:latin typeface="Calibri" pitchFamily="34" charset="0"/>
-                <a:ea typeface="Calibri" pitchFamily="34" charset="-122"/>
-                <a:cs typeface="Calibri" pitchFamily="34" charset="-120"/>
-              </a:rPr>
-              <a:t>Geography Syllabus for Sixth Forms (Lower and Upper Sixth), MINESEC, 2019 — Module 1 (Meteorology, Climatology &amp; Hydrology).</a:t>
-            </a:r>
-            <a:endParaRPr lang="en-US" sz="1800" dirty="0"/>
-          </a:p>
-          <a:p>
-            <a:pPr algn="l" marL="342900" indent="-342900">
-              <a:spcAft>
-                <a:spcPts val="800"/>
-              </a:spcAft>
-              <a:buSzPct val="100000"/>
-              <a:buChar char="•"/>
-            </a:pPr>
-            <a:r>
-              <a:rPr lang="en-US" sz="1800" dirty="0">
-                <a:solidFill>
-                  <a:srgbClr val="111111"/>
-                </a:solidFill>
-                <a:latin typeface="Calibri" pitchFamily="34" charset="0"/>
-                <a:ea typeface="Calibri" pitchFamily="34" charset="-122"/>
-                <a:cs typeface="Calibri" pitchFamily="34" charset="-120"/>
-              </a:rPr>
-              <a:t>Teacher's course notes: Mr KAMDEM E., Meteorology (LSA), GBHS Garoua, 2026.</a:t>
-            </a:r>
-            <a:endParaRPr lang="en-US" sz="1800" dirty="0"/>
-          </a:p>
-          <a:p>
-            <a:pPr algn="l" marL="342900" indent="-342900">
-              <a:spcAft>
-                <a:spcPts val="800"/>
-              </a:spcAft>
-              <a:buSzPct val="100000"/>
-              <a:buChar char="•"/>
-            </a:pPr>
-            <a:r>
-              <a:rPr lang="en-US" sz="1800" dirty="0">
-                <a:solidFill>
-                  <a:srgbClr val="111111"/>
-                </a:solidFill>
-                <a:latin typeface="Calibri" pitchFamily="34" charset="0"/>
-                <a:ea typeface="Calibri" pitchFamily="34" charset="-122"/>
-                <a:cs typeface="Calibri" pitchFamily="34" charset="-120"/>
-              </a:rPr>
-              <a:t>Photo, Activity 2: “Kilimanjaro” by ian 1602, CC BY-NC 2.0, via Flickr (https://www.flickr.com/photos/98181641@N00/2179855841)</a:t>
-            </a:r>
-            <a:endParaRPr lang="en-US" sz="1800" dirty="0"/>
-          </a:p>
-          <a:p>
-            <a:pPr algn="l" marL="342900" indent="-342900">
-              <a:spcAft>
-                <a:spcPts val="800"/>
-              </a:spcAft>
-              <a:buSzPct val="100000"/>
-              <a:buChar char="•"/>
-            </a:pPr>
-            <a:r>
-              <a:rPr lang="en-US" sz="1800" dirty="0">
-                <a:solidFill>
-                  <a:srgbClr val="111111"/>
-                </a:solidFill>
-                <a:latin typeface="Calibri" pitchFamily="34" charset="0"/>
-                <a:ea typeface="Calibri" pitchFamily="34" charset="-122"/>
-                <a:cs typeface="Calibri" pitchFamily="34" charset="-120"/>
-              </a:rPr>
-              <a:t>Diagrams and animations: drawn for this lesson (Geography Department).</a:t>
-            </a:r>
-            <a:endParaRPr lang="en-US" sz="1800" dirty="0"/>
-          </a:p>
-        </p:txBody>
-      </p:sp>
-      <p:sp>
-        <p:nvSpPr>
-          <p:cNvPr id="25" name="Slide Number Placeholder 0"/>
-          <p:cNvSpPr>
-            <a:spLocks noGrp="1"/>
-          </p:cNvSpPr>
-          <p:nvPr>
-            <p:ph type="sldNum" sz="quarter" idx="4294967295"/>
-          </p:nvPr>
-        </p:nvSpPr>
-        <p:spPr>
-          <a:xfrm>
-            <a:off x="27432" y="91440"/>
-            <a:ext cx="585216" cy="475488"/>
-          </a:xfrm>
-          <a:prstGeom prst="rect">
-            <a:avLst/>
-          </a:prstGeom>
-          <a:extLst>
-            <a:ext uri="{C572A759-6A51-4108-AA02-DFA0A04FC94B}">
-              <ma14:wrappingTextBoxFlag xmlns:ma14="http://schemas.microsoft.com/office/mac/drawingml/2011/main" val="0"/>
-            </a:ext>
-          </a:extLst>
-        </p:spPr>
-        <p:txBody>
-          <a:bodyPr/>
-          <a:lstStyle>
-            <a:lvl1pPr>
-              <a:defRPr sz="2000">
-                <a:solidFill>
-                  <a:srgbClr val="FFFFFF"/>
-                </a:solidFill>
-                <a:latin typeface="Calibri"/>
-                <a:ea typeface="Calibri"/>
-                <a:cs typeface="Calibri"/>
-              </a:defRPr>
-            </a:lvl1pPr>
-          </a:lstStyle>
-          <a:p>
-            <a:pPr algn="ctr"/>
-            <a:fld id="{F7021451-1387-4CA6-816F-3879F97B5CBC}" type="slidenum">
-              <a:rPr b="1" lang="en-US"/>
-              <a:t>60</a:t>
+              <a:t>65</a:t>
             </a:fld>
             <a:endParaRPr lang="en-US"/>
           </a:p>
